--- a/skills/presentation-template-library/skills/artifact-template-river-handbook/assets/reference.pptx
+++ b/skills/presentation-template-library/skills/artifact-template-river-handbook/assets/reference.pptx
@@ -224,7 +224,7 @@
           <p:nvPr/>
         </p:nvPicPr>
         <p:blipFill>
-          <a:blip xmlns:r="http://schemas.openxmlformats.org/officeDocument/2006/relationships" xmlns:a="http://schemas.openxmlformats.org/drawingml/2006/main" r:embed="rIdOfficeKitImage59ee3aa5202fd02f_1"/>
+          <a:blip xmlns:r="http://schemas.openxmlformats.org/officeDocument/2006/relationships" xmlns:a="http://schemas.openxmlformats.org/drawingml/2006/main" r:embed="rIdOfficeKitImageaeb6f74d36d260d0_1"/>
           <a:srcRect xmlns:a="http://schemas.openxmlformats.org/drawingml/2006/main" l="0" t="34180" r="0" b="34180"/>
           <a:stretch xmlns:a="http://schemas.openxmlformats.org/drawingml/2006/main">
             <a:fillRect/>
@@ -596,299 +596,9 @@
           </a:p>
         </p:txBody>
       </p:sp>
-      <p:sp>
-        <p:nvSpPr>
-          <p:cNvPr id="3" name="argument-top-rule"/>
-          <p:cNvSpPr/>
-          <p:nvPr/>
-        </p:nvSpPr>
-        <p:spPr>
-          <a:xfrm xmlns:a="http://schemas.openxmlformats.org/drawingml/2006/main">
-            <a:off x="838200" y="666750"/>
-            <a:ext cx="13563600" cy="0"/>
-          </a:xfrm>
-          <a:prstGeom xmlns:a="http://schemas.openxmlformats.org/drawingml/2006/main" prst="line">
-            <a:avLst/>
-          </a:prstGeom>
-          <a:noFill xmlns:a="http://schemas.openxmlformats.org/drawingml/2006/main"/>
-          <a:ln xmlns:a="http://schemas.openxmlformats.org/drawingml/2006/main" w="38100">
-            <a:solidFill>
-              <a:srgbClr val="277B91"/>
-            </a:solidFill>
-            <a:prstDash val="solid"/>
-          </a:ln>
-        </p:spPr>
-        <p:txBody>
-          <a:bodyPr xmlns:a="http://schemas.openxmlformats.org/drawingml/2006/main" wrap="square" lIns="0" tIns="0" rIns="0" bIns="0" anchor="t"/>
-          <a:lstStyle xmlns:a="http://schemas.openxmlformats.org/drawingml/2006/main"/>
-          <a:p xmlns:a="http://schemas.openxmlformats.org/drawingml/2006/main">
-            <a:r>
-              <a:rPr lang="en-US"/>
-              <a:t/>
-            </a:r>
-            <a:endParaRPr lang="en-US"/>
-          </a:p>
-        </p:txBody>
-      </p:sp>
-      <p:sp>
-        <p:nvSpPr>
-          <p:cNvPr id="4" name="RIVER HANDBOOK · ARGUMENT"/>
-          <p:cNvSpPr txBox="1"/>
-          <p:nvPr/>
-        </p:nvSpPr>
-        <p:spPr>
-          <a:xfrm xmlns:a="http://schemas.openxmlformats.org/drawingml/2006/main">
-            <a:off x="914400" y="895350"/>
-            <a:ext cx="7239000" cy="228600"/>
-          </a:xfrm>
-          <a:prstGeom xmlns:a="http://schemas.openxmlformats.org/drawingml/2006/main" prst="rect">
-            <a:avLst/>
-          </a:prstGeom>
-          <a:noFill xmlns:a="http://schemas.openxmlformats.org/drawingml/2006/main"/>
-          <a:ln xmlns:a="http://schemas.openxmlformats.org/drawingml/2006/main" w="0">
-            <a:noFill/>
-          </a:ln>
-        </p:spPr>
-        <p:txBody>
-          <a:bodyPr xmlns:a="http://schemas.openxmlformats.org/drawingml/2006/main" wrap="square" lIns="0" tIns="0" rIns="0" bIns="0" anchor="t"/>
-          <a:lstStyle xmlns:a="http://schemas.openxmlformats.org/drawingml/2006/main"/>
-          <a:p xmlns:a="http://schemas.openxmlformats.org/drawingml/2006/main">
-            <a:r>
-              <a:rPr lang="en-US" sz="1200" b="1">
-                <a:solidFill>
-                  <a:srgbClr val="277B91"/>
-                </a:solidFill>
-                <a:latin typeface="Arial"/>
-                <a:ea typeface="Arial"/>
-              </a:rPr>
-              <a:t>RIVER HANDBOOK · ARGUMENT</a:t>
-            </a:r>
-            <a:endParaRPr lang="en-US"/>
-          </a:p>
-        </p:txBody>
-      </p:sp>
-      <p:sp>
-        <p:nvSpPr>
-          <p:cNvPr id="5" name="argument-title"/>
-          <p:cNvSpPr txBox="1"/>
-          <p:nvPr/>
-        </p:nvSpPr>
-        <p:spPr>
-          <a:xfrm xmlns:a="http://schemas.openxmlformats.org/drawingml/2006/main">
-            <a:off x="914400" y="1314450"/>
-            <a:ext cx="11811000" cy="552450"/>
-          </a:xfrm>
-          <a:prstGeom xmlns:a="http://schemas.openxmlformats.org/drawingml/2006/main" prst="rect">
-            <a:avLst/>
-          </a:prstGeom>
-          <a:noFill xmlns:a="http://schemas.openxmlformats.org/drawingml/2006/main"/>
-          <a:ln xmlns:a="http://schemas.openxmlformats.org/drawingml/2006/main" w="0">
-            <a:noFill/>
-          </a:ln>
-        </p:spPr>
-        <p:txBody>
-          <a:bodyPr xmlns:a="http://schemas.openxmlformats.org/drawingml/2006/main" wrap="square" lIns="0" tIns="0" rIns="0" bIns="0" anchor="t"/>
-          <a:lstStyle xmlns:a="http://schemas.openxmlformats.org/drawingml/2006/main"/>
-          <a:p xmlns:a="http://schemas.openxmlformats.org/drawingml/2006/main">
-            <a:r>
-              <a:rPr lang="en-US" sz="2850" b="1">
-                <a:solidFill>
-                  <a:srgbClr val="243535"/>
-                </a:solidFill>
-                <a:latin typeface="Arial"/>
-                <a:ea typeface="Arial"/>
-              </a:rPr>
-              <a:t>The proposition is the page's visual center</a:t>
-            </a:r>
-            <a:endParaRPr lang="en-US"/>
-          </a:p>
-        </p:txBody>
-      </p:sp>
-      <p:sp>
-        <p:nvSpPr>
-          <p:cNvPr id="6" name="argument-basis"/>
-          <p:cNvSpPr txBox="1"/>
-          <p:nvPr/>
-        </p:nvSpPr>
-        <p:spPr>
-          <a:xfrm xmlns:a="http://schemas.openxmlformats.org/drawingml/2006/main">
-            <a:off x="952500" y="1981200"/>
-            <a:ext cx="10477500" cy="266700"/>
-          </a:xfrm>
-          <a:prstGeom xmlns:a="http://schemas.openxmlformats.org/drawingml/2006/main" prst="rect">
-            <a:avLst/>
-          </a:prstGeom>
-          <a:noFill xmlns:a="http://schemas.openxmlformats.org/drawingml/2006/main"/>
-          <a:ln xmlns:a="http://schemas.openxmlformats.org/drawingml/2006/main" w="0">
-            <a:noFill/>
-          </a:ln>
-        </p:spPr>
-        <p:txBody>
-          <a:bodyPr xmlns:a="http://schemas.openxmlformats.org/drawingml/2006/main" wrap="square" lIns="0" tIns="0" rIns="0" bIns="0" anchor="t"/>
-          <a:lstStyle xmlns:a="http://schemas.openxmlformats.org/drawingml/2006/main"/>
-          <a:p xmlns:a="http://schemas.openxmlformats.org/drawingml/2006/main">
-            <a:r>
-              <a:rPr lang="en-US" sz="1350">
-                <a:solidFill>
-                  <a:srgbClr val="8D928C"/>
-                </a:solidFill>
-                <a:latin typeface="Arial"/>
-                <a:ea typeface="Arial"/>
-              </a:rPr>
-              <a:t>Scale, crop, and color invite attention without hiding the evidence.</a:t>
-            </a:r>
-            <a:endParaRPr lang="en-US"/>
-          </a:p>
-        </p:txBody>
-      </p:sp>
-      <p:sp>
-        <p:nvSpPr>
-          <p:cNvPr id="7" name="argument-rule"/>
-          <p:cNvSpPr/>
-          <p:nvPr/>
-        </p:nvSpPr>
-        <p:spPr>
-          <a:xfrm xmlns:a="http://schemas.openxmlformats.org/drawingml/2006/main">
-            <a:off x="914400" y="2457450"/>
-            <a:ext cx="13411200" cy="0"/>
-          </a:xfrm>
-          <a:prstGeom xmlns:a="http://schemas.openxmlformats.org/drawingml/2006/main" prst="line">
-            <a:avLst/>
-          </a:prstGeom>
-          <a:noFill xmlns:a="http://schemas.openxmlformats.org/drawingml/2006/main"/>
-          <a:ln xmlns:a="http://schemas.openxmlformats.org/drawingml/2006/main" w="25400">
-            <a:solidFill>
-              <a:srgbClr val="8D928C"/>
-            </a:solidFill>
-            <a:prstDash val="solid"/>
-          </a:ln>
-        </p:spPr>
-        <p:txBody>
-          <a:bodyPr xmlns:a="http://schemas.openxmlformats.org/drawingml/2006/main" wrap="square" lIns="0" tIns="0" rIns="0" bIns="0" anchor="t"/>
-          <a:lstStyle xmlns:a="http://schemas.openxmlformats.org/drawingml/2006/main"/>
-          <a:p xmlns:a="http://schemas.openxmlformats.org/drawingml/2006/main">
-            <a:r>
-              <a:rPr lang="en-US"/>
-              <a:t/>
-            </a:r>
-            <a:endParaRPr lang="en-US"/>
-          </a:p>
-        </p:txBody>
-      </p:sp>
-      <p:sp>
-        <p:nvSpPr>
-          <p:cNvPr id="8" name="promotion-kicker"/>
-          <p:cNvSpPr txBox="1"/>
-          <p:nvPr/>
-        </p:nvSpPr>
-        <p:spPr>
-          <a:xfrm xmlns:a="http://schemas.openxmlformats.org/drawingml/2006/main">
-            <a:off x="1104900" y="3352800"/>
-            <a:ext cx="2857500" cy="228600"/>
-          </a:xfrm>
-          <a:prstGeom xmlns:a="http://schemas.openxmlformats.org/drawingml/2006/main" prst="rect">
-            <a:avLst/>
-          </a:prstGeom>
-          <a:noFill xmlns:a="http://schemas.openxmlformats.org/drawingml/2006/main"/>
-          <a:ln xmlns:a="http://schemas.openxmlformats.org/drawingml/2006/main" w="0">
-            <a:noFill/>
-          </a:ln>
-        </p:spPr>
-        <p:txBody>
-          <a:bodyPr xmlns:a="http://schemas.openxmlformats.org/drawingml/2006/main" wrap="square" lIns="0" tIns="0" rIns="0" bIns="0" anchor="t"/>
-          <a:lstStyle xmlns:a="http://schemas.openxmlformats.org/drawingml/2006/main"/>
-          <a:p xmlns:a="http://schemas.openxmlformats.org/drawingml/2006/main">
-            <a:r>
-              <a:rPr lang="en-US" sz="1125" b="1">
-                <a:solidFill>
-                  <a:srgbClr val="277B91"/>
-                </a:solidFill>
-                <a:latin typeface="Arial"/>
-                <a:ea typeface="Arial"/>
-              </a:rPr>
-              <a:t>ONE PROPOSITION</a:t>
-            </a:r>
-            <a:endParaRPr lang="en-US"/>
-          </a:p>
-        </p:txBody>
-      </p:sp>
-      <p:sp>
-        <p:nvSpPr>
-          <p:cNvPr id="9" name="promotion-headline"/>
-          <p:cNvSpPr txBox="1"/>
-          <p:nvPr/>
-        </p:nvSpPr>
-        <p:spPr>
-          <a:xfrm xmlns:a="http://schemas.openxmlformats.org/drawingml/2006/main">
-            <a:off x="1104900" y="3790950"/>
-            <a:ext cx="6477000" cy="723900"/>
-          </a:xfrm>
-          <a:prstGeom xmlns:a="http://schemas.openxmlformats.org/drawingml/2006/main" prst="rect">
-            <a:avLst/>
-          </a:prstGeom>
-          <a:noFill xmlns:a="http://schemas.openxmlformats.org/drawingml/2006/main"/>
-          <a:ln xmlns:a="http://schemas.openxmlformats.org/drawingml/2006/main" w="0">
-            <a:noFill/>
-          </a:ln>
-        </p:spPr>
-        <p:txBody>
-          <a:bodyPr xmlns:a="http://schemas.openxmlformats.org/drawingml/2006/main" wrap="square" lIns="0" tIns="0" rIns="0" bIns="0" anchor="t"/>
-          <a:lstStyle xmlns:a="http://schemas.openxmlformats.org/drawingml/2006/main"/>
-          <a:p xmlns:a="http://schemas.openxmlformats.org/drawingml/2006/main">
-            <a:r>
-              <a:rPr lang="en-US" sz="2625" b="1">
-                <a:solidFill>
-                  <a:srgbClr val="243535"/>
-                </a:solidFill>
-                <a:latin typeface="Arial"/>
-                <a:ea typeface="Arial"/>
-              </a:rPr>
-              <a:t>Make the next action visible.</a:t>
-            </a:r>
-            <a:endParaRPr lang="en-US"/>
-          </a:p>
-        </p:txBody>
-      </p:sp>
-      <p:sp>
-        <p:nvSpPr>
-          <p:cNvPr id="10" name="promotion-body"/>
-          <p:cNvSpPr txBox="1"/>
-          <p:nvPr/>
-        </p:nvSpPr>
-        <p:spPr>
-          <a:xfrm xmlns:a="http://schemas.openxmlformats.org/drawingml/2006/main">
-            <a:off x="1104900" y="4762500"/>
-            <a:ext cx="6191250" cy="457200"/>
-          </a:xfrm>
-          <a:prstGeom xmlns:a="http://schemas.openxmlformats.org/drawingml/2006/main" prst="rect">
-            <a:avLst/>
-          </a:prstGeom>
-          <a:noFill xmlns:a="http://schemas.openxmlformats.org/drawingml/2006/main"/>
-          <a:ln xmlns:a="http://schemas.openxmlformats.org/drawingml/2006/main" w="0">
-            <a:noFill/>
-          </a:ln>
-        </p:spPr>
-        <p:txBody>
-          <a:bodyPr xmlns:a="http://schemas.openxmlformats.org/drawingml/2006/main" wrap="square" lIns="0" tIns="0" rIns="0" bIns="0" anchor="t"/>
-          <a:lstStyle xmlns:a="http://schemas.openxmlformats.org/drawingml/2006/main"/>
-          <a:p xmlns:a="http://schemas.openxmlformats.org/drawingml/2006/main">
-            <a:r>
-              <a:rPr lang="en-US" sz="1575">
-                <a:solidFill>
-                  <a:srgbClr val="243535"/>
-                </a:solidFill>
-                <a:latin typeface="Arial"/>
-                <a:ea typeface="Arial"/>
-              </a:rPr>
-              <a:t>A clear invitation earns attention when evidence and access arrive together.</a:t>
-            </a:r>
-            <a:endParaRPr lang="en-US"/>
-          </a:p>
-        </p:txBody>
-      </p:sp>
       <p:pic>
         <p:nvPicPr>
-          <p:cNvPr id="11" name="promotion-hero-frame">
+          <p:cNvPr id="3" name="argument-photo-band">
             <a:extLst xmlns:a="http://schemas.openxmlformats.org/drawingml/2006/main">
               <a:ext uri="{C183D7F6-B498-43B3-948B-1728B52AA6E4}">
                 <adec:decorative xmlns:adec="http://schemas.microsoft.com/office/drawing/2017/decorative" val="1"/>
@@ -899,14 +609,337 @@
           <p:nvPr/>
         </p:nvPicPr>
         <p:blipFill>
-          <a:blip xmlns:r="http://schemas.openxmlformats.org/officeDocument/2006/relationships" xmlns:a="http://schemas.openxmlformats.org/drawingml/2006/main" r:embed="rIdOfficeKitImageaeb6f74d36d260d0_1"/>
+          <a:blip xmlns:r="http://schemas.openxmlformats.org/officeDocument/2006/relationships" xmlns:a="http://schemas.openxmlformats.org/drawingml/2006/main" r:embed="rIdOfficeKitImage13db13f70d7843cc_1"/>
+          <a:srcRect xmlns:a="http://schemas.openxmlformats.org/drawingml/2006/main" l="0" t="47258" r="0" b="47258"/>
+          <a:stretch xmlns:a="http://schemas.openxmlformats.org/drawingml/2006/main">
+            <a:fillRect/>
+          </a:stretch>
+        </p:blipFill>
+        <p:spPr>
+          <a:xfrm xmlns:a="http://schemas.openxmlformats.org/drawingml/2006/main" flipH="1">
+            <a:off x="0" y="0"/>
+            <a:ext cx="15240000" cy="1485900"/>
+          </a:xfrm>
+          <a:prstGeom xmlns:a="http://schemas.openxmlformats.org/drawingml/2006/main" prst="rect">
+            <a:avLst/>
+          </a:prstGeom>
+        </p:spPr>
+      </p:pic>
+      <p:sp>
+        <p:nvSpPr>
+          <p:cNvPr id="4" name="argument-photo-scrim"/>
+          <p:cNvSpPr/>
+          <p:nvPr/>
+        </p:nvSpPr>
+        <p:spPr>
+          <a:xfrm xmlns:a="http://schemas.openxmlformats.org/drawingml/2006/main">
+            <a:off x="0" y="0"/>
+            <a:ext cx="15240000" cy="1485900"/>
+          </a:xfrm>
+          <a:prstGeom xmlns:a="http://schemas.openxmlformats.org/drawingml/2006/main" prst="rect">
+            <a:avLst/>
+          </a:prstGeom>
+          <a:solidFill xmlns:a="http://schemas.openxmlformats.org/drawingml/2006/main">
+            <a:srgbClr val="243535">
+              <a:alpha val="62000"/>
+            </a:srgbClr>
+          </a:solidFill>
+          <a:ln xmlns:a="http://schemas.openxmlformats.org/drawingml/2006/main" w="0">
+            <a:solidFill>
+              <a:srgbClr val="243535"/>
+            </a:solidFill>
+            <a:prstDash val="solid"/>
+          </a:ln>
+        </p:spPr>
+        <p:txBody>
+          <a:bodyPr xmlns:a="http://schemas.openxmlformats.org/drawingml/2006/main" wrap="square" lIns="0" tIns="0" rIns="0" bIns="0" anchor="t"/>
+          <a:lstStyle xmlns:a="http://schemas.openxmlformats.org/drawingml/2006/main"/>
+          <a:p xmlns:a="http://schemas.openxmlformats.org/drawingml/2006/main">
+            <a:r>
+              <a:rPr lang="en-US"/>
+              <a:t/>
+            </a:r>
+            <a:endParaRPr lang="en-US"/>
+          </a:p>
+        </p:txBody>
+      </p:sp>
+      <p:sp>
+        <p:nvSpPr>
+          <p:cNvPr id="5" name="argument-photo-rule"/>
+          <p:cNvSpPr/>
+          <p:nvPr/>
+        </p:nvSpPr>
+        <p:spPr>
+          <a:xfrm xmlns:a="http://schemas.openxmlformats.org/drawingml/2006/main">
+            <a:off x="914400" y="1438275"/>
+            <a:ext cx="13411200" cy="0"/>
+          </a:xfrm>
+          <a:prstGeom xmlns:a="http://schemas.openxmlformats.org/drawingml/2006/main" prst="line">
+            <a:avLst/>
+          </a:prstGeom>
+          <a:noFill xmlns:a="http://schemas.openxmlformats.org/drawingml/2006/main"/>
+          <a:ln xmlns:a="http://schemas.openxmlformats.org/drawingml/2006/main" w="38100">
+            <a:solidFill>
+              <a:srgbClr val="277B91"/>
+            </a:solidFill>
+            <a:prstDash val="solid"/>
+          </a:ln>
+        </p:spPr>
+        <p:txBody>
+          <a:bodyPr xmlns:a="http://schemas.openxmlformats.org/drawingml/2006/main" wrap="square" lIns="0" tIns="0" rIns="0" bIns="0" anchor="t"/>
+          <a:lstStyle xmlns:a="http://schemas.openxmlformats.org/drawingml/2006/main"/>
+          <a:p xmlns:a="http://schemas.openxmlformats.org/drawingml/2006/main">
+            <a:r>
+              <a:rPr lang="en-US"/>
+              <a:t/>
+            </a:r>
+            <a:endParaRPr lang="en-US"/>
+          </a:p>
+        </p:txBody>
+      </p:sp>
+      <p:sp>
+        <p:nvSpPr>
+          <p:cNvPr id="6" name="RIVER HANDBOOK · ARGUMENT"/>
+          <p:cNvSpPr txBox="1"/>
+          <p:nvPr/>
+        </p:nvSpPr>
+        <p:spPr>
+          <a:xfrm xmlns:a="http://schemas.openxmlformats.org/drawingml/2006/main">
+            <a:off x="914400" y="228600"/>
+            <a:ext cx="9525000" cy="190500"/>
+          </a:xfrm>
+          <a:prstGeom xmlns:a="http://schemas.openxmlformats.org/drawingml/2006/main" prst="rect">
+            <a:avLst/>
+          </a:prstGeom>
+          <a:noFill xmlns:a="http://schemas.openxmlformats.org/drawingml/2006/main"/>
+          <a:ln xmlns:a="http://schemas.openxmlformats.org/drawingml/2006/main" w="0">
+            <a:noFill/>
+          </a:ln>
+        </p:spPr>
+        <p:txBody>
+          <a:bodyPr xmlns:a="http://schemas.openxmlformats.org/drawingml/2006/main" wrap="square" lIns="0" tIns="0" rIns="0" bIns="0" anchor="t"/>
+          <a:lstStyle xmlns:a="http://schemas.openxmlformats.org/drawingml/2006/main"/>
+          <a:p xmlns:a="http://schemas.openxmlformats.org/drawingml/2006/main">
+            <a:r>
+              <a:rPr lang="en-US" sz="1050" b="1">
+                <a:solidFill>
+                  <a:srgbClr val="277B91"/>
+                </a:solidFill>
+                <a:latin typeface="Arial"/>
+                <a:ea typeface="Arial"/>
+              </a:rPr>
+              <a:t>RIVER HANDBOOK · ARGUMENT</a:t>
+            </a:r>
+            <a:endParaRPr lang="en-US"/>
+          </a:p>
+        </p:txBody>
+      </p:sp>
+      <p:sp>
+        <p:nvSpPr>
+          <p:cNvPr id="7" name="argument-title"/>
+          <p:cNvSpPr txBox="1"/>
+          <p:nvPr/>
+        </p:nvSpPr>
+        <p:spPr>
+          <a:xfrm xmlns:a="http://schemas.openxmlformats.org/drawingml/2006/main">
+            <a:off x="914400" y="495300"/>
+            <a:ext cx="12001500" cy="457200"/>
+          </a:xfrm>
+          <a:prstGeom xmlns:a="http://schemas.openxmlformats.org/drawingml/2006/main" prst="rect">
+            <a:avLst/>
+          </a:prstGeom>
+          <a:noFill xmlns:a="http://schemas.openxmlformats.org/drawingml/2006/main"/>
+          <a:ln xmlns:a="http://schemas.openxmlformats.org/drawingml/2006/main" w="0">
+            <a:noFill/>
+          </a:ln>
+        </p:spPr>
+        <p:txBody>
+          <a:bodyPr xmlns:a="http://schemas.openxmlformats.org/drawingml/2006/main" wrap="square" lIns="0" tIns="0" rIns="0" bIns="0" anchor="t"/>
+          <a:lstStyle xmlns:a="http://schemas.openxmlformats.org/drawingml/2006/main"/>
+          <a:p xmlns:a="http://schemas.openxmlformats.org/drawingml/2006/main">
+            <a:r>
+              <a:rPr lang="en-US" sz="2550" b="1">
+                <a:solidFill>
+                  <a:srgbClr val="FFFFFF"/>
+                </a:solidFill>
+                <a:latin typeface="Arial"/>
+                <a:ea typeface="Arial"/>
+              </a:rPr>
+              <a:t>The proposition is the page's visual center</a:t>
+            </a:r>
+            <a:endParaRPr lang="en-US"/>
+          </a:p>
+        </p:txBody>
+      </p:sp>
+      <p:sp>
+        <p:nvSpPr>
+          <p:cNvPr id="8" name="argument-basis"/>
+          <p:cNvSpPr txBox="1"/>
+          <p:nvPr/>
+        </p:nvSpPr>
+        <p:spPr>
+          <a:xfrm xmlns:a="http://schemas.openxmlformats.org/drawingml/2006/main">
+            <a:off x="952500" y="1066800"/>
+            <a:ext cx="11049000" cy="228600"/>
+          </a:xfrm>
+          <a:prstGeom xmlns:a="http://schemas.openxmlformats.org/drawingml/2006/main" prst="rect">
+            <a:avLst/>
+          </a:prstGeom>
+          <a:noFill xmlns:a="http://schemas.openxmlformats.org/drawingml/2006/main"/>
+          <a:ln xmlns:a="http://schemas.openxmlformats.org/drawingml/2006/main" w="0">
+            <a:noFill/>
+          </a:ln>
+        </p:spPr>
+        <p:txBody>
+          <a:bodyPr xmlns:a="http://schemas.openxmlformats.org/drawingml/2006/main" wrap="square" lIns="0" tIns="0" rIns="0" bIns="0" anchor="t"/>
+          <a:lstStyle xmlns:a="http://schemas.openxmlformats.org/drawingml/2006/main"/>
+          <a:p xmlns:a="http://schemas.openxmlformats.org/drawingml/2006/main">
+            <a:r>
+              <a:rPr lang="en-US" sz="1200">
+                <a:solidFill>
+                  <a:srgbClr val="F0F3F2"/>
+                </a:solidFill>
+                <a:latin typeface="Arial"/>
+                <a:ea typeface="Arial"/>
+              </a:rPr>
+              <a:t>Scale, crop, and color invite attention without hiding the evidence.</a:t>
+            </a:r>
+            <a:endParaRPr lang="en-US"/>
+          </a:p>
+        </p:txBody>
+      </p:sp>
+      <p:sp>
+        <p:nvSpPr>
+          <p:cNvPr id="9" name="promotion-kicker"/>
+          <p:cNvSpPr txBox="1"/>
+          <p:nvPr/>
+        </p:nvSpPr>
+        <p:spPr>
+          <a:xfrm xmlns:a="http://schemas.openxmlformats.org/drawingml/2006/main">
+            <a:off x="1104900" y="3352800"/>
+            <a:ext cx="2857500" cy="228600"/>
+          </a:xfrm>
+          <a:prstGeom xmlns:a="http://schemas.openxmlformats.org/drawingml/2006/main" prst="rect">
+            <a:avLst/>
+          </a:prstGeom>
+          <a:noFill xmlns:a="http://schemas.openxmlformats.org/drawingml/2006/main"/>
+          <a:ln xmlns:a="http://schemas.openxmlformats.org/drawingml/2006/main" w="0">
+            <a:noFill/>
+          </a:ln>
+        </p:spPr>
+        <p:txBody>
+          <a:bodyPr xmlns:a="http://schemas.openxmlformats.org/drawingml/2006/main" wrap="square" lIns="0" tIns="0" rIns="0" bIns="0" anchor="t"/>
+          <a:lstStyle xmlns:a="http://schemas.openxmlformats.org/drawingml/2006/main"/>
+          <a:p xmlns:a="http://schemas.openxmlformats.org/drawingml/2006/main">
+            <a:r>
+              <a:rPr lang="en-US" sz="1125" b="1">
+                <a:solidFill>
+                  <a:srgbClr val="277B91"/>
+                </a:solidFill>
+                <a:latin typeface="Arial"/>
+                <a:ea typeface="Arial"/>
+              </a:rPr>
+              <a:t>ONE PROPOSITION</a:t>
+            </a:r>
+            <a:endParaRPr lang="en-US"/>
+          </a:p>
+        </p:txBody>
+      </p:sp>
+      <p:sp>
+        <p:nvSpPr>
+          <p:cNvPr id="10" name="promotion-headline"/>
+          <p:cNvSpPr txBox="1"/>
+          <p:nvPr/>
+        </p:nvSpPr>
+        <p:spPr>
+          <a:xfrm xmlns:a="http://schemas.openxmlformats.org/drawingml/2006/main">
+            <a:off x="1104900" y="3790950"/>
+            <a:ext cx="6477000" cy="723900"/>
+          </a:xfrm>
+          <a:prstGeom xmlns:a="http://schemas.openxmlformats.org/drawingml/2006/main" prst="rect">
+            <a:avLst/>
+          </a:prstGeom>
+          <a:noFill xmlns:a="http://schemas.openxmlformats.org/drawingml/2006/main"/>
+          <a:ln xmlns:a="http://schemas.openxmlformats.org/drawingml/2006/main" w="0">
+            <a:noFill/>
+          </a:ln>
+        </p:spPr>
+        <p:txBody>
+          <a:bodyPr xmlns:a="http://schemas.openxmlformats.org/drawingml/2006/main" wrap="square" lIns="0" tIns="0" rIns="0" bIns="0" anchor="t"/>
+          <a:lstStyle xmlns:a="http://schemas.openxmlformats.org/drawingml/2006/main"/>
+          <a:p xmlns:a="http://schemas.openxmlformats.org/drawingml/2006/main">
+            <a:r>
+              <a:rPr lang="en-US" sz="2625" b="1">
+                <a:solidFill>
+                  <a:srgbClr val="243535"/>
+                </a:solidFill>
+                <a:latin typeface="Arial"/>
+                <a:ea typeface="Arial"/>
+              </a:rPr>
+              <a:t>Make the next action visible.</a:t>
+            </a:r>
+            <a:endParaRPr lang="en-US"/>
+          </a:p>
+        </p:txBody>
+      </p:sp>
+      <p:sp>
+        <p:nvSpPr>
+          <p:cNvPr id="11" name="promotion-body"/>
+          <p:cNvSpPr txBox="1"/>
+          <p:nvPr/>
+        </p:nvSpPr>
+        <p:spPr>
+          <a:xfrm xmlns:a="http://schemas.openxmlformats.org/drawingml/2006/main">
+            <a:off x="1104900" y="4762500"/>
+            <a:ext cx="6191250" cy="457200"/>
+          </a:xfrm>
+          <a:prstGeom xmlns:a="http://schemas.openxmlformats.org/drawingml/2006/main" prst="rect">
+            <a:avLst/>
+          </a:prstGeom>
+          <a:noFill xmlns:a="http://schemas.openxmlformats.org/drawingml/2006/main"/>
+          <a:ln xmlns:a="http://schemas.openxmlformats.org/drawingml/2006/main" w="0">
+            <a:noFill/>
+          </a:ln>
+        </p:spPr>
+        <p:txBody>
+          <a:bodyPr xmlns:a="http://schemas.openxmlformats.org/drawingml/2006/main" wrap="square" lIns="0" tIns="0" rIns="0" bIns="0" anchor="t"/>
+          <a:lstStyle xmlns:a="http://schemas.openxmlformats.org/drawingml/2006/main"/>
+          <a:p xmlns:a="http://schemas.openxmlformats.org/drawingml/2006/main">
+            <a:r>
+              <a:rPr lang="en-US" sz="1575">
+                <a:solidFill>
+                  <a:srgbClr val="243535"/>
+                </a:solidFill>
+                <a:latin typeface="Arial"/>
+                <a:ea typeface="Arial"/>
+              </a:rPr>
+              <a:t>A clear invitation earns attention when evidence and access arrive together.</a:t>
+            </a:r>
+            <a:endParaRPr lang="en-US"/>
+          </a:p>
+        </p:txBody>
+      </p:sp>
+      <p:pic>
+        <p:nvPicPr>
+          <p:cNvPr id="12" name="promotion-hero-frame">
+            <a:extLst xmlns:a="http://schemas.openxmlformats.org/drawingml/2006/main">
+              <a:ext uri="{C183D7F6-B498-43B3-948B-1728B52AA6E4}">
+                <adec:decorative xmlns:adec="http://schemas.microsoft.com/office/drawing/2017/decorative" val="1"/>
+              </a:ext>
+            </a:extLst>
+          </p:cNvPr>
+          <p:cNvPicPr/>
+          <p:nvPr/>
+        </p:nvPicPr>
+        <p:blipFill>
+          <a:blip xmlns:r="http://schemas.openxmlformats.org/officeDocument/2006/relationships" xmlns:a="http://schemas.openxmlformats.org/drawingml/2006/main" r:embed="rIdOfficeKitImage13db13f70d7843cc_1"/>
           <a:srcRect xmlns:a="http://schemas.openxmlformats.org/drawingml/2006/main" l="0" t="31920" r="0" b="31920"/>
           <a:stretch xmlns:a="http://schemas.openxmlformats.org/drawingml/2006/main">
             <a:fillRect/>
           </a:stretch>
         </p:blipFill>
         <p:spPr>
-          <a:xfrm xmlns:a="http://schemas.openxmlformats.org/drawingml/2006/main">
+          <a:xfrm xmlns:a="http://schemas.openxmlformats.org/drawingml/2006/main" flipH="1">
             <a:off x="9525000" y="3143250"/>
             <a:ext cx="4000500" cy="2571750"/>
           </a:xfrm>
@@ -917,7 +950,7 @@
       </p:pic>
       <p:sp>
         <p:nvSpPr>
-          <p:cNvPr id="12" name="promotion-image-rule"/>
+          <p:cNvPr id="13" name="promotion-image-rule"/>
           <p:cNvSpPr/>
           <p:nvPr/>
         </p:nvSpPr>
@@ -951,7 +984,7 @@
       </p:sp>
       <p:sp>
         <p:nvSpPr>
-          <p:cNvPr id="13" name="promotion-image-label"/>
+          <p:cNvPr id="14" name="promotion-image-label"/>
           <p:cNvSpPr txBox="1"/>
           <p:nvPr/>
         </p:nvSpPr>
@@ -988,7 +1021,7 @@
       </p:sp>
       <p:sp>
         <p:nvSpPr>
-          <p:cNvPr id="14" name="source"/>
+          <p:cNvPr id="15" name="source"/>
           <p:cNvSpPr txBox="1"/>
           <p:nvPr/>
         </p:nvSpPr>
@@ -1025,7 +1058,7 @@
       </p:sp>
       <p:sp>
         <p:nvSpPr>
-          <p:cNvPr id="15" name="page-number"/>
+          <p:cNvPr id="16" name="page-number"/>
           <p:cNvSpPr txBox="1"/>
           <p:nvPr/>
         </p:nvSpPr>
@@ -1122,188 +1155,9 @@
           </a:p>
         </p:txBody>
       </p:sp>
-      <p:sp>
-        <p:nvSpPr>
-          <p:cNvPr id="3" name="evidence-top-rule"/>
-          <p:cNvSpPr/>
-          <p:nvPr/>
-        </p:nvSpPr>
-        <p:spPr>
-          <a:xfrm xmlns:a="http://schemas.openxmlformats.org/drawingml/2006/main">
-            <a:off x="838200" y="666750"/>
-            <a:ext cx="13563600" cy="0"/>
-          </a:xfrm>
-          <a:prstGeom xmlns:a="http://schemas.openxmlformats.org/drawingml/2006/main" prst="line">
-            <a:avLst/>
-          </a:prstGeom>
-          <a:noFill xmlns:a="http://schemas.openxmlformats.org/drawingml/2006/main"/>
-          <a:ln xmlns:a="http://schemas.openxmlformats.org/drawingml/2006/main" w="38100">
-            <a:solidFill>
-              <a:srgbClr val="277B91"/>
-            </a:solidFill>
-            <a:prstDash val="solid"/>
-          </a:ln>
-        </p:spPr>
-        <p:txBody>
-          <a:bodyPr xmlns:a="http://schemas.openxmlformats.org/drawingml/2006/main" wrap="square" lIns="0" tIns="0" rIns="0" bIns="0" anchor="t"/>
-          <a:lstStyle xmlns:a="http://schemas.openxmlformats.org/drawingml/2006/main"/>
-          <a:p xmlns:a="http://schemas.openxmlformats.org/drawingml/2006/main">
-            <a:r>
-              <a:rPr lang="en-US"/>
-              <a:t/>
-            </a:r>
-            <a:endParaRPr lang="en-US"/>
-          </a:p>
-        </p:txBody>
-      </p:sp>
-      <p:sp>
-        <p:nvSpPr>
-          <p:cNvPr id="4" name="RIVER HANDBOOK · EVIDENCE"/>
-          <p:cNvSpPr txBox="1"/>
-          <p:nvPr/>
-        </p:nvSpPr>
-        <p:spPr>
-          <a:xfrm xmlns:a="http://schemas.openxmlformats.org/drawingml/2006/main">
-            <a:off x="914400" y="895350"/>
-            <a:ext cx="7239000" cy="228600"/>
-          </a:xfrm>
-          <a:prstGeom xmlns:a="http://schemas.openxmlformats.org/drawingml/2006/main" prst="rect">
-            <a:avLst/>
-          </a:prstGeom>
-          <a:noFill xmlns:a="http://schemas.openxmlformats.org/drawingml/2006/main"/>
-          <a:ln xmlns:a="http://schemas.openxmlformats.org/drawingml/2006/main" w="0">
-            <a:noFill/>
-          </a:ln>
-        </p:spPr>
-        <p:txBody>
-          <a:bodyPr xmlns:a="http://schemas.openxmlformats.org/drawingml/2006/main" wrap="square" lIns="0" tIns="0" rIns="0" bIns="0" anchor="t"/>
-          <a:lstStyle xmlns:a="http://schemas.openxmlformats.org/drawingml/2006/main"/>
-          <a:p xmlns:a="http://schemas.openxmlformats.org/drawingml/2006/main">
-            <a:r>
-              <a:rPr lang="en-US" sz="1200" b="1">
-                <a:solidFill>
-                  <a:srgbClr val="277B91"/>
-                </a:solidFill>
-                <a:latin typeface="Arial"/>
-                <a:ea typeface="Arial"/>
-              </a:rPr>
-              <a:t>RIVER HANDBOOK · EVIDENCE</a:t>
-            </a:r>
-            <a:endParaRPr lang="en-US"/>
-          </a:p>
-        </p:txBody>
-      </p:sp>
-      <p:sp>
-        <p:nvSpPr>
-          <p:cNvPr id="5" name="evidence-title"/>
-          <p:cNvSpPr txBox="1"/>
-          <p:nvPr/>
-        </p:nvSpPr>
-        <p:spPr>
-          <a:xfrm xmlns:a="http://schemas.openxmlformats.org/drawingml/2006/main">
-            <a:off x="914400" y="1314450"/>
-            <a:ext cx="11811000" cy="552450"/>
-          </a:xfrm>
-          <a:prstGeom xmlns:a="http://schemas.openxmlformats.org/drawingml/2006/main" prst="rect">
-            <a:avLst/>
-          </a:prstGeom>
-          <a:noFill xmlns:a="http://schemas.openxmlformats.org/drawingml/2006/main"/>
-          <a:ln xmlns:a="http://schemas.openxmlformats.org/drawingml/2006/main" w="0">
-            <a:noFill/>
-          </a:ln>
-        </p:spPr>
-        <p:txBody>
-          <a:bodyPr xmlns:a="http://schemas.openxmlformats.org/drawingml/2006/main" wrap="square" lIns="0" tIns="0" rIns="0" bIns="0" anchor="t"/>
-          <a:lstStyle xmlns:a="http://schemas.openxmlformats.org/drawingml/2006/main"/>
-          <a:p xmlns:a="http://schemas.openxmlformats.org/drawingml/2006/main">
-            <a:r>
-              <a:rPr lang="en-US" sz="2850" b="1">
-                <a:solidFill>
-                  <a:srgbClr val="243535"/>
-                </a:solidFill>
-                <a:latin typeface="Arial"/>
-                <a:ea typeface="Arial"/>
-              </a:rPr>
-              <a:t>The signal grows when the invitation stays measurable</a:t>
-            </a:r>
-            <a:endParaRPr lang="en-US"/>
-          </a:p>
-        </p:txBody>
-      </p:sp>
-      <p:sp>
-        <p:nvSpPr>
-          <p:cNvPr id="6" name="evidence-basis"/>
-          <p:cNvSpPr txBox="1"/>
-          <p:nvPr/>
-        </p:nvSpPr>
-        <p:spPr>
-          <a:xfrm xmlns:a="http://schemas.openxmlformats.org/drawingml/2006/main">
-            <a:off x="952500" y="1981200"/>
-            <a:ext cx="10477500" cy="266700"/>
-          </a:xfrm>
-          <a:prstGeom xmlns:a="http://schemas.openxmlformats.org/drawingml/2006/main" prst="rect">
-            <a:avLst/>
-          </a:prstGeom>
-          <a:noFill xmlns:a="http://schemas.openxmlformats.org/drawingml/2006/main"/>
-          <a:ln xmlns:a="http://schemas.openxmlformats.org/drawingml/2006/main" w="0">
-            <a:noFill/>
-          </a:ln>
-        </p:spPr>
-        <p:txBody>
-          <a:bodyPr xmlns:a="http://schemas.openxmlformats.org/drawingml/2006/main" wrap="square" lIns="0" tIns="0" rIns="0" bIns="0" anchor="t"/>
-          <a:lstStyle xmlns:a="http://schemas.openxmlformats.org/drawingml/2006/main"/>
-          <a:p xmlns:a="http://schemas.openxmlformats.org/drawingml/2006/main">
-            <a:r>
-              <a:rPr lang="en-US" sz="1350">
-                <a:solidFill>
-                  <a:srgbClr val="8D928C"/>
-                </a:solidFill>
-                <a:latin typeface="Arial"/>
-                <a:ea typeface="Arial"/>
-              </a:rPr>
-              <a:t>Illustrative reach and response · source and measurement convention remain attached.</a:t>
-            </a:r>
-            <a:endParaRPr lang="en-US"/>
-          </a:p>
-        </p:txBody>
-      </p:sp>
-      <p:sp>
-        <p:nvSpPr>
-          <p:cNvPr id="7" name="evidence-rule"/>
-          <p:cNvSpPr/>
-          <p:nvPr/>
-        </p:nvSpPr>
-        <p:spPr>
-          <a:xfrm xmlns:a="http://schemas.openxmlformats.org/drawingml/2006/main">
-            <a:off x="914400" y="2457450"/>
-            <a:ext cx="13411200" cy="0"/>
-          </a:xfrm>
-          <a:prstGeom xmlns:a="http://schemas.openxmlformats.org/drawingml/2006/main" prst="line">
-            <a:avLst/>
-          </a:prstGeom>
-          <a:noFill xmlns:a="http://schemas.openxmlformats.org/drawingml/2006/main"/>
-          <a:ln xmlns:a="http://schemas.openxmlformats.org/drawingml/2006/main" w="25400">
-            <a:solidFill>
-              <a:srgbClr val="8D928C"/>
-            </a:solidFill>
-            <a:prstDash val="solid"/>
-          </a:ln>
-        </p:spPr>
-        <p:txBody>
-          <a:bodyPr xmlns:a="http://schemas.openxmlformats.org/drawingml/2006/main" wrap="square" lIns="0" tIns="0" rIns="0" bIns="0" anchor="t"/>
-          <a:lstStyle xmlns:a="http://schemas.openxmlformats.org/drawingml/2006/main"/>
-          <a:p xmlns:a="http://schemas.openxmlformats.org/drawingml/2006/main">
-            <a:r>
-              <a:rPr lang="en-US"/>
-              <a:t/>
-            </a:r>
-            <a:endParaRPr lang="en-US"/>
-          </a:p>
-        </p:txBody>
-      </p:sp>
       <p:pic>
         <p:nvPicPr>
-          <p:cNvPr id="8" name="evidence-image-field">
+          <p:cNvPr id="3" name="evidence-photo-band">
             <a:extLst xmlns:a="http://schemas.openxmlformats.org/drawingml/2006/main">
               <a:ext uri="{C183D7F6-B498-43B3-948B-1728B52AA6E4}">
                 <adec:decorative xmlns:adec="http://schemas.microsoft.com/office/drawing/2017/decorative" val="1"/>
@@ -1314,14 +1168,226 @@
           <p:nvPr/>
         </p:nvPicPr>
         <p:blipFill>
-          <a:blip xmlns:r="http://schemas.openxmlformats.org/officeDocument/2006/relationships" xmlns:a="http://schemas.openxmlformats.org/drawingml/2006/main" r:embed="rIdOfficeKitImage13db13f70d7843cc_1"/>
+          <a:blip xmlns:r="http://schemas.openxmlformats.org/officeDocument/2006/relationships" xmlns:a="http://schemas.openxmlformats.org/drawingml/2006/main" r:embed="rIdOfficeKitImage7790b68b5d8fcd92_1"/>
+          <a:srcRect xmlns:a="http://schemas.openxmlformats.org/drawingml/2006/main" l="0" t="47258" r="0" b="47258"/>
+          <a:stretch xmlns:a="http://schemas.openxmlformats.org/drawingml/2006/main">
+            <a:fillRect/>
+          </a:stretch>
+        </p:blipFill>
+        <p:spPr>
+          <a:xfrm xmlns:a="http://schemas.openxmlformats.org/drawingml/2006/main">
+            <a:off x="0" y="0"/>
+            <a:ext cx="15240000" cy="1485900"/>
+          </a:xfrm>
+          <a:prstGeom xmlns:a="http://schemas.openxmlformats.org/drawingml/2006/main" prst="rect">
+            <a:avLst/>
+          </a:prstGeom>
+        </p:spPr>
+      </p:pic>
+      <p:sp>
+        <p:nvSpPr>
+          <p:cNvPr id="4" name="evidence-photo-scrim"/>
+          <p:cNvSpPr/>
+          <p:nvPr/>
+        </p:nvSpPr>
+        <p:spPr>
+          <a:xfrm xmlns:a="http://schemas.openxmlformats.org/drawingml/2006/main">
+            <a:off x="0" y="0"/>
+            <a:ext cx="15240000" cy="1485900"/>
+          </a:xfrm>
+          <a:prstGeom xmlns:a="http://schemas.openxmlformats.org/drawingml/2006/main" prst="rect">
+            <a:avLst/>
+          </a:prstGeom>
+          <a:solidFill xmlns:a="http://schemas.openxmlformats.org/drawingml/2006/main">
+            <a:srgbClr val="243535">
+              <a:alpha val="62000"/>
+            </a:srgbClr>
+          </a:solidFill>
+          <a:ln xmlns:a="http://schemas.openxmlformats.org/drawingml/2006/main" w="0">
+            <a:solidFill>
+              <a:srgbClr val="243535"/>
+            </a:solidFill>
+            <a:prstDash val="solid"/>
+          </a:ln>
+        </p:spPr>
+        <p:txBody>
+          <a:bodyPr xmlns:a="http://schemas.openxmlformats.org/drawingml/2006/main" wrap="square" lIns="0" tIns="0" rIns="0" bIns="0" anchor="t"/>
+          <a:lstStyle xmlns:a="http://schemas.openxmlformats.org/drawingml/2006/main"/>
+          <a:p xmlns:a="http://schemas.openxmlformats.org/drawingml/2006/main">
+            <a:r>
+              <a:rPr lang="en-US"/>
+              <a:t/>
+            </a:r>
+            <a:endParaRPr lang="en-US"/>
+          </a:p>
+        </p:txBody>
+      </p:sp>
+      <p:sp>
+        <p:nvSpPr>
+          <p:cNvPr id="5" name="evidence-photo-rule"/>
+          <p:cNvSpPr/>
+          <p:nvPr/>
+        </p:nvSpPr>
+        <p:spPr>
+          <a:xfrm xmlns:a="http://schemas.openxmlformats.org/drawingml/2006/main">
+            <a:off x="914400" y="1438275"/>
+            <a:ext cx="13411200" cy="0"/>
+          </a:xfrm>
+          <a:prstGeom xmlns:a="http://schemas.openxmlformats.org/drawingml/2006/main" prst="line">
+            <a:avLst/>
+          </a:prstGeom>
+          <a:noFill xmlns:a="http://schemas.openxmlformats.org/drawingml/2006/main"/>
+          <a:ln xmlns:a="http://schemas.openxmlformats.org/drawingml/2006/main" w="38100">
+            <a:solidFill>
+              <a:srgbClr val="277B91"/>
+            </a:solidFill>
+            <a:prstDash val="solid"/>
+          </a:ln>
+        </p:spPr>
+        <p:txBody>
+          <a:bodyPr xmlns:a="http://schemas.openxmlformats.org/drawingml/2006/main" wrap="square" lIns="0" tIns="0" rIns="0" bIns="0" anchor="t"/>
+          <a:lstStyle xmlns:a="http://schemas.openxmlformats.org/drawingml/2006/main"/>
+          <a:p xmlns:a="http://schemas.openxmlformats.org/drawingml/2006/main">
+            <a:r>
+              <a:rPr lang="en-US"/>
+              <a:t/>
+            </a:r>
+            <a:endParaRPr lang="en-US"/>
+          </a:p>
+        </p:txBody>
+      </p:sp>
+      <p:sp>
+        <p:nvSpPr>
+          <p:cNvPr id="6" name="RIVER HANDBOOK · EVIDENCE"/>
+          <p:cNvSpPr txBox="1"/>
+          <p:nvPr/>
+        </p:nvSpPr>
+        <p:spPr>
+          <a:xfrm xmlns:a="http://schemas.openxmlformats.org/drawingml/2006/main">
+            <a:off x="914400" y="228600"/>
+            <a:ext cx="9525000" cy="190500"/>
+          </a:xfrm>
+          <a:prstGeom xmlns:a="http://schemas.openxmlformats.org/drawingml/2006/main" prst="rect">
+            <a:avLst/>
+          </a:prstGeom>
+          <a:noFill xmlns:a="http://schemas.openxmlformats.org/drawingml/2006/main"/>
+          <a:ln xmlns:a="http://schemas.openxmlformats.org/drawingml/2006/main" w="0">
+            <a:noFill/>
+          </a:ln>
+        </p:spPr>
+        <p:txBody>
+          <a:bodyPr xmlns:a="http://schemas.openxmlformats.org/drawingml/2006/main" wrap="square" lIns="0" tIns="0" rIns="0" bIns="0" anchor="t"/>
+          <a:lstStyle xmlns:a="http://schemas.openxmlformats.org/drawingml/2006/main"/>
+          <a:p xmlns:a="http://schemas.openxmlformats.org/drawingml/2006/main">
+            <a:r>
+              <a:rPr lang="en-US" sz="1050" b="1">
+                <a:solidFill>
+                  <a:srgbClr val="277B91"/>
+                </a:solidFill>
+                <a:latin typeface="Arial"/>
+                <a:ea typeface="Arial"/>
+              </a:rPr>
+              <a:t>RIVER HANDBOOK · EVIDENCE</a:t>
+            </a:r>
+            <a:endParaRPr lang="en-US"/>
+          </a:p>
+        </p:txBody>
+      </p:sp>
+      <p:sp>
+        <p:nvSpPr>
+          <p:cNvPr id="7" name="evidence-title"/>
+          <p:cNvSpPr txBox="1"/>
+          <p:nvPr/>
+        </p:nvSpPr>
+        <p:spPr>
+          <a:xfrm xmlns:a="http://schemas.openxmlformats.org/drawingml/2006/main">
+            <a:off x="914400" y="495300"/>
+            <a:ext cx="12001500" cy="457200"/>
+          </a:xfrm>
+          <a:prstGeom xmlns:a="http://schemas.openxmlformats.org/drawingml/2006/main" prst="rect">
+            <a:avLst/>
+          </a:prstGeom>
+          <a:noFill xmlns:a="http://schemas.openxmlformats.org/drawingml/2006/main"/>
+          <a:ln xmlns:a="http://schemas.openxmlformats.org/drawingml/2006/main" w="0">
+            <a:noFill/>
+          </a:ln>
+        </p:spPr>
+        <p:txBody>
+          <a:bodyPr xmlns:a="http://schemas.openxmlformats.org/drawingml/2006/main" wrap="square" lIns="0" tIns="0" rIns="0" bIns="0" anchor="t"/>
+          <a:lstStyle xmlns:a="http://schemas.openxmlformats.org/drawingml/2006/main"/>
+          <a:p xmlns:a="http://schemas.openxmlformats.org/drawingml/2006/main">
+            <a:r>
+              <a:rPr lang="en-US" sz="2550" b="1">
+                <a:solidFill>
+                  <a:srgbClr val="FFFFFF"/>
+                </a:solidFill>
+                <a:latin typeface="Arial"/>
+                <a:ea typeface="Arial"/>
+              </a:rPr>
+              <a:t>The signal grows when the invitation stays measurable</a:t>
+            </a:r>
+            <a:endParaRPr lang="en-US"/>
+          </a:p>
+        </p:txBody>
+      </p:sp>
+      <p:sp>
+        <p:nvSpPr>
+          <p:cNvPr id="8" name="evidence-basis"/>
+          <p:cNvSpPr txBox="1"/>
+          <p:nvPr/>
+        </p:nvSpPr>
+        <p:spPr>
+          <a:xfrm xmlns:a="http://schemas.openxmlformats.org/drawingml/2006/main">
+            <a:off x="952500" y="1066800"/>
+            <a:ext cx="11049000" cy="228600"/>
+          </a:xfrm>
+          <a:prstGeom xmlns:a="http://schemas.openxmlformats.org/drawingml/2006/main" prst="rect">
+            <a:avLst/>
+          </a:prstGeom>
+          <a:noFill xmlns:a="http://schemas.openxmlformats.org/drawingml/2006/main"/>
+          <a:ln xmlns:a="http://schemas.openxmlformats.org/drawingml/2006/main" w="0">
+            <a:noFill/>
+          </a:ln>
+        </p:spPr>
+        <p:txBody>
+          <a:bodyPr xmlns:a="http://schemas.openxmlformats.org/drawingml/2006/main" wrap="square" lIns="0" tIns="0" rIns="0" bIns="0" anchor="t"/>
+          <a:lstStyle xmlns:a="http://schemas.openxmlformats.org/drawingml/2006/main"/>
+          <a:p xmlns:a="http://schemas.openxmlformats.org/drawingml/2006/main">
+            <a:r>
+              <a:rPr lang="en-US" sz="1200">
+                <a:solidFill>
+                  <a:srgbClr val="F0F3F2"/>
+                </a:solidFill>
+                <a:latin typeface="Arial"/>
+                <a:ea typeface="Arial"/>
+              </a:rPr>
+              <a:t>Illustrative reach and response · source and measurement convention remain attached.</a:t>
+            </a:r>
+            <a:endParaRPr lang="en-US"/>
+          </a:p>
+        </p:txBody>
+      </p:sp>
+      <p:pic>
+        <p:nvPicPr>
+          <p:cNvPr id="9" name="evidence-image-field">
+            <a:extLst xmlns:a="http://schemas.openxmlformats.org/drawingml/2006/main">
+              <a:ext uri="{C183D7F6-B498-43B3-948B-1728B52AA6E4}">
+                <adec:decorative xmlns:adec="http://schemas.microsoft.com/office/drawing/2017/decorative" val="1"/>
+              </a:ext>
+            </a:extLst>
+          </p:cNvPr>
+          <p:cNvPicPr/>
+          <p:nvPr/>
+        </p:nvPicPr>
+        <p:blipFill>
+          <a:blip xmlns:r="http://schemas.openxmlformats.org/officeDocument/2006/relationships" xmlns:a="http://schemas.openxmlformats.org/drawingml/2006/main" r:embed="rIdOfficeKitImage7790b68b5d8fcd92_1"/>
           <a:srcRect xmlns:a="http://schemas.openxmlformats.org/drawingml/2006/main" l="0" t="39326" r="0" b="39326"/>
           <a:stretch xmlns:a="http://schemas.openxmlformats.org/drawingml/2006/main">
             <a:fillRect/>
           </a:stretch>
         </p:blipFill>
         <p:spPr>
-          <a:xfrm xmlns:a="http://schemas.openxmlformats.org/drawingml/2006/main" flipH="1">
+          <a:xfrm xmlns:a="http://schemas.openxmlformats.org/drawingml/2006/main">
             <a:off x="1047750" y="3048000"/>
             <a:ext cx="7905750" cy="3000375"/>
           </a:xfrm>
@@ -1332,7 +1398,7 @@
       </p:pic>
       <p:sp>
         <p:nvSpPr>
-          <p:cNvPr id="9" name="evidence-image-caption"/>
+          <p:cNvPr id="10" name="evidence-image-caption"/>
           <p:cNvSpPr txBox="1"/>
           <p:nvPr/>
         </p:nvSpPr>
@@ -1369,7 +1435,7 @@
       </p:sp>
       <p:sp>
         <p:nvSpPr>
-          <p:cNvPr id="10" name="evidence-image-rule"/>
+          <p:cNvPr id="11" name="evidence-image-rule"/>
           <p:cNvSpPr/>
           <p:nvPr/>
         </p:nvSpPr>
@@ -1403,7 +1469,7 @@
       </p:sp>
       <p:sp>
         <p:nvSpPr>
-          <p:cNvPr id="11" name="evidence-image-note"/>
+          <p:cNvPr id="12" name="evidence-image-note"/>
           <p:cNvSpPr txBox="1"/>
           <p:nvPr/>
         </p:nvSpPr>
@@ -1440,7 +1506,7 @@
       </p:sp>
       <p:sp>
         <p:nvSpPr>
-          <p:cNvPr id="12" name="metric"/>
+          <p:cNvPr id="13" name="metric"/>
           <p:cNvSpPr txBox="1"/>
           <p:nvPr/>
         </p:nvSpPr>
@@ -1477,7 +1543,7 @@
       </p:sp>
       <p:sp>
         <p:nvSpPr>
-          <p:cNvPr id="13" name="metric-label"/>
+          <p:cNvPr id="14" name="metric-label"/>
           <p:cNvSpPr txBox="1"/>
           <p:nvPr/>
         </p:nvSpPr>
@@ -1514,7 +1580,7 @@
       </p:sp>
       <p:sp>
         <p:nvSpPr>
-          <p:cNvPr id="14" name="rail-rule"/>
+          <p:cNvPr id="15" name="rail-rule"/>
           <p:cNvSpPr/>
           <p:nvPr/>
         </p:nvSpPr>
@@ -1548,7 +1614,7 @@
       </p:sp>
       <p:sp>
         <p:nvSpPr>
-          <p:cNvPr id="15" name="read-through"/>
+          <p:cNvPr id="16" name="read-through"/>
           <p:cNvSpPr txBox="1"/>
           <p:nvPr/>
         </p:nvSpPr>
@@ -1585,7 +1651,7 @@
       </p:sp>
       <p:sp>
         <p:nvSpPr>
-          <p:cNvPr id="16" name="evidence-band"/>
+          <p:cNvPr id="17" name="evidence-band"/>
           <p:cNvSpPr/>
           <p:nvPr/>
         </p:nvSpPr>
@@ -1621,7 +1687,7 @@
       </p:sp>
       <p:sp>
         <p:nvSpPr>
-          <p:cNvPr id="17" name="evidence-band-text"/>
+          <p:cNvPr id="18" name="evidence-band-text"/>
           <p:cNvSpPr txBox="1"/>
           <p:nvPr/>
         </p:nvSpPr>
@@ -1658,7 +1724,7 @@
       </p:sp>
       <p:sp>
         <p:nvSpPr>
-          <p:cNvPr id="18" name="source"/>
+          <p:cNvPr id="19" name="source"/>
           <p:cNvSpPr txBox="1"/>
           <p:nvPr/>
         </p:nvSpPr>
@@ -1695,7 +1761,7 @@
       </p:sp>
       <p:sp>
         <p:nvSpPr>
-          <p:cNvPr id="19" name="page-number"/>
+          <p:cNvPr id="20" name="page-number"/>
           <p:cNvSpPr txBox="1"/>
           <p:nvPr/>
         </p:nvSpPr>
@@ -1792,188 +1858,9 @@
           </a:p>
         </p:txBody>
       </p:sp>
-      <p:sp>
-        <p:nvSpPr>
-          <p:cNvPr id="3" name="detail-top-rule"/>
-          <p:cNvSpPr/>
-          <p:nvPr/>
-        </p:nvSpPr>
-        <p:spPr>
-          <a:xfrm xmlns:a="http://schemas.openxmlformats.org/drawingml/2006/main">
-            <a:off x="838200" y="666750"/>
-            <a:ext cx="13563600" cy="0"/>
-          </a:xfrm>
-          <a:prstGeom xmlns:a="http://schemas.openxmlformats.org/drawingml/2006/main" prst="line">
-            <a:avLst/>
-          </a:prstGeom>
-          <a:noFill xmlns:a="http://schemas.openxmlformats.org/drawingml/2006/main"/>
-          <a:ln xmlns:a="http://schemas.openxmlformats.org/drawingml/2006/main" w="38100">
-            <a:solidFill>
-              <a:srgbClr val="277B91"/>
-            </a:solidFill>
-            <a:prstDash val="solid"/>
-          </a:ln>
-        </p:spPr>
-        <p:txBody>
-          <a:bodyPr xmlns:a="http://schemas.openxmlformats.org/drawingml/2006/main" wrap="square" lIns="0" tIns="0" rIns="0" bIns="0" anchor="t"/>
-          <a:lstStyle xmlns:a="http://schemas.openxmlformats.org/drawingml/2006/main"/>
-          <a:p xmlns:a="http://schemas.openxmlformats.org/drawingml/2006/main">
-            <a:r>
-              <a:rPr lang="en-US"/>
-              <a:t/>
-            </a:r>
-            <a:endParaRPr lang="en-US"/>
-          </a:p>
-        </p:txBody>
-      </p:sp>
-      <p:sp>
-        <p:nvSpPr>
-          <p:cNvPr id="4" name="RIVER HANDBOOK · DETAIL"/>
-          <p:cNvSpPr txBox="1"/>
-          <p:nvPr/>
-        </p:nvSpPr>
-        <p:spPr>
-          <a:xfrm xmlns:a="http://schemas.openxmlformats.org/drawingml/2006/main">
-            <a:off x="914400" y="895350"/>
-            <a:ext cx="7239000" cy="228600"/>
-          </a:xfrm>
-          <a:prstGeom xmlns:a="http://schemas.openxmlformats.org/drawingml/2006/main" prst="rect">
-            <a:avLst/>
-          </a:prstGeom>
-          <a:noFill xmlns:a="http://schemas.openxmlformats.org/drawingml/2006/main"/>
-          <a:ln xmlns:a="http://schemas.openxmlformats.org/drawingml/2006/main" w="0">
-            <a:noFill/>
-          </a:ln>
-        </p:spPr>
-        <p:txBody>
-          <a:bodyPr xmlns:a="http://schemas.openxmlformats.org/drawingml/2006/main" wrap="square" lIns="0" tIns="0" rIns="0" bIns="0" anchor="t"/>
-          <a:lstStyle xmlns:a="http://schemas.openxmlformats.org/drawingml/2006/main"/>
-          <a:p xmlns:a="http://schemas.openxmlformats.org/drawingml/2006/main">
-            <a:r>
-              <a:rPr lang="en-US" sz="1200" b="1">
-                <a:solidFill>
-                  <a:srgbClr val="277B91"/>
-                </a:solidFill>
-                <a:latin typeface="Arial"/>
-                <a:ea typeface="Arial"/>
-              </a:rPr>
-              <a:t>RIVER HANDBOOK · DETAIL</a:t>
-            </a:r>
-            <a:endParaRPr lang="en-US"/>
-          </a:p>
-        </p:txBody>
-      </p:sp>
-      <p:sp>
-        <p:nvSpPr>
-          <p:cNvPr id="5" name="detail-title"/>
-          <p:cNvSpPr txBox="1"/>
-          <p:nvPr/>
-        </p:nvSpPr>
-        <p:spPr>
-          <a:xfrm xmlns:a="http://schemas.openxmlformats.org/drawingml/2006/main">
-            <a:off x="914400" y="1314450"/>
-            <a:ext cx="11811000" cy="552450"/>
-          </a:xfrm>
-          <a:prstGeom xmlns:a="http://schemas.openxmlformats.org/drawingml/2006/main" prst="rect">
-            <a:avLst/>
-          </a:prstGeom>
-          <a:noFill xmlns:a="http://schemas.openxmlformats.org/drawingml/2006/main"/>
-          <a:ln xmlns:a="http://schemas.openxmlformats.org/drawingml/2006/main" w="0">
-            <a:noFill/>
-          </a:ln>
-        </p:spPr>
-        <p:txBody>
-          <a:bodyPr xmlns:a="http://schemas.openxmlformats.org/drawingml/2006/main" wrap="square" lIns="0" tIns="0" rIns="0" bIns="0" anchor="t"/>
-          <a:lstStyle xmlns:a="http://schemas.openxmlformats.org/drawingml/2006/main"/>
-          <a:p xmlns:a="http://schemas.openxmlformats.org/drawingml/2006/main">
-            <a:r>
-              <a:rPr lang="en-US" sz="2850" b="1">
-                <a:solidFill>
-                  <a:srgbClr val="243535"/>
-                </a:solidFill>
-                <a:latin typeface="Arial"/>
-                <a:ea typeface="Arial"/>
-              </a:rPr>
-              <a:t>The same idea can hold several views</a:t>
-            </a:r>
-            <a:endParaRPr lang="en-US"/>
-          </a:p>
-        </p:txBody>
-      </p:sp>
-      <p:sp>
-        <p:nvSpPr>
-          <p:cNvPr id="6" name="detail-basis"/>
-          <p:cNvSpPr txBox="1"/>
-          <p:nvPr/>
-        </p:nvSpPr>
-        <p:spPr>
-          <a:xfrm xmlns:a="http://schemas.openxmlformats.org/drawingml/2006/main">
-            <a:off x="952500" y="1981200"/>
-            <a:ext cx="10477500" cy="266700"/>
-          </a:xfrm>
-          <a:prstGeom xmlns:a="http://schemas.openxmlformats.org/drawingml/2006/main" prst="rect">
-            <a:avLst/>
-          </a:prstGeom>
-          <a:noFill xmlns:a="http://schemas.openxmlformats.org/drawingml/2006/main"/>
-          <a:ln xmlns:a="http://schemas.openxmlformats.org/drawingml/2006/main" w="0">
-            <a:noFill/>
-          </a:ln>
-        </p:spPr>
-        <p:txBody>
-          <a:bodyPr xmlns:a="http://schemas.openxmlformats.org/drawingml/2006/main" wrap="square" lIns="0" tIns="0" rIns="0" bIns="0" anchor="t"/>
-          <a:lstStyle xmlns:a="http://schemas.openxmlformats.org/drawingml/2006/main"/>
-          <a:p xmlns:a="http://schemas.openxmlformats.org/drawingml/2006/main">
-            <a:r>
-              <a:rPr lang="en-US" sz="1350">
-                <a:solidFill>
-                  <a:srgbClr val="8D928C"/>
-                </a:solidFill>
-                <a:latin typeface="Arial"/>
-                <a:ea typeface="Arial"/>
-              </a:rPr>
-              <a:t>Unequal image frames · visual variety without decorative filler.</a:t>
-            </a:r>
-            <a:endParaRPr lang="en-US"/>
-          </a:p>
-        </p:txBody>
-      </p:sp>
-      <p:sp>
-        <p:nvSpPr>
-          <p:cNvPr id="7" name="detail-rule"/>
-          <p:cNvSpPr/>
-          <p:nvPr/>
-        </p:nvSpPr>
-        <p:spPr>
-          <a:xfrm xmlns:a="http://schemas.openxmlformats.org/drawingml/2006/main">
-            <a:off x="914400" y="2457450"/>
-            <a:ext cx="13411200" cy="0"/>
-          </a:xfrm>
-          <a:prstGeom xmlns:a="http://schemas.openxmlformats.org/drawingml/2006/main" prst="line">
-            <a:avLst/>
-          </a:prstGeom>
-          <a:noFill xmlns:a="http://schemas.openxmlformats.org/drawingml/2006/main"/>
-          <a:ln xmlns:a="http://schemas.openxmlformats.org/drawingml/2006/main" w="25400">
-            <a:solidFill>
-              <a:srgbClr val="8D928C"/>
-            </a:solidFill>
-            <a:prstDash val="solid"/>
-          </a:ln>
-        </p:spPr>
-        <p:txBody>
-          <a:bodyPr xmlns:a="http://schemas.openxmlformats.org/drawingml/2006/main" wrap="square" lIns="0" tIns="0" rIns="0" bIns="0" anchor="t"/>
-          <a:lstStyle xmlns:a="http://schemas.openxmlformats.org/drawingml/2006/main"/>
-          <a:p xmlns:a="http://schemas.openxmlformats.org/drawingml/2006/main">
-            <a:r>
-              <a:rPr lang="en-US"/>
-              <a:t/>
-            </a:r>
-            <a:endParaRPr lang="en-US"/>
-          </a:p>
-        </p:txBody>
-      </p:sp>
       <p:pic>
         <p:nvPicPr>
-          <p:cNvPr id="8" name="image-evidence-0">
+          <p:cNvPr id="3" name="detail-photo-band">
             <a:extLst xmlns:a="http://schemas.openxmlformats.org/drawingml/2006/main">
               <a:ext uri="{C183D7F6-B498-43B3-948B-1728B52AA6E4}">
                 <adec:decorative xmlns:adec="http://schemas.microsoft.com/office/drawing/2017/decorative" val="1"/>
@@ -1984,14 +1871,226 @@
           <p:nvPr/>
         </p:nvPicPr>
         <p:blipFill>
-          <a:blip xmlns:r="http://schemas.openxmlformats.org/officeDocument/2006/relationships" xmlns:a="http://schemas.openxmlformats.org/drawingml/2006/main" r:embed="rIdOfficeKitImage59ee3aa5202fd02f_1"/>
-          <a:srcRect xmlns:a="http://schemas.openxmlformats.org/drawingml/2006/main" l="0" t="28365" r="0" b="28365"/>
+          <a:blip xmlns:r="http://schemas.openxmlformats.org/officeDocument/2006/relationships" xmlns:a="http://schemas.openxmlformats.org/drawingml/2006/main" r:embed="rIdOfficeKitImagec7b73f8fac405495_1"/>
+          <a:srcRect xmlns:a="http://schemas.openxmlformats.org/drawingml/2006/main" l="0" t="47256" r="0" b="47256"/>
           <a:stretch xmlns:a="http://schemas.openxmlformats.org/drawingml/2006/main">
             <a:fillRect/>
           </a:stretch>
         </p:blipFill>
         <p:spPr>
           <a:xfrm xmlns:a="http://schemas.openxmlformats.org/drawingml/2006/main">
+            <a:off x="0" y="0"/>
+            <a:ext cx="15240000" cy="1485900"/>
+          </a:xfrm>
+          <a:prstGeom xmlns:a="http://schemas.openxmlformats.org/drawingml/2006/main" prst="rect">
+            <a:avLst/>
+          </a:prstGeom>
+        </p:spPr>
+      </p:pic>
+      <p:sp>
+        <p:nvSpPr>
+          <p:cNvPr id="4" name="detail-photo-scrim"/>
+          <p:cNvSpPr/>
+          <p:nvPr/>
+        </p:nvSpPr>
+        <p:spPr>
+          <a:xfrm xmlns:a="http://schemas.openxmlformats.org/drawingml/2006/main">
+            <a:off x="0" y="0"/>
+            <a:ext cx="15240000" cy="1485900"/>
+          </a:xfrm>
+          <a:prstGeom xmlns:a="http://schemas.openxmlformats.org/drawingml/2006/main" prst="rect">
+            <a:avLst/>
+          </a:prstGeom>
+          <a:solidFill xmlns:a="http://schemas.openxmlformats.org/drawingml/2006/main">
+            <a:srgbClr val="243535">
+              <a:alpha val="62000"/>
+            </a:srgbClr>
+          </a:solidFill>
+          <a:ln xmlns:a="http://schemas.openxmlformats.org/drawingml/2006/main" w="0">
+            <a:solidFill>
+              <a:srgbClr val="243535"/>
+            </a:solidFill>
+            <a:prstDash val="solid"/>
+          </a:ln>
+        </p:spPr>
+        <p:txBody>
+          <a:bodyPr xmlns:a="http://schemas.openxmlformats.org/drawingml/2006/main" wrap="square" lIns="0" tIns="0" rIns="0" bIns="0" anchor="t"/>
+          <a:lstStyle xmlns:a="http://schemas.openxmlformats.org/drawingml/2006/main"/>
+          <a:p xmlns:a="http://schemas.openxmlformats.org/drawingml/2006/main">
+            <a:r>
+              <a:rPr lang="en-US"/>
+              <a:t/>
+            </a:r>
+            <a:endParaRPr lang="en-US"/>
+          </a:p>
+        </p:txBody>
+      </p:sp>
+      <p:sp>
+        <p:nvSpPr>
+          <p:cNvPr id="5" name="detail-photo-rule"/>
+          <p:cNvSpPr/>
+          <p:nvPr/>
+        </p:nvSpPr>
+        <p:spPr>
+          <a:xfrm xmlns:a="http://schemas.openxmlformats.org/drawingml/2006/main">
+            <a:off x="914400" y="1438275"/>
+            <a:ext cx="13411200" cy="0"/>
+          </a:xfrm>
+          <a:prstGeom xmlns:a="http://schemas.openxmlformats.org/drawingml/2006/main" prst="line">
+            <a:avLst/>
+          </a:prstGeom>
+          <a:noFill xmlns:a="http://schemas.openxmlformats.org/drawingml/2006/main"/>
+          <a:ln xmlns:a="http://schemas.openxmlformats.org/drawingml/2006/main" w="38100">
+            <a:solidFill>
+              <a:srgbClr val="277B91"/>
+            </a:solidFill>
+            <a:prstDash val="solid"/>
+          </a:ln>
+        </p:spPr>
+        <p:txBody>
+          <a:bodyPr xmlns:a="http://schemas.openxmlformats.org/drawingml/2006/main" wrap="square" lIns="0" tIns="0" rIns="0" bIns="0" anchor="t"/>
+          <a:lstStyle xmlns:a="http://schemas.openxmlformats.org/drawingml/2006/main"/>
+          <a:p xmlns:a="http://schemas.openxmlformats.org/drawingml/2006/main">
+            <a:r>
+              <a:rPr lang="en-US"/>
+              <a:t/>
+            </a:r>
+            <a:endParaRPr lang="en-US"/>
+          </a:p>
+        </p:txBody>
+      </p:sp>
+      <p:sp>
+        <p:nvSpPr>
+          <p:cNvPr id="6" name="RIVER HANDBOOK · DETAIL"/>
+          <p:cNvSpPr txBox="1"/>
+          <p:nvPr/>
+        </p:nvSpPr>
+        <p:spPr>
+          <a:xfrm xmlns:a="http://schemas.openxmlformats.org/drawingml/2006/main">
+            <a:off x="914400" y="228600"/>
+            <a:ext cx="9525000" cy="190500"/>
+          </a:xfrm>
+          <a:prstGeom xmlns:a="http://schemas.openxmlformats.org/drawingml/2006/main" prst="rect">
+            <a:avLst/>
+          </a:prstGeom>
+          <a:noFill xmlns:a="http://schemas.openxmlformats.org/drawingml/2006/main"/>
+          <a:ln xmlns:a="http://schemas.openxmlformats.org/drawingml/2006/main" w="0">
+            <a:noFill/>
+          </a:ln>
+        </p:spPr>
+        <p:txBody>
+          <a:bodyPr xmlns:a="http://schemas.openxmlformats.org/drawingml/2006/main" wrap="square" lIns="0" tIns="0" rIns="0" bIns="0" anchor="t"/>
+          <a:lstStyle xmlns:a="http://schemas.openxmlformats.org/drawingml/2006/main"/>
+          <a:p xmlns:a="http://schemas.openxmlformats.org/drawingml/2006/main">
+            <a:r>
+              <a:rPr lang="en-US" sz="1050" b="1">
+                <a:solidFill>
+                  <a:srgbClr val="277B91"/>
+                </a:solidFill>
+                <a:latin typeface="Arial"/>
+                <a:ea typeface="Arial"/>
+              </a:rPr>
+              <a:t>RIVER HANDBOOK · DETAIL</a:t>
+            </a:r>
+            <a:endParaRPr lang="en-US"/>
+          </a:p>
+        </p:txBody>
+      </p:sp>
+      <p:sp>
+        <p:nvSpPr>
+          <p:cNvPr id="7" name="detail-title"/>
+          <p:cNvSpPr txBox="1"/>
+          <p:nvPr/>
+        </p:nvSpPr>
+        <p:spPr>
+          <a:xfrm xmlns:a="http://schemas.openxmlformats.org/drawingml/2006/main">
+            <a:off x="914400" y="495300"/>
+            <a:ext cx="12001500" cy="457200"/>
+          </a:xfrm>
+          <a:prstGeom xmlns:a="http://schemas.openxmlformats.org/drawingml/2006/main" prst="rect">
+            <a:avLst/>
+          </a:prstGeom>
+          <a:noFill xmlns:a="http://schemas.openxmlformats.org/drawingml/2006/main"/>
+          <a:ln xmlns:a="http://schemas.openxmlformats.org/drawingml/2006/main" w="0">
+            <a:noFill/>
+          </a:ln>
+        </p:spPr>
+        <p:txBody>
+          <a:bodyPr xmlns:a="http://schemas.openxmlformats.org/drawingml/2006/main" wrap="square" lIns="0" tIns="0" rIns="0" bIns="0" anchor="t"/>
+          <a:lstStyle xmlns:a="http://schemas.openxmlformats.org/drawingml/2006/main"/>
+          <a:p xmlns:a="http://schemas.openxmlformats.org/drawingml/2006/main">
+            <a:r>
+              <a:rPr lang="en-US" sz="2550" b="1">
+                <a:solidFill>
+                  <a:srgbClr val="FFFFFF"/>
+                </a:solidFill>
+                <a:latin typeface="Arial"/>
+                <a:ea typeface="Arial"/>
+              </a:rPr>
+              <a:t>The same idea can hold several views</a:t>
+            </a:r>
+            <a:endParaRPr lang="en-US"/>
+          </a:p>
+        </p:txBody>
+      </p:sp>
+      <p:sp>
+        <p:nvSpPr>
+          <p:cNvPr id="8" name="detail-basis"/>
+          <p:cNvSpPr txBox="1"/>
+          <p:nvPr/>
+        </p:nvSpPr>
+        <p:spPr>
+          <a:xfrm xmlns:a="http://schemas.openxmlformats.org/drawingml/2006/main">
+            <a:off x="952500" y="1066800"/>
+            <a:ext cx="11049000" cy="228600"/>
+          </a:xfrm>
+          <a:prstGeom xmlns:a="http://schemas.openxmlformats.org/drawingml/2006/main" prst="rect">
+            <a:avLst/>
+          </a:prstGeom>
+          <a:noFill xmlns:a="http://schemas.openxmlformats.org/drawingml/2006/main"/>
+          <a:ln xmlns:a="http://schemas.openxmlformats.org/drawingml/2006/main" w="0">
+            <a:noFill/>
+          </a:ln>
+        </p:spPr>
+        <p:txBody>
+          <a:bodyPr xmlns:a="http://schemas.openxmlformats.org/drawingml/2006/main" wrap="square" lIns="0" tIns="0" rIns="0" bIns="0" anchor="t"/>
+          <a:lstStyle xmlns:a="http://schemas.openxmlformats.org/drawingml/2006/main"/>
+          <a:p xmlns:a="http://schemas.openxmlformats.org/drawingml/2006/main">
+            <a:r>
+              <a:rPr lang="en-US" sz="1200">
+                <a:solidFill>
+                  <a:srgbClr val="F0F3F2"/>
+                </a:solidFill>
+                <a:latin typeface="Arial"/>
+                <a:ea typeface="Arial"/>
+              </a:rPr>
+              <a:t>Unequal image frames · visual variety without decorative filler.</a:t>
+            </a:r>
+            <a:endParaRPr lang="en-US"/>
+          </a:p>
+        </p:txBody>
+      </p:sp>
+      <p:pic>
+        <p:nvPicPr>
+          <p:cNvPr id="9" name="image-evidence-0">
+            <a:extLst xmlns:a="http://schemas.openxmlformats.org/drawingml/2006/main">
+              <a:ext uri="{C183D7F6-B498-43B3-948B-1728B52AA6E4}">
+                <adec:decorative xmlns:adec="http://schemas.microsoft.com/office/drawing/2017/decorative" val="1"/>
+              </a:ext>
+            </a:extLst>
+          </p:cNvPr>
+          <p:cNvPicPr/>
+          <p:nvPr/>
+        </p:nvPicPr>
+        <p:blipFill>
+          <a:blip xmlns:r="http://schemas.openxmlformats.org/officeDocument/2006/relationships" xmlns:a="http://schemas.openxmlformats.org/drawingml/2006/main" r:embed="rIdOfficeKitImagec7b73f8fac405495_1"/>
+          <a:srcRect xmlns:a="http://schemas.openxmlformats.org/drawingml/2006/main" l="0" t="28354" r="0" b="28354"/>
+          <a:stretch xmlns:a="http://schemas.openxmlformats.org/drawingml/2006/main">
+            <a:fillRect/>
+          </a:stretch>
+        </p:blipFill>
+        <p:spPr>
+          <a:xfrm xmlns:a="http://schemas.openxmlformats.org/drawingml/2006/main">
             <a:off x="990600" y="3162300"/>
             <a:ext cx="3714750" cy="2857500"/>
           </a:xfrm>
@@ -2002,7 +2101,36 @@
       </p:pic>
       <p:pic>
         <p:nvPicPr>
-          <p:cNvPr id="9" name="image-evidence-1">
+          <p:cNvPr id="10" name="image-evidence-1">
+            <a:extLst xmlns:a="http://schemas.openxmlformats.org/drawingml/2006/main">
+              <a:ext uri="{C183D7F6-B498-43B3-948B-1728B52AA6E4}">
+                <adec:decorative xmlns:adec="http://schemas.microsoft.com/office/drawing/2017/decorative" val="1"/>
+              </a:ext>
+            </a:extLst>
+          </p:cNvPr>
+          <p:cNvPicPr/>
+          <p:nvPr/>
+        </p:nvPicPr>
+        <p:blipFill>
+          <a:blip xmlns:r="http://schemas.openxmlformats.org/officeDocument/2006/relationships" xmlns:a="http://schemas.openxmlformats.org/drawingml/2006/main" r:embed="rIdOfficeKitImage59ee3aa5202fd02f_1"/>
+          <a:srcRect xmlns:a="http://schemas.openxmlformats.org/drawingml/2006/main" l="0" t="39904" r="0" b="39904"/>
+          <a:stretch xmlns:a="http://schemas.openxmlformats.org/drawingml/2006/main">
+            <a:fillRect/>
+          </a:stretch>
+        </p:blipFill>
+        <p:spPr>
+          <a:xfrm xmlns:a="http://schemas.openxmlformats.org/drawingml/2006/main">
+            <a:off x="4895850" y="3162300"/>
+            <a:ext cx="3714750" cy="1333500"/>
+          </a:xfrm>
+          <a:prstGeom xmlns:a="http://schemas.openxmlformats.org/drawingml/2006/main" prst="rect">
+            <a:avLst/>
+          </a:prstGeom>
+        </p:spPr>
+      </p:pic>
+      <p:pic>
+        <p:nvPicPr>
+          <p:cNvPr id="11" name="image-evidence-2">
             <a:extLst xmlns:a="http://schemas.openxmlformats.org/drawingml/2006/main">
               <a:ext uri="{C183D7F6-B498-43B3-948B-1728B52AA6E4}">
                 <adec:decorative xmlns:adec="http://schemas.microsoft.com/office/drawing/2017/decorative" val="1"/>
@@ -2021,35 +2149,6 @@
         </p:blipFill>
         <p:spPr>
           <a:xfrm xmlns:a="http://schemas.openxmlformats.org/drawingml/2006/main">
-            <a:off x="4895850" y="3162300"/>
-            <a:ext cx="3714750" cy="1333500"/>
-          </a:xfrm>
-          <a:prstGeom xmlns:a="http://schemas.openxmlformats.org/drawingml/2006/main" prst="rect">
-            <a:avLst/>
-          </a:prstGeom>
-        </p:spPr>
-      </p:pic>
-      <p:pic>
-        <p:nvPicPr>
-          <p:cNvPr id="10" name="image-evidence-2">
-            <a:extLst xmlns:a="http://schemas.openxmlformats.org/drawingml/2006/main">
-              <a:ext uri="{C183D7F6-B498-43B3-948B-1728B52AA6E4}">
-                <adec:decorative xmlns:adec="http://schemas.microsoft.com/office/drawing/2017/decorative" val="1"/>
-              </a:ext>
-            </a:extLst>
-          </p:cNvPr>
-          <p:cNvPicPr/>
-          <p:nvPr/>
-        </p:nvPicPr>
-        <p:blipFill>
-          <a:blip xmlns:r="http://schemas.openxmlformats.org/officeDocument/2006/relationships" xmlns:a="http://schemas.openxmlformats.org/drawingml/2006/main" r:embed="rIdOfficeKitImage13db13f70d7843cc_1"/>
-          <a:srcRect xmlns:a="http://schemas.openxmlformats.org/drawingml/2006/main" l="0" t="39904" r="0" b="39904"/>
-          <a:stretch xmlns:a="http://schemas.openxmlformats.org/drawingml/2006/main">
-            <a:fillRect/>
-          </a:stretch>
-        </p:blipFill>
-        <p:spPr>
-          <a:xfrm xmlns:a="http://schemas.openxmlformats.org/drawingml/2006/main" flipH="1">
             <a:off x="4895850" y="4686300"/>
             <a:ext cx="3714750" cy="1333500"/>
           </a:xfrm>
@@ -2060,7 +2159,7 @@
       </p:pic>
       <p:sp>
         <p:nvSpPr>
-          <p:cNvPr id="11" name="image-matrix-label"/>
+          <p:cNvPr id="12" name="image-matrix-label"/>
           <p:cNvSpPr txBox="1"/>
           <p:nvPr/>
         </p:nvSpPr>
@@ -2097,7 +2196,7 @@
       </p:sp>
       <p:sp>
         <p:nvSpPr>
-          <p:cNvPr id="12" name="image-matrix-title"/>
+          <p:cNvPr id="13" name="image-matrix-title"/>
           <p:cNvSpPr txBox="1"/>
           <p:nvPr/>
         </p:nvSpPr>
@@ -2134,7 +2233,7 @@
       </p:sp>
       <p:sp>
         <p:nvSpPr>
-          <p:cNvPr id="13" name="image-matrix-body"/>
+          <p:cNvPr id="14" name="image-matrix-body"/>
           <p:cNvSpPr txBox="1"/>
           <p:nvPr/>
         </p:nvSpPr>
@@ -2171,7 +2270,7 @@
       </p:sp>
       <p:sp>
         <p:nvSpPr>
-          <p:cNvPr id="14" name="source"/>
+          <p:cNvPr id="15" name="source"/>
           <p:cNvSpPr txBox="1"/>
           <p:nvPr/>
         </p:nvSpPr>
@@ -2208,7 +2307,7 @@
       </p:sp>
       <p:sp>
         <p:nvSpPr>
-          <p:cNvPr id="15" name="page-number"/>
+          <p:cNvPr id="16" name="page-number"/>
           <p:cNvSpPr txBox="1"/>
           <p:nvPr/>
         </p:nvSpPr>
@@ -2305,16 +2404,83 @@
           </a:p>
         </p:txBody>
       </p:sp>
-      <p:sp>
-        <p:nvSpPr>
-          <p:cNvPr id="3" name="visual-top-rule"/>
+      <p:pic>
+        <p:nvPicPr>
+          <p:cNvPr id="3" name="visual-photo-band">
+            <a:extLst xmlns:a="http://schemas.openxmlformats.org/drawingml/2006/main">
+              <a:ext uri="{C183D7F6-B498-43B3-948B-1728B52AA6E4}">
+                <adec:decorative xmlns:adec="http://schemas.microsoft.com/office/drawing/2017/decorative" val="1"/>
+              </a:ext>
+            </a:extLst>
+          </p:cNvPr>
+          <p:cNvPicPr/>
+          <p:nvPr/>
+        </p:nvPicPr>
+        <p:blipFill>
+          <a:blip xmlns:r="http://schemas.openxmlformats.org/officeDocument/2006/relationships" xmlns:a="http://schemas.openxmlformats.org/drawingml/2006/main" r:embed="rIdOfficeKitImage31956823b229fb66_1"/>
+          <a:srcRect xmlns:a="http://schemas.openxmlformats.org/drawingml/2006/main" l="0" t="47256" r="0" b="47256"/>
+          <a:stretch xmlns:a="http://schemas.openxmlformats.org/drawingml/2006/main">
+            <a:fillRect/>
+          </a:stretch>
+        </p:blipFill>
+        <p:spPr>
+          <a:xfrm xmlns:a="http://schemas.openxmlformats.org/drawingml/2006/main">
+            <a:off x="0" y="0"/>
+            <a:ext cx="15240000" cy="1485900"/>
+          </a:xfrm>
+          <a:prstGeom xmlns:a="http://schemas.openxmlformats.org/drawingml/2006/main" prst="rect">
+            <a:avLst/>
+          </a:prstGeom>
+        </p:spPr>
+      </p:pic>
+      <p:sp>
+        <p:nvSpPr>
+          <p:cNvPr id="4" name="visual-photo-scrim"/>
           <p:cNvSpPr/>
           <p:nvPr/>
         </p:nvSpPr>
         <p:spPr>
           <a:xfrm xmlns:a="http://schemas.openxmlformats.org/drawingml/2006/main">
-            <a:off x="838200" y="666750"/>
-            <a:ext cx="13563600" cy="0"/>
+            <a:off x="0" y="0"/>
+            <a:ext cx="15240000" cy="1485900"/>
+          </a:xfrm>
+          <a:prstGeom xmlns:a="http://schemas.openxmlformats.org/drawingml/2006/main" prst="rect">
+            <a:avLst/>
+          </a:prstGeom>
+          <a:solidFill xmlns:a="http://schemas.openxmlformats.org/drawingml/2006/main">
+            <a:srgbClr val="243535">
+              <a:alpha val="62000"/>
+            </a:srgbClr>
+          </a:solidFill>
+          <a:ln xmlns:a="http://schemas.openxmlformats.org/drawingml/2006/main" w="0">
+            <a:solidFill>
+              <a:srgbClr val="243535"/>
+            </a:solidFill>
+            <a:prstDash val="solid"/>
+          </a:ln>
+        </p:spPr>
+        <p:txBody>
+          <a:bodyPr xmlns:a="http://schemas.openxmlformats.org/drawingml/2006/main" wrap="square" lIns="0" tIns="0" rIns="0" bIns="0" anchor="t"/>
+          <a:lstStyle xmlns:a="http://schemas.openxmlformats.org/drawingml/2006/main"/>
+          <a:p xmlns:a="http://schemas.openxmlformats.org/drawingml/2006/main">
+            <a:r>
+              <a:rPr lang="en-US"/>
+              <a:t/>
+            </a:r>
+            <a:endParaRPr lang="en-US"/>
+          </a:p>
+        </p:txBody>
+      </p:sp>
+      <p:sp>
+        <p:nvSpPr>
+          <p:cNvPr id="5" name="visual-photo-rule"/>
+          <p:cNvSpPr/>
+          <p:nvPr/>
+        </p:nvSpPr>
+        <p:spPr>
+          <a:xfrm xmlns:a="http://schemas.openxmlformats.org/drawingml/2006/main">
+            <a:off x="914400" y="1438275"/>
+            <a:ext cx="13411200" cy="0"/>
           </a:xfrm>
           <a:prstGeom xmlns:a="http://schemas.openxmlformats.org/drawingml/2006/main" prst="line">
             <a:avLst/>
@@ -2341,29 +2507,29 @@
       </p:sp>
       <p:sp>
         <p:nvSpPr>
-          <p:cNvPr id="4" name="RIVER HANDBOOK · VISUAL CARRIER"/>
-          <p:cNvSpPr txBox="1"/>
-          <p:nvPr/>
-        </p:nvSpPr>
-        <p:spPr>
-          <a:xfrm xmlns:a="http://schemas.openxmlformats.org/drawingml/2006/main">
-            <a:off x="914400" y="895350"/>
-            <a:ext cx="7239000" cy="228600"/>
-          </a:xfrm>
-          <a:prstGeom xmlns:a="http://schemas.openxmlformats.org/drawingml/2006/main" prst="rect">
-            <a:avLst/>
-          </a:prstGeom>
-          <a:noFill xmlns:a="http://schemas.openxmlformats.org/drawingml/2006/main"/>
-          <a:ln xmlns:a="http://schemas.openxmlformats.org/drawingml/2006/main" w="0">
-            <a:noFill/>
-          </a:ln>
-        </p:spPr>
-        <p:txBody>
-          <a:bodyPr xmlns:a="http://schemas.openxmlformats.org/drawingml/2006/main" wrap="square" lIns="0" tIns="0" rIns="0" bIns="0" anchor="t"/>
-          <a:lstStyle xmlns:a="http://schemas.openxmlformats.org/drawingml/2006/main"/>
-          <a:p xmlns:a="http://schemas.openxmlformats.org/drawingml/2006/main">
-            <a:r>
-              <a:rPr lang="en-US" sz="1200" b="1">
+          <p:cNvPr id="6" name="RIVER HANDBOOK · VISUAL CARRIER"/>
+          <p:cNvSpPr txBox="1"/>
+          <p:nvPr/>
+        </p:nvSpPr>
+        <p:spPr>
+          <a:xfrm xmlns:a="http://schemas.openxmlformats.org/drawingml/2006/main">
+            <a:off x="914400" y="228600"/>
+            <a:ext cx="9525000" cy="190500"/>
+          </a:xfrm>
+          <a:prstGeom xmlns:a="http://schemas.openxmlformats.org/drawingml/2006/main" prst="rect">
+            <a:avLst/>
+          </a:prstGeom>
+          <a:noFill xmlns:a="http://schemas.openxmlformats.org/drawingml/2006/main"/>
+          <a:ln xmlns:a="http://schemas.openxmlformats.org/drawingml/2006/main" w="0">
+            <a:noFill/>
+          </a:ln>
+        </p:spPr>
+        <p:txBody>
+          <a:bodyPr xmlns:a="http://schemas.openxmlformats.org/drawingml/2006/main" wrap="square" lIns="0" tIns="0" rIns="0" bIns="0" anchor="t"/>
+          <a:lstStyle xmlns:a="http://schemas.openxmlformats.org/drawingml/2006/main"/>
+          <a:p xmlns:a="http://schemas.openxmlformats.org/drawingml/2006/main">
+            <a:r>
+              <a:rPr lang="en-US" sz="1050" b="1">
                 <a:solidFill>
                   <a:srgbClr val="277B91"/>
                 </a:solidFill>
@@ -2378,31 +2544,31 @@
       </p:sp>
       <p:sp>
         <p:nvSpPr>
-          <p:cNvPr id="5" name="visual-title"/>
-          <p:cNvSpPr txBox="1"/>
-          <p:nvPr/>
-        </p:nvSpPr>
-        <p:spPr>
-          <a:xfrm xmlns:a="http://schemas.openxmlformats.org/drawingml/2006/main">
-            <a:off x="914400" y="1314450"/>
-            <a:ext cx="11811000" cy="552450"/>
-          </a:xfrm>
-          <a:prstGeom xmlns:a="http://schemas.openxmlformats.org/drawingml/2006/main" prst="rect">
-            <a:avLst/>
-          </a:prstGeom>
-          <a:noFill xmlns:a="http://schemas.openxmlformats.org/drawingml/2006/main"/>
-          <a:ln xmlns:a="http://schemas.openxmlformats.org/drawingml/2006/main" w="0">
-            <a:noFill/>
-          </a:ln>
-        </p:spPr>
-        <p:txBody>
-          <a:bodyPr xmlns:a="http://schemas.openxmlformats.org/drawingml/2006/main" wrap="square" lIns="0" tIns="0" rIns="0" bIns="0" anchor="t"/>
-          <a:lstStyle xmlns:a="http://schemas.openxmlformats.org/drawingml/2006/main"/>
-          <a:p xmlns:a="http://schemas.openxmlformats.org/drawingml/2006/main">
-            <a:r>
-              <a:rPr lang="en-US" sz="2850" b="1">
-                <a:solidFill>
-                  <a:srgbClr val="243535"/>
+          <p:cNvPr id="7" name="visual-title"/>
+          <p:cNvSpPr txBox="1"/>
+          <p:nvPr/>
+        </p:nvSpPr>
+        <p:spPr>
+          <a:xfrm xmlns:a="http://schemas.openxmlformats.org/drawingml/2006/main">
+            <a:off x="914400" y="495300"/>
+            <a:ext cx="12001500" cy="457200"/>
+          </a:xfrm>
+          <a:prstGeom xmlns:a="http://schemas.openxmlformats.org/drawingml/2006/main" prst="rect">
+            <a:avLst/>
+          </a:prstGeom>
+          <a:noFill xmlns:a="http://schemas.openxmlformats.org/drawingml/2006/main"/>
+          <a:ln xmlns:a="http://schemas.openxmlformats.org/drawingml/2006/main" w="0">
+            <a:noFill/>
+          </a:ln>
+        </p:spPr>
+        <p:txBody>
+          <a:bodyPr xmlns:a="http://schemas.openxmlformats.org/drawingml/2006/main" wrap="square" lIns="0" tIns="0" rIns="0" bIns="0" anchor="t"/>
+          <a:lstStyle xmlns:a="http://schemas.openxmlformats.org/drawingml/2006/main"/>
+          <a:p xmlns:a="http://schemas.openxmlformats.org/drawingml/2006/main">
+            <a:r>
+              <a:rPr lang="en-US" sz="2550" b="1">
+                <a:solidFill>
+                  <a:srgbClr val="FFFFFF"/>
                 </a:solidFill>
                 <a:latin typeface="Arial"/>
                 <a:ea typeface="Arial"/>
@@ -2415,31 +2581,31 @@
       </p:sp>
       <p:sp>
         <p:nvSpPr>
-          <p:cNvPr id="6" name="visual-body"/>
-          <p:cNvSpPr txBox="1"/>
-          <p:nvPr/>
-        </p:nvSpPr>
-        <p:spPr>
-          <a:xfrm xmlns:a="http://schemas.openxmlformats.org/drawingml/2006/main">
-            <a:off x="952500" y="1981200"/>
-            <a:ext cx="10477500" cy="266700"/>
-          </a:xfrm>
-          <a:prstGeom xmlns:a="http://schemas.openxmlformats.org/drawingml/2006/main" prst="rect">
-            <a:avLst/>
-          </a:prstGeom>
-          <a:noFill xmlns:a="http://schemas.openxmlformats.org/drawingml/2006/main"/>
-          <a:ln xmlns:a="http://schemas.openxmlformats.org/drawingml/2006/main" w="0">
-            <a:noFill/>
-          </a:ln>
-        </p:spPr>
-        <p:txBody>
-          <a:bodyPr xmlns:a="http://schemas.openxmlformats.org/drawingml/2006/main" wrap="square" lIns="0" tIns="0" rIns="0" bIns="0" anchor="t"/>
-          <a:lstStyle xmlns:a="http://schemas.openxmlformats.org/drawingml/2006/main"/>
-          <a:p xmlns:a="http://schemas.openxmlformats.org/drawingml/2006/main">
-            <a:r>
-              <a:rPr lang="en-US" sz="1350">
-                <a:solidFill>
-                  <a:srgbClr val="8D928C"/>
+          <p:cNvPr id="8" name="visual-body"/>
+          <p:cNvSpPr txBox="1"/>
+          <p:nvPr/>
+        </p:nvSpPr>
+        <p:spPr>
+          <a:xfrm xmlns:a="http://schemas.openxmlformats.org/drawingml/2006/main">
+            <a:off x="952500" y="1066800"/>
+            <a:ext cx="11049000" cy="228600"/>
+          </a:xfrm>
+          <a:prstGeom xmlns:a="http://schemas.openxmlformats.org/drawingml/2006/main" prst="rect">
+            <a:avLst/>
+          </a:prstGeom>
+          <a:noFill xmlns:a="http://schemas.openxmlformats.org/drawingml/2006/main"/>
+          <a:ln xmlns:a="http://schemas.openxmlformats.org/drawingml/2006/main" w="0">
+            <a:noFill/>
+          </a:ln>
+        </p:spPr>
+        <p:txBody>
+          <a:bodyPr xmlns:a="http://schemas.openxmlformats.org/drawingml/2006/main" wrap="square" lIns="0" tIns="0" rIns="0" bIns="0" anchor="t"/>
+          <a:lstStyle xmlns:a="http://schemas.openxmlformats.org/drawingml/2006/main"/>
+          <a:p xmlns:a="http://schemas.openxmlformats.org/drawingml/2006/main">
+            <a:r>
+              <a:rPr lang="en-US" sz="1200">
+                <a:solidFill>
+                  <a:srgbClr val="F0F3F2"/>
                 </a:solidFill>
                 <a:latin typeface="Arial"/>
                 <a:ea typeface="Arial"/>
@@ -2452,41 +2618,7 @@
       </p:sp>
       <p:sp>
         <p:nvSpPr>
-          <p:cNvPr id="7" name="visual-rule"/>
-          <p:cNvSpPr/>
-          <p:nvPr/>
-        </p:nvSpPr>
-        <p:spPr>
-          <a:xfrm xmlns:a="http://schemas.openxmlformats.org/drawingml/2006/main">
-            <a:off x="914400" y="2457450"/>
-            <a:ext cx="13411200" cy="0"/>
-          </a:xfrm>
-          <a:prstGeom xmlns:a="http://schemas.openxmlformats.org/drawingml/2006/main" prst="line">
-            <a:avLst/>
-          </a:prstGeom>
-          <a:noFill xmlns:a="http://schemas.openxmlformats.org/drawingml/2006/main"/>
-          <a:ln xmlns:a="http://schemas.openxmlformats.org/drawingml/2006/main" w="25400">
-            <a:solidFill>
-              <a:srgbClr val="8D928C"/>
-            </a:solidFill>
-            <a:prstDash val="solid"/>
-          </a:ln>
-        </p:spPr>
-        <p:txBody>
-          <a:bodyPr xmlns:a="http://schemas.openxmlformats.org/drawingml/2006/main" wrap="square" lIns="0" tIns="0" rIns="0" bIns="0" anchor="t"/>
-          <a:lstStyle xmlns:a="http://schemas.openxmlformats.org/drawingml/2006/main"/>
-          <a:p xmlns:a="http://schemas.openxmlformats.org/drawingml/2006/main">
-            <a:r>
-              <a:rPr lang="en-US"/>
-              <a:t/>
-            </a:r>
-            <a:endParaRPr lang="en-US"/>
-          </a:p>
-        </p:txBody>
-      </p:sp>
-      <p:sp>
-        <p:nvSpPr>
-          <p:cNvPr id="8" name="native-carrier-baseline"/>
+          <p:cNvPr id="9" name="native-carrier-baseline"/>
           <p:cNvSpPr/>
           <p:nvPr/>
         </p:nvSpPr>
@@ -2520,7 +2652,7 @@
       </p:sp>
       <p:sp>
         <p:nvSpPr>
-          <p:cNvPr id="9" name="native-carrier-bar-0"/>
+          <p:cNvPr id="10" name="native-carrier-bar-0"/>
           <p:cNvSpPr/>
           <p:nvPr/>
         </p:nvSpPr>
@@ -2556,7 +2688,7 @@
       </p:sp>
       <p:sp>
         <p:nvSpPr>
-          <p:cNvPr id="10" name="native-carrier-value-0"/>
+          <p:cNvPr id="11" name="native-carrier-value-0"/>
           <p:cNvSpPr txBox="1"/>
           <p:nvPr/>
         </p:nvSpPr>
@@ -2594,7 +2726,7 @@
       </p:sp>
       <p:sp>
         <p:nvSpPr>
-          <p:cNvPr id="11" name="native-carrier-label-0"/>
+          <p:cNvPr id="12" name="native-carrier-label-0"/>
           <p:cNvSpPr txBox="1"/>
           <p:nvPr/>
         </p:nvSpPr>
@@ -2632,7 +2764,7 @@
       </p:sp>
       <p:sp>
         <p:nvSpPr>
-          <p:cNvPr id="12" name="native-carrier-bar-1"/>
+          <p:cNvPr id="13" name="native-carrier-bar-1"/>
           <p:cNvSpPr/>
           <p:nvPr/>
         </p:nvSpPr>
@@ -2668,7 +2800,7 @@
       </p:sp>
       <p:sp>
         <p:nvSpPr>
-          <p:cNvPr id="13" name="native-carrier-value-1"/>
+          <p:cNvPr id="14" name="native-carrier-value-1"/>
           <p:cNvSpPr txBox="1"/>
           <p:nvPr/>
         </p:nvSpPr>
@@ -2706,7 +2838,7 @@
       </p:sp>
       <p:sp>
         <p:nvSpPr>
-          <p:cNvPr id="14" name="native-carrier-label-1"/>
+          <p:cNvPr id="15" name="native-carrier-label-1"/>
           <p:cNvSpPr txBox="1"/>
           <p:nvPr/>
         </p:nvSpPr>
@@ -2744,7 +2876,7 @@
       </p:sp>
       <p:sp>
         <p:nvSpPr>
-          <p:cNvPr id="15" name="native-carrier-bar-2"/>
+          <p:cNvPr id="16" name="native-carrier-bar-2"/>
           <p:cNvSpPr/>
           <p:nvPr/>
         </p:nvSpPr>
@@ -2780,7 +2912,7 @@
       </p:sp>
       <p:sp>
         <p:nvSpPr>
-          <p:cNvPr id="16" name="native-carrier-value-2"/>
+          <p:cNvPr id="17" name="native-carrier-value-2"/>
           <p:cNvSpPr txBox="1"/>
           <p:nvPr/>
         </p:nvSpPr>
@@ -2818,7 +2950,7 @@
       </p:sp>
       <p:sp>
         <p:nvSpPr>
-          <p:cNvPr id="17" name="native-carrier-label-2"/>
+          <p:cNvPr id="18" name="native-carrier-label-2"/>
           <p:cNvSpPr txBox="1"/>
           <p:nvPr/>
         </p:nvSpPr>
@@ -2856,7 +2988,7 @@
       </p:sp>
       <p:sp>
         <p:nvSpPr>
-          <p:cNvPr id="18" name="native-carrier-bar-3"/>
+          <p:cNvPr id="19" name="native-carrier-bar-3"/>
           <p:cNvSpPr/>
           <p:nvPr/>
         </p:nvSpPr>
@@ -2892,7 +3024,7 @@
       </p:sp>
       <p:sp>
         <p:nvSpPr>
-          <p:cNvPr id="19" name="native-carrier-value-3"/>
+          <p:cNvPr id="20" name="native-carrier-value-3"/>
           <p:cNvSpPr txBox="1"/>
           <p:nvPr/>
         </p:nvSpPr>
@@ -2930,7 +3062,7 @@
       </p:sp>
       <p:sp>
         <p:nvSpPr>
-          <p:cNvPr id="20" name="native-carrier-label-3"/>
+          <p:cNvPr id="21" name="native-carrier-label-3"/>
           <p:cNvSpPr txBox="1"/>
           <p:nvPr/>
         </p:nvSpPr>
@@ -2968,7 +3100,7 @@
       </p:sp>
       <p:sp>
         <p:nvSpPr>
-          <p:cNvPr id="21" name="native-carrier-trend"/>
+          <p:cNvPr id="22" name="native-carrier-trend"/>
           <p:cNvSpPr/>
           <p:nvPr/>
         </p:nvSpPr>
@@ -3002,7 +3134,7 @@
       </p:sp>
       <p:sp>
         <p:nvSpPr>
-          <p:cNvPr id="22" name="native-carrier-note"/>
+          <p:cNvPr id="23" name="native-carrier-note"/>
           <p:cNvSpPr txBox="1"/>
           <p:nvPr/>
         </p:nvSpPr>
@@ -3039,7 +3171,7 @@
       </p:sp>
       <p:sp>
         <p:nvSpPr>
-          <p:cNvPr id="23" name="visual-note"/>
+          <p:cNvPr id="24" name="visual-note"/>
           <p:cNvSpPr/>
           <p:nvPr/>
         </p:nvSpPr>
@@ -3075,7 +3207,7 @@
       </p:sp>
       <p:sp>
         <p:nvSpPr>
-          <p:cNvPr id="24" name="visual-note-label"/>
+          <p:cNvPr id="25" name="visual-note-label"/>
           <p:cNvSpPr txBox="1"/>
           <p:nvPr/>
         </p:nvSpPr>
@@ -3112,7 +3244,7 @@
       </p:sp>
       <p:sp>
         <p:nvSpPr>
-          <p:cNvPr id="25" name="visual-note-text"/>
+          <p:cNvPr id="26" name="visual-note-text"/>
           <p:cNvSpPr txBox="1"/>
           <p:nvPr/>
         </p:nvSpPr>
@@ -3149,7 +3281,7 @@
       </p:sp>
       <p:sp>
         <p:nvSpPr>
-          <p:cNvPr id="26" name="visual-note-foot"/>
+          <p:cNvPr id="27" name="visual-note-foot"/>
           <p:cNvSpPr txBox="1"/>
           <p:nvPr/>
         </p:nvSpPr>
@@ -3186,7 +3318,7 @@
       </p:sp>
       <p:sp>
         <p:nvSpPr>
-          <p:cNvPr id="27" name="source"/>
+          <p:cNvPr id="28" name="source"/>
           <p:cNvSpPr txBox="1"/>
           <p:nvPr/>
         </p:nvSpPr>
@@ -3223,7 +3355,7 @@
       </p:sp>
       <p:sp>
         <p:nvSpPr>
-          <p:cNvPr id="28" name="page-number"/>
+          <p:cNvPr id="29" name="page-number"/>
           <p:cNvSpPr txBox="1"/>
           <p:nvPr/>
         </p:nvSpPr>
@@ -3320,16 +3452,83 @@
           </a:p>
         </p:txBody>
       </p:sp>
-      <p:sp>
-        <p:nvSpPr>
-          <p:cNvPr id="3" name="close-top-rule"/>
+      <p:pic>
+        <p:nvPicPr>
+          <p:cNvPr id="3" name="close-photo-band">
+            <a:extLst xmlns:a="http://schemas.openxmlformats.org/drawingml/2006/main">
+              <a:ext uri="{C183D7F6-B498-43B3-948B-1728B52AA6E4}">
+                <adec:decorative xmlns:adec="http://schemas.microsoft.com/office/drawing/2017/decorative" val="1"/>
+              </a:ext>
+            </a:extLst>
+          </p:cNvPr>
+          <p:cNvPicPr/>
+          <p:nvPr/>
+        </p:nvPicPr>
+        <p:blipFill>
+          <a:blip xmlns:r="http://schemas.openxmlformats.org/officeDocument/2006/relationships" xmlns:a="http://schemas.openxmlformats.org/drawingml/2006/main" r:embed="rIdOfficeKitImage59ee3aa5202fd02f_1"/>
+          <a:srcRect xmlns:a="http://schemas.openxmlformats.org/drawingml/2006/main" l="0" t="47258" r="0" b="47258"/>
+          <a:stretch xmlns:a="http://schemas.openxmlformats.org/drawingml/2006/main">
+            <a:fillRect/>
+          </a:stretch>
+        </p:blipFill>
+        <p:spPr>
+          <a:xfrm xmlns:a="http://schemas.openxmlformats.org/drawingml/2006/main">
+            <a:off x="0" y="0"/>
+            <a:ext cx="15240000" cy="1485900"/>
+          </a:xfrm>
+          <a:prstGeom xmlns:a="http://schemas.openxmlformats.org/drawingml/2006/main" prst="rect">
+            <a:avLst/>
+          </a:prstGeom>
+        </p:spPr>
+      </p:pic>
+      <p:sp>
+        <p:nvSpPr>
+          <p:cNvPr id="4" name="close-photo-scrim"/>
           <p:cNvSpPr/>
           <p:nvPr/>
         </p:nvSpPr>
         <p:spPr>
           <a:xfrm xmlns:a="http://schemas.openxmlformats.org/drawingml/2006/main">
-            <a:off x="838200" y="666750"/>
-            <a:ext cx="13563600" cy="0"/>
+            <a:off x="0" y="0"/>
+            <a:ext cx="15240000" cy="1485900"/>
+          </a:xfrm>
+          <a:prstGeom xmlns:a="http://schemas.openxmlformats.org/drawingml/2006/main" prst="rect">
+            <a:avLst/>
+          </a:prstGeom>
+          <a:solidFill xmlns:a="http://schemas.openxmlformats.org/drawingml/2006/main">
+            <a:srgbClr val="243535">
+              <a:alpha val="62000"/>
+            </a:srgbClr>
+          </a:solidFill>
+          <a:ln xmlns:a="http://schemas.openxmlformats.org/drawingml/2006/main" w="0">
+            <a:solidFill>
+              <a:srgbClr val="243535"/>
+            </a:solidFill>
+            <a:prstDash val="solid"/>
+          </a:ln>
+        </p:spPr>
+        <p:txBody>
+          <a:bodyPr xmlns:a="http://schemas.openxmlformats.org/drawingml/2006/main" wrap="square" lIns="0" tIns="0" rIns="0" bIns="0" anchor="t"/>
+          <a:lstStyle xmlns:a="http://schemas.openxmlformats.org/drawingml/2006/main"/>
+          <a:p xmlns:a="http://schemas.openxmlformats.org/drawingml/2006/main">
+            <a:r>
+              <a:rPr lang="en-US"/>
+              <a:t/>
+            </a:r>
+            <a:endParaRPr lang="en-US"/>
+          </a:p>
+        </p:txBody>
+      </p:sp>
+      <p:sp>
+        <p:nvSpPr>
+          <p:cNvPr id="5" name="close-photo-rule"/>
+          <p:cNvSpPr/>
+          <p:nvPr/>
+        </p:nvSpPr>
+        <p:spPr>
+          <a:xfrm xmlns:a="http://schemas.openxmlformats.org/drawingml/2006/main">
+            <a:off x="914400" y="1438275"/>
+            <a:ext cx="13411200" cy="0"/>
           </a:xfrm>
           <a:prstGeom xmlns:a="http://schemas.openxmlformats.org/drawingml/2006/main" prst="line">
             <a:avLst/>
@@ -3356,29 +3555,29 @@
       </p:sp>
       <p:sp>
         <p:nvSpPr>
-          <p:cNvPr id="4" name="RIVER HANDBOOK · CLOSE"/>
-          <p:cNvSpPr txBox="1"/>
-          <p:nvPr/>
-        </p:nvSpPr>
-        <p:spPr>
-          <a:xfrm xmlns:a="http://schemas.openxmlformats.org/drawingml/2006/main">
-            <a:off x="914400" y="895350"/>
-            <a:ext cx="7239000" cy="228600"/>
-          </a:xfrm>
-          <a:prstGeom xmlns:a="http://schemas.openxmlformats.org/drawingml/2006/main" prst="rect">
-            <a:avLst/>
-          </a:prstGeom>
-          <a:noFill xmlns:a="http://schemas.openxmlformats.org/drawingml/2006/main"/>
-          <a:ln xmlns:a="http://schemas.openxmlformats.org/drawingml/2006/main" w="0">
-            <a:noFill/>
-          </a:ln>
-        </p:spPr>
-        <p:txBody>
-          <a:bodyPr xmlns:a="http://schemas.openxmlformats.org/drawingml/2006/main" wrap="square" lIns="0" tIns="0" rIns="0" bIns="0" anchor="t"/>
-          <a:lstStyle xmlns:a="http://schemas.openxmlformats.org/drawingml/2006/main"/>
-          <a:p xmlns:a="http://schemas.openxmlformats.org/drawingml/2006/main">
-            <a:r>
-              <a:rPr lang="en-US" sz="1200" b="1">
+          <p:cNvPr id="6" name="RIVER HANDBOOK · CLOSE"/>
+          <p:cNvSpPr txBox="1"/>
+          <p:nvPr/>
+        </p:nvSpPr>
+        <p:spPr>
+          <a:xfrm xmlns:a="http://schemas.openxmlformats.org/drawingml/2006/main">
+            <a:off x="914400" y="228600"/>
+            <a:ext cx="9525000" cy="190500"/>
+          </a:xfrm>
+          <a:prstGeom xmlns:a="http://schemas.openxmlformats.org/drawingml/2006/main" prst="rect">
+            <a:avLst/>
+          </a:prstGeom>
+          <a:noFill xmlns:a="http://schemas.openxmlformats.org/drawingml/2006/main"/>
+          <a:ln xmlns:a="http://schemas.openxmlformats.org/drawingml/2006/main" w="0">
+            <a:noFill/>
+          </a:ln>
+        </p:spPr>
+        <p:txBody>
+          <a:bodyPr xmlns:a="http://schemas.openxmlformats.org/drawingml/2006/main" wrap="square" lIns="0" tIns="0" rIns="0" bIns="0" anchor="t"/>
+          <a:lstStyle xmlns:a="http://schemas.openxmlformats.org/drawingml/2006/main"/>
+          <a:p xmlns:a="http://schemas.openxmlformats.org/drawingml/2006/main">
+            <a:r>
+              <a:rPr lang="en-US" sz="1050" b="1">
                 <a:solidFill>
                   <a:srgbClr val="277B91"/>
                 </a:solidFill>
@@ -3393,31 +3592,31 @@
       </p:sp>
       <p:sp>
         <p:nvSpPr>
-          <p:cNvPr id="5" name="close-title"/>
-          <p:cNvSpPr txBox="1"/>
-          <p:nvPr/>
-        </p:nvSpPr>
-        <p:spPr>
-          <a:xfrm xmlns:a="http://schemas.openxmlformats.org/drawingml/2006/main">
-            <a:off x="914400" y="1314450"/>
-            <a:ext cx="11811000" cy="552450"/>
-          </a:xfrm>
-          <a:prstGeom xmlns:a="http://schemas.openxmlformats.org/drawingml/2006/main" prst="rect">
-            <a:avLst/>
-          </a:prstGeom>
-          <a:noFill xmlns:a="http://schemas.openxmlformats.org/drawingml/2006/main"/>
-          <a:ln xmlns:a="http://schemas.openxmlformats.org/drawingml/2006/main" w="0">
-            <a:noFill/>
-          </a:ln>
-        </p:spPr>
-        <p:txBody>
-          <a:bodyPr xmlns:a="http://schemas.openxmlformats.org/drawingml/2006/main" wrap="square" lIns="0" tIns="0" rIns="0" bIns="0" anchor="t"/>
-          <a:lstStyle xmlns:a="http://schemas.openxmlformats.org/drawingml/2006/main"/>
-          <a:p xmlns:a="http://schemas.openxmlformats.org/drawingml/2006/main">
-            <a:r>
-              <a:rPr lang="en-US" sz="2850" b="1">
-                <a:solidFill>
-                  <a:srgbClr val="243535"/>
+          <p:cNvPr id="7" name="close-title"/>
+          <p:cNvSpPr txBox="1"/>
+          <p:nvPr/>
+        </p:nvSpPr>
+        <p:spPr>
+          <a:xfrm xmlns:a="http://schemas.openxmlformats.org/drawingml/2006/main">
+            <a:off x="914400" y="495300"/>
+            <a:ext cx="12001500" cy="457200"/>
+          </a:xfrm>
+          <a:prstGeom xmlns:a="http://schemas.openxmlformats.org/drawingml/2006/main" prst="rect">
+            <a:avLst/>
+          </a:prstGeom>
+          <a:noFill xmlns:a="http://schemas.openxmlformats.org/drawingml/2006/main"/>
+          <a:ln xmlns:a="http://schemas.openxmlformats.org/drawingml/2006/main" w="0">
+            <a:noFill/>
+          </a:ln>
+        </p:spPr>
+        <p:txBody>
+          <a:bodyPr xmlns:a="http://schemas.openxmlformats.org/drawingml/2006/main" wrap="square" lIns="0" tIns="0" rIns="0" bIns="0" anchor="t"/>
+          <a:lstStyle xmlns:a="http://schemas.openxmlformats.org/drawingml/2006/main"/>
+          <a:p xmlns:a="http://schemas.openxmlformats.org/drawingml/2006/main">
+            <a:r>
+              <a:rPr lang="en-US" sz="2550" b="1">
+                <a:solidFill>
+                  <a:srgbClr val="FFFFFF"/>
                 </a:solidFill>
                 <a:latin typeface="Arial"/>
                 <a:ea typeface="Arial"/>
@@ -3430,31 +3629,31 @@
       </p:sp>
       <p:sp>
         <p:nvSpPr>
-          <p:cNvPr id="6" name="close-basis"/>
-          <p:cNvSpPr txBox="1"/>
-          <p:nvPr/>
-        </p:nvSpPr>
-        <p:spPr>
-          <a:xfrm xmlns:a="http://schemas.openxmlformats.org/drawingml/2006/main">
-            <a:off x="952500" y="1981200"/>
-            <a:ext cx="10477500" cy="266700"/>
-          </a:xfrm>
-          <a:prstGeom xmlns:a="http://schemas.openxmlformats.org/drawingml/2006/main" prst="rect">
-            <a:avLst/>
-          </a:prstGeom>
-          <a:noFill xmlns:a="http://schemas.openxmlformats.org/drawingml/2006/main"/>
-          <a:ln xmlns:a="http://schemas.openxmlformats.org/drawingml/2006/main" w="0">
-            <a:noFill/>
-          </a:ln>
-        </p:spPr>
-        <p:txBody>
-          <a:bodyPr xmlns:a="http://schemas.openxmlformats.org/drawingml/2006/main" wrap="square" lIns="0" tIns="0" rIns="0" bIns="0" anchor="t"/>
-          <a:lstStyle xmlns:a="http://schemas.openxmlformats.org/drawingml/2006/main"/>
-          <a:p xmlns:a="http://schemas.openxmlformats.org/drawingml/2006/main">
-            <a:r>
-              <a:rPr lang="en-US" sz="1350">
-                <a:solidFill>
-                  <a:srgbClr val="8D928C"/>
+          <p:cNvPr id="8" name="close-basis"/>
+          <p:cNvSpPr txBox="1"/>
+          <p:nvPr/>
+        </p:nvSpPr>
+        <p:spPr>
+          <a:xfrm xmlns:a="http://schemas.openxmlformats.org/drawingml/2006/main">
+            <a:off x="952500" y="1066800"/>
+            <a:ext cx="11049000" cy="228600"/>
+          </a:xfrm>
+          <a:prstGeom xmlns:a="http://schemas.openxmlformats.org/drawingml/2006/main" prst="rect">
+            <a:avLst/>
+          </a:prstGeom>
+          <a:noFill xmlns:a="http://schemas.openxmlformats.org/drawingml/2006/main"/>
+          <a:ln xmlns:a="http://schemas.openxmlformats.org/drawingml/2006/main" w="0">
+            <a:noFill/>
+          </a:ln>
+        </p:spPr>
+        <p:txBody>
+          <a:bodyPr xmlns:a="http://schemas.openxmlformats.org/drawingml/2006/main" wrap="square" lIns="0" tIns="0" rIns="0" bIns="0" anchor="t"/>
+          <a:lstStyle xmlns:a="http://schemas.openxmlformats.org/drawingml/2006/main"/>
+          <a:p xmlns:a="http://schemas.openxmlformats.org/drawingml/2006/main">
+            <a:r>
+              <a:rPr lang="en-US" sz="1200">
+                <a:solidFill>
+                  <a:srgbClr val="F0F3F2"/>
                 </a:solidFill>
                 <a:latin typeface="Arial"/>
                 <a:ea typeface="Arial"/>
@@ -3467,41 +3666,7 @@
       </p:sp>
       <p:sp>
         <p:nvSpPr>
-          <p:cNvPr id="7" name="close-rule"/>
-          <p:cNvSpPr/>
-          <p:nvPr/>
-        </p:nvSpPr>
-        <p:spPr>
-          <a:xfrm xmlns:a="http://schemas.openxmlformats.org/drawingml/2006/main">
-            <a:off x="914400" y="2457450"/>
-            <a:ext cx="13411200" cy="0"/>
-          </a:xfrm>
-          <a:prstGeom xmlns:a="http://schemas.openxmlformats.org/drawingml/2006/main" prst="line">
-            <a:avLst/>
-          </a:prstGeom>
-          <a:noFill xmlns:a="http://schemas.openxmlformats.org/drawingml/2006/main"/>
-          <a:ln xmlns:a="http://schemas.openxmlformats.org/drawingml/2006/main" w="25400">
-            <a:solidFill>
-              <a:srgbClr val="8D928C"/>
-            </a:solidFill>
-            <a:prstDash val="solid"/>
-          </a:ln>
-        </p:spPr>
-        <p:txBody>
-          <a:bodyPr xmlns:a="http://schemas.openxmlformats.org/drawingml/2006/main" wrap="square" lIns="0" tIns="0" rIns="0" bIns="0" anchor="t"/>
-          <a:lstStyle xmlns:a="http://schemas.openxmlformats.org/drawingml/2006/main"/>
-          <a:p xmlns:a="http://schemas.openxmlformats.org/drawingml/2006/main">
-            <a:r>
-              <a:rPr lang="en-US"/>
-              <a:t/>
-            </a:r>
-            <a:endParaRPr lang="en-US"/>
-          </a:p>
-        </p:txBody>
-      </p:sp>
-      <p:sp>
-        <p:nvSpPr>
-          <p:cNvPr id="8" name="close-number-0"/>
+          <p:cNvPr id="9" name="close-number-0"/>
           <p:cNvSpPr txBox="1"/>
           <p:nvPr/>
         </p:nvSpPr>
@@ -3538,7 +3703,7 @@
       </p:sp>
       <p:sp>
         <p:nvSpPr>
-          <p:cNvPr id="9" name="close-row-rule-0"/>
+          <p:cNvPr id="10" name="close-row-rule-0"/>
           <p:cNvSpPr/>
           <p:nvPr/>
         </p:nvSpPr>
@@ -3572,7 +3737,7 @@
       </p:sp>
       <p:sp>
         <p:nvSpPr>
-          <p:cNvPr id="10" name="close-label-0"/>
+          <p:cNvPr id="11" name="close-label-0"/>
           <p:cNvSpPr txBox="1"/>
           <p:nvPr/>
         </p:nvSpPr>
@@ -3609,7 +3774,7 @@
       </p:sp>
       <p:sp>
         <p:nvSpPr>
-          <p:cNvPr id="11" name="close-text-0"/>
+          <p:cNvPr id="12" name="close-text-0"/>
           <p:cNvSpPr txBox="1"/>
           <p:nvPr/>
         </p:nvSpPr>
@@ -3646,7 +3811,7 @@
       </p:sp>
       <p:sp>
         <p:nvSpPr>
-          <p:cNvPr id="12" name="close-number-1"/>
+          <p:cNvPr id="13" name="close-number-1"/>
           <p:cNvSpPr txBox="1"/>
           <p:nvPr/>
         </p:nvSpPr>
@@ -3683,7 +3848,7 @@
       </p:sp>
       <p:sp>
         <p:nvSpPr>
-          <p:cNvPr id="13" name="close-row-rule-1"/>
+          <p:cNvPr id="14" name="close-row-rule-1"/>
           <p:cNvSpPr/>
           <p:nvPr/>
         </p:nvSpPr>
@@ -3717,7 +3882,7 @@
       </p:sp>
       <p:sp>
         <p:nvSpPr>
-          <p:cNvPr id="14" name="close-label-1"/>
+          <p:cNvPr id="15" name="close-label-1"/>
           <p:cNvSpPr txBox="1"/>
           <p:nvPr/>
         </p:nvSpPr>
@@ -3754,7 +3919,7 @@
       </p:sp>
       <p:sp>
         <p:nvSpPr>
-          <p:cNvPr id="15" name="close-text-1"/>
+          <p:cNvPr id="16" name="close-text-1"/>
           <p:cNvSpPr txBox="1"/>
           <p:nvPr/>
         </p:nvSpPr>
@@ -3791,7 +3956,7 @@
       </p:sp>
       <p:sp>
         <p:nvSpPr>
-          <p:cNvPr id="16" name="close-number-2"/>
+          <p:cNvPr id="17" name="close-number-2"/>
           <p:cNvSpPr txBox="1"/>
           <p:nvPr/>
         </p:nvSpPr>
@@ -3828,7 +3993,7 @@
       </p:sp>
       <p:sp>
         <p:nvSpPr>
-          <p:cNvPr id="17" name="close-row-rule-2"/>
+          <p:cNvPr id="18" name="close-row-rule-2"/>
           <p:cNvSpPr/>
           <p:nvPr/>
         </p:nvSpPr>
@@ -3862,7 +4027,7 @@
       </p:sp>
       <p:sp>
         <p:nvSpPr>
-          <p:cNvPr id="18" name="close-label-2"/>
+          <p:cNvPr id="19" name="close-label-2"/>
           <p:cNvSpPr txBox="1"/>
           <p:nvPr/>
         </p:nvSpPr>
@@ -3899,7 +4064,7 @@
       </p:sp>
       <p:sp>
         <p:nvSpPr>
-          <p:cNvPr id="19" name="close-text-2"/>
+          <p:cNvPr id="20" name="close-text-2"/>
           <p:cNvSpPr txBox="1"/>
           <p:nvPr/>
         </p:nvSpPr>
@@ -3936,7 +4101,7 @@
       </p:sp>
       <p:sp>
         <p:nvSpPr>
-          <p:cNvPr id="20" name="next-rule"/>
+          <p:cNvPr id="21" name="next-rule"/>
           <p:cNvSpPr/>
           <p:nvPr/>
         </p:nvSpPr>
@@ -3970,7 +4135,7 @@
       </p:sp>
       <p:sp>
         <p:nvSpPr>
-          <p:cNvPr id="21" name="next-label"/>
+          <p:cNvPr id="22" name="next-label"/>
           <p:cNvSpPr txBox="1"/>
           <p:nvPr/>
         </p:nvSpPr>
@@ -4007,7 +4172,7 @@
       </p:sp>
       <p:sp>
         <p:nvSpPr>
-          <p:cNvPr id="22" name="next-text"/>
+          <p:cNvPr id="23" name="next-text"/>
           <p:cNvSpPr txBox="1"/>
           <p:nvPr/>
         </p:nvSpPr>
@@ -4044,7 +4209,7 @@
       </p:sp>
       <p:sp>
         <p:nvSpPr>
-          <p:cNvPr id="23" name="next-foot"/>
+          <p:cNvPr id="24" name="next-foot"/>
           <p:cNvSpPr txBox="1"/>
           <p:nvPr/>
         </p:nvSpPr>
@@ -4081,7 +4246,7 @@
       </p:sp>
       <p:sp>
         <p:nvSpPr>
-          <p:cNvPr id="24" name="source"/>
+          <p:cNvPr id="25" name="source"/>
           <p:cNvSpPr txBox="1"/>
           <p:nvPr/>
         </p:nvSpPr>
@@ -4118,7 +4283,7 @@
       </p:sp>
       <p:sp>
         <p:nvSpPr>
-          <p:cNvPr id="25" name="page-number"/>
+          <p:cNvPr id="26" name="page-number"/>
           <p:cNvSpPr txBox="1"/>
           <p:nvPr/>
         </p:nvSpPr>

--- a/skills/presentation-template-library/skills/artifact-template-river-handbook/assets/reference.pptx
+++ b/skills/presentation-template-library/skills/artifact-template-river-handbook/assets/reference.pptx
@@ -1871,7 +1871,7 @@
           <p:nvPr/>
         </p:nvPicPr>
         <p:blipFill>
-          <a:blip xmlns:r="http://schemas.openxmlformats.org/officeDocument/2006/relationships" xmlns:a="http://schemas.openxmlformats.org/drawingml/2006/main" r:embed="rIdOfficeKitImagec7b73f8fac405495_1"/>
+          <a:blip xmlns:r="http://schemas.openxmlformats.org/officeDocument/2006/relationships" xmlns:a="http://schemas.openxmlformats.org/drawingml/2006/main" r:embed="rIdOfficeKitImage31956823b229fb66_1"/>
           <a:srcRect xmlns:a="http://schemas.openxmlformats.org/drawingml/2006/main" l="0" t="47256" r="0" b="47256"/>
           <a:stretch xmlns:a="http://schemas.openxmlformats.org/drawingml/2006/main">
             <a:fillRect/>
@@ -2083,7 +2083,7 @@
           <p:nvPr/>
         </p:nvPicPr>
         <p:blipFill>
-          <a:blip xmlns:r="http://schemas.openxmlformats.org/officeDocument/2006/relationships" xmlns:a="http://schemas.openxmlformats.org/drawingml/2006/main" r:embed="rIdOfficeKitImagec7b73f8fac405495_1"/>
+          <a:blip xmlns:r="http://schemas.openxmlformats.org/officeDocument/2006/relationships" xmlns:a="http://schemas.openxmlformats.org/drawingml/2006/main" r:embed="rIdOfficeKitImage31956823b229fb66_1"/>
           <a:srcRect xmlns:a="http://schemas.openxmlformats.org/drawingml/2006/main" l="0" t="28354" r="0" b="28354"/>
           <a:stretch xmlns:a="http://schemas.openxmlformats.org/drawingml/2006/main">
             <a:fillRect/>
@@ -2112,8 +2112,8 @@
           <p:nvPr/>
         </p:nvPicPr>
         <p:blipFill>
-          <a:blip xmlns:r="http://schemas.openxmlformats.org/officeDocument/2006/relationships" xmlns:a="http://schemas.openxmlformats.org/drawingml/2006/main" r:embed="rIdOfficeKitImage59ee3aa5202fd02f_1"/>
-          <a:srcRect xmlns:a="http://schemas.openxmlformats.org/drawingml/2006/main" l="0" t="39904" r="0" b="39904"/>
+          <a:blip xmlns:r="http://schemas.openxmlformats.org/officeDocument/2006/relationships" xmlns:a="http://schemas.openxmlformats.org/drawingml/2006/main" r:embed="rIdOfficeKitImagec7b73f8fac405495_1"/>
+          <a:srcRect xmlns:a="http://schemas.openxmlformats.org/drawingml/2006/main" l="0" t="39898" r="0" b="39898"/>
           <a:stretch xmlns:a="http://schemas.openxmlformats.org/drawingml/2006/main">
             <a:fillRect/>
           </a:stretch>
@@ -2141,7 +2141,7 @@
           <p:nvPr/>
         </p:nvPicPr>
         <p:blipFill>
-          <a:blip xmlns:r="http://schemas.openxmlformats.org/officeDocument/2006/relationships" xmlns:a="http://schemas.openxmlformats.org/drawingml/2006/main" r:embed="rIdOfficeKitImageaeb6f74d36d260d0_1"/>
+          <a:blip xmlns:r="http://schemas.openxmlformats.org/officeDocument/2006/relationships" xmlns:a="http://schemas.openxmlformats.org/drawingml/2006/main" r:embed="rIdOfficeKitImage59ee3aa5202fd02f_1"/>
           <a:srcRect xmlns:a="http://schemas.openxmlformats.org/drawingml/2006/main" l="0" t="39904" r="0" b="39904"/>
           <a:stretch xmlns:a="http://schemas.openxmlformats.org/drawingml/2006/main">
             <a:fillRect/>
@@ -2417,7 +2417,7 @@
           <p:nvPr/>
         </p:nvPicPr>
         <p:blipFill>
-          <a:blip xmlns:r="http://schemas.openxmlformats.org/officeDocument/2006/relationships" xmlns:a="http://schemas.openxmlformats.org/drawingml/2006/main" r:embed="rIdOfficeKitImage31956823b229fb66_1"/>
+          <a:blip xmlns:r="http://schemas.openxmlformats.org/officeDocument/2006/relationships" xmlns:a="http://schemas.openxmlformats.org/drawingml/2006/main" r:embed="rIdOfficeKitImagec237998db8bee20d_1"/>
           <a:srcRect xmlns:a="http://schemas.openxmlformats.org/drawingml/2006/main" l="0" t="47256" r="0" b="47256"/>
           <a:stretch xmlns:a="http://schemas.openxmlformats.org/drawingml/2006/main">
             <a:fillRect/>
@@ -3465,8 +3465,8 @@
           <p:nvPr/>
         </p:nvPicPr>
         <p:blipFill>
-          <a:blip xmlns:r="http://schemas.openxmlformats.org/officeDocument/2006/relationships" xmlns:a="http://schemas.openxmlformats.org/drawingml/2006/main" r:embed="rIdOfficeKitImage59ee3aa5202fd02f_1"/>
-          <a:srcRect xmlns:a="http://schemas.openxmlformats.org/drawingml/2006/main" l="0" t="47258" r="0" b="47258"/>
+          <a:blip xmlns:r="http://schemas.openxmlformats.org/officeDocument/2006/relationships" xmlns:a="http://schemas.openxmlformats.org/drawingml/2006/main" r:embed="rIdOfficeKitImagec7b73f8fac405495_1"/>
+          <a:srcRect xmlns:a="http://schemas.openxmlformats.org/drawingml/2006/main" l="0" t="47256" r="0" b="47256"/>
           <a:stretch xmlns:a="http://schemas.openxmlformats.org/drawingml/2006/main">
             <a:fillRect/>
           </a:stretch>

--- a/skills/presentation-template-library/skills/artifact-template-river-handbook/assets/reference.pptx
+++ b/skills/presentation-template-library/skills/artifact-template-river-handbook/assets/reference.pptx
@@ -197,6 +197,16 @@
 <file path=ppt/slides/slide1.xml><?xml version="1.0" encoding="utf-8"?>
 <p:sld xmlns:p="http://schemas.openxmlformats.org/presentationml/2006/main">
   <p:cSld name="Opening claim">
+    <p:bg>
+      <p:bgPr>
+        <a:blipFill xmlns:a="http://schemas.openxmlformats.org/drawingml/2006/main">
+          <a:blip xmlns:r="http://schemas.openxmlformats.org/officeDocument/2006/relationships" r:embed="rIdOfficeKitImageaeb6f74d36d260d0_1"/>
+          <a:stretch>
+            <a:fillRect/>
+          </a:stretch>
+        </a:blipFill>
+      </p:bgPr>
+    </p:bg>
     <p:spTree>
       <p:nvGrpSpPr>
         <p:cNvPr id="1" name=""/>
@@ -211,38 +221,9 @@
           <a:chExt cx="0" cy="0"/>
         </a:xfrm>
       </p:grpSpPr>
-      <p:pic>
-        <p:nvPicPr>
-          <p:cNvPr id="2" name="editorial-cover-field">
-            <a:extLst xmlns:a="http://schemas.openxmlformats.org/drawingml/2006/main">
-              <a:ext uri="{C183D7F6-B498-43B3-948B-1728B52AA6E4}">
-                <adec:decorative xmlns:adec="http://schemas.microsoft.com/office/drawing/2017/decorative" val="1"/>
-              </a:ext>
-            </a:extLst>
-          </p:cNvPr>
-          <p:cNvPicPr/>
-          <p:nvPr/>
-        </p:nvPicPr>
-        <p:blipFill>
-          <a:blip xmlns:r="http://schemas.openxmlformats.org/officeDocument/2006/relationships" xmlns:a="http://schemas.openxmlformats.org/drawingml/2006/main" r:embed="rIdOfficeKitImageaeb6f74d36d260d0_1"/>
-          <a:srcRect xmlns:a="http://schemas.openxmlformats.org/drawingml/2006/main" l="0" t="34180" r="0" b="34180"/>
-          <a:stretch xmlns:a="http://schemas.openxmlformats.org/drawingml/2006/main">
-            <a:fillRect/>
-          </a:stretch>
-        </p:blipFill>
-        <p:spPr>
-          <a:xfrm xmlns:a="http://schemas.openxmlformats.org/drawingml/2006/main">
-            <a:off x="0" y="0"/>
-            <a:ext cx="15240000" cy="8572500"/>
-          </a:xfrm>
-          <a:prstGeom xmlns:a="http://schemas.openxmlformats.org/drawingml/2006/main" prst="rect">
-            <a:avLst/>
-          </a:prstGeom>
-        </p:spPr>
-      </p:pic>
-      <p:sp>
-        <p:nvSpPr>
-          <p:cNvPr id="3" name="editorial-cover-scrim"/>
+      <p:sp>
+        <p:nvSpPr>
+          <p:cNvPr id="2" name="editorial-cover-scrim"/>
           <p:cNvSpPr/>
           <p:nvPr/>
         </p:nvSpPr>
@@ -280,7 +261,7 @@
       </p:sp>
       <p:sp>
         <p:nvSpPr>
-          <p:cNvPr id="4" name="eyebrow"/>
+          <p:cNvPr id="3" name="eyebrow"/>
           <p:cNvSpPr txBox="1"/>
           <p:nvPr/>
         </p:nvSpPr>
@@ -317,7 +298,7 @@
       </p:sp>
       <p:sp>
         <p:nvSpPr>
-          <p:cNvPr id="5" name="cover-title"/>
+          <p:cNvPr id="4" name="cover-title"/>
           <p:cNvSpPr txBox="1"/>
           <p:nvPr/>
         </p:nvSpPr>
@@ -354,7 +335,7 @@
       </p:sp>
       <p:sp>
         <p:nvSpPr>
-          <p:cNvPr id="6" name="cover-subtitle"/>
+          <p:cNvPr id="5" name="cover-subtitle"/>
           <p:cNvSpPr txBox="1"/>
           <p:nvPr/>
         </p:nvSpPr>
@@ -391,7 +372,7 @@
       </p:sp>
       <p:sp>
         <p:nvSpPr>
-          <p:cNvPr id="7" name="cover-photo-rule"/>
+          <p:cNvPr id="6" name="cover-photo-rule"/>
           <p:cNvSpPr/>
           <p:nvPr/>
         </p:nvSpPr>
@@ -425,7 +406,7 @@
       </p:sp>
       <p:sp>
         <p:nvSpPr>
-          <p:cNvPr id="8" name="cover-thesis"/>
+          <p:cNvPr id="7" name="cover-thesis"/>
           <p:cNvSpPr txBox="1"/>
           <p:nvPr/>
         </p:nvSpPr>
@@ -462,7 +443,7 @@
       </p:sp>
       <p:sp>
         <p:nvSpPr>
-          <p:cNvPr id="9" name="cover-source"/>
+          <p:cNvPr id="8" name="cover-source"/>
           <p:cNvSpPr txBox="1"/>
           <p:nvPr/>
         </p:nvSpPr>
@@ -499,7 +480,7 @@
       </p:sp>
       <p:sp>
         <p:nvSpPr>
-          <p:cNvPr id="10" name="page-number"/>
+          <p:cNvPr id="9" name="page-number"/>
           <p:cNvSpPr txBox="1"/>
           <p:nvPr/>
         </p:nvSpPr>

--- a/skills/presentation-template-library/skills/artifact-template-river-handbook/assets/reference.pptx
+++ b/skills/presentation-template-library/skills/artifact-template-river-handbook/assets/reference.pptx
@@ -200,7 +200,7 @@
     <p:bg>
       <p:bgPr>
         <a:blipFill xmlns:a="http://schemas.openxmlformats.org/drawingml/2006/main">
-          <a:blip xmlns:r="http://schemas.openxmlformats.org/officeDocument/2006/relationships" r:embed="rIdOfficeKitImageaeb6f74d36d260d0_1"/>
+          <a:blip xmlns:r="http://schemas.openxmlformats.org/officeDocument/2006/relationships" r:embed="rIdOfficeKitImage8fbc298f8d1b7a3c_1"/>
           <a:stretch>
             <a:fillRect/>
           </a:stretch>
@@ -590,14 +590,14 @@
           <p:nvPr/>
         </p:nvPicPr>
         <p:blipFill>
-          <a:blip xmlns:r="http://schemas.openxmlformats.org/officeDocument/2006/relationships" xmlns:a="http://schemas.openxmlformats.org/drawingml/2006/main" r:embed="rIdOfficeKitImage13db13f70d7843cc_1"/>
-          <a:srcRect xmlns:a="http://schemas.openxmlformats.org/drawingml/2006/main" l="0" t="47258" r="0" b="47258"/>
+          <a:blip xmlns:r="http://schemas.openxmlformats.org/officeDocument/2006/relationships" xmlns:a="http://schemas.openxmlformats.org/drawingml/2006/main" r:embed="rIdOfficeKitImage6af8c9b5dff6e3a3_1"/>
+          <a:srcRect xmlns:a="http://schemas.openxmlformats.org/drawingml/2006/main" l="0" t="47256" r="0" b="47256"/>
           <a:stretch xmlns:a="http://schemas.openxmlformats.org/drawingml/2006/main">
             <a:fillRect/>
           </a:stretch>
         </p:blipFill>
         <p:spPr>
-          <a:xfrm xmlns:a="http://schemas.openxmlformats.org/drawingml/2006/main" flipH="1">
+          <a:xfrm xmlns:a="http://schemas.openxmlformats.org/drawingml/2006/main">
             <a:off x="0" y="0"/>
             <a:ext cx="15240000" cy="1485900"/>
           </a:xfrm>
@@ -913,14 +913,14 @@
           <p:nvPr/>
         </p:nvPicPr>
         <p:blipFill>
-          <a:blip xmlns:r="http://schemas.openxmlformats.org/officeDocument/2006/relationships" xmlns:a="http://schemas.openxmlformats.org/drawingml/2006/main" r:embed="rIdOfficeKitImage13db13f70d7843cc_1"/>
+          <a:blip xmlns:r="http://schemas.openxmlformats.org/officeDocument/2006/relationships" xmlns:a="http://schemas.openxmlformats.org/drawingml/2006/main" r:embed="rIdOfficeKitImage026be3a43029630d_1"/>
           <a:srcRect xmlns:a="http://schemas.openxmlformats.org/drawingml/2006/main" l="0" t="31920" r="0" b="31920"/>
           <a:stretch xmlns:a="http://schemas.openxmlformats.org/drawingml/2006/main">
             <a:fillRect/>
           </a:stretch>
         </p:blipFill>
         <p:spPr>
-          <a:xfrm xmlns:a="http://schemas.openxmlformats.org/drawingml/2006/main" flipH="1">
+          <a:xfrm xmlns:a="http://schemas.openxmlformats.org/drawingml/2006/main">
             <a:off x="9525000" y="3143250"/>
             <a:ext cx="4000500" cy="2571750"/>
           </a:xfrm>
@@ -1149,7 +1149,7 @@
           <p:nvPr/>
         </p:nvPicPr>
         <p:blipFill>
-          <a:blip xmlns:r="http://schemas.openxmlformats.org/officeDocument/2006/relationships" xmlns:a="http://schemas.openxmlformats.org/drawingml/2006/main" r:embed="rIdOfficeKitImage7790b68b5d8fcd92_1"/>
+          <a:blip xmlns:r="http://schemas.openxmlformats.org/officeDocument/2006/relationships" xmlns:a="http://schemas.openxmlformats.org/drawingml/2006/main" r:embed="rIdOfficeKitImage092dd3ee80187530_1"/>
           <a:srcRect xmlns:a="http://schemas.openxmlformats.org/drawingml/2006/main" l="0" t="47258" r="0" b="47258"/>
           <a:stretch xmlns:a="http://schemas.openxmlformats.org/drawingml/2006/main">
             <a:fillRect/>
@@ -1361,7 +1361,7 @@
           <p:nvPr/>
         </p:nvPicPr>
         <p:blipFill>
-          <a:blip xmlns:r="http://schemas.openxmlformats.org/officeDocument/2006/relationships" xmlns:a="http://schemas.openxmlformats.org/drawingml/2006/main" r:embed="rIdOfficeKitImage7790b68b5d8fcd92_1"/>
+          <a:blip xmlns:r="http://schemas.openxmlformats.org/officeDocument/2006/relationships" xmlns:a="http://schemas.openxmlformats.org/drawingml/2006/main" r:embed="rIdOfficeKitImage083106afebc7d419_1"/>
           <a:srcRect xmlns:a="http://schemas.openxmlformats.org/drawingml/2006/main" l="0" t="39326" r="0" b="39326"/>
           <a:stretch xmlns:a="http://schemas.openxmlformats.org/drawingml/2006/main">
             <a:fillRect/>
@@ -1852,8 +1852,8 @@
           <p:nvPr/>
         </p:nvPicPr>
         <p:blipFill>
-          <a:blip xmlns:r="http://schemas.openxmlformats.org/officeDocument/2006/relationships" xmlns:a="http://schemas.openxmlformats.org/drawingml/2006/main" r:embed="rIdOfficeKitImage31956823b229fb66_1"/>
-          <a:srcRect xmlns:a="http://schemas.openxmlformats.org/drawingml/2006/main" l="0" t="47256" r="0" b="47256"/>
+          <a:blip xmlns:r="http://schemas.openxmlformats.org/officeDocument/2006/relationships" xmlns:a="http://schemas.openxmlformats.org/drawingml/2006/main" r:embed="rIdOfficeKitImage8fbc298f8d1b7a3c_1"/>
+          <a:srcRect xmlns:a="http://schemas.openxmlformats.org/drawingml/2006/main" l="0" t="47258" r="0" b="47258"/>
           <a:stretch xmlns:a="http://schemas.openxmlformats.org/drawingml/2006/main">
             <a:fillRect/>
           </a:stretch>
@@ -2064,8 +2064,8 @@
           <p:nvPr/>
         </p:nvPicPr>
         <p:blipFill>
-          <a:blip xmlns:r="http://schemas.openxmlformats.org/officeDocument/2006/relationships" xmlns:a="http://schemas.openxmlformats.org/drawingml/2006/main" r:embed="rIdOfficeKitImage31956823b229fb66_1"/>
-          <a:srcRect xmlns:a="http://schemas.openxmlformats.org/drawingml/2006/main" l="0" t="28354" r="0" b="28354"/>
+          <a:blip xmlns:r="http://schemas.openxmlformats.org/officeDocument/2006/relationships" xmlns:a="http://schemas.openxmlformats.org/drawingml/2006/main" r:embed="rIdOfficeKitImage6af8c9b5dff6e3a3_1"/>
+          <a:srcRect xmlns:a="http://schemas.openxmlformats.org/drawingml/2006/main" l="0" t="31962" r="0" b="31962"/>
           <a:stretch xmlns:a="http://schemas.openxmlformats.org/drawingml/2006/main">
             <a:fillRect/>
           </a:stretch>
@@ -2073,7 +2073,7 @@
         <p:spPr>
           <a:xfrm xmlns:a="http://schemas.openxmlformats.org/drawingml/2006/main">
             <a:off x="990600" y="3162300"/>
-            <a:ext cx="3714750" cy="2857500"/>
+            <a:ext cx="3714750" cy="2381250"/>
           </a:xfrm>
           <a:prstGeom xmlns:a="http://schemas.openxmlformats.org/drawingml/2006/main" prst="rect">
             <a:avLst/>
@@ -2093,8 +2093,8 @@
           <p:nvPr/>
         </p:nvPicPr>
         <p:blipFill>
-          <a:blip xmlns:r="http://schemas.openxmlformats.org/officeDocument/2006/relationships" xmlns:a="http://schemas.openxmlformats.org/drawingml/2006/main" r:embed="rIdOfficeKitImagec7b73f8fac405495_1"/>
-          <a:srcRect xmlns:a="http://schemas.openxmlformats.org/drawingml/2006/main" l="0" t="39898" r="0" b="39898"/>
+          <a:blip xmlns:r="http://schemas.openxmlformats.org/officeDocument/2006/relationships" xmlns:a="http://schemas.openxmlformats.org/drawingml/2006/main" r:embed="rIdOfficeKitImage026be3a43029630d_1"/>
+          <a:srcRect xmlns:a="http://schemas.openxmlformats.org/drawingml/2006/main" l="0" t="32347" r="0" b="32347"/>
           <a:stretch xmlns:a="http://schemas.openxmlformats.org/drawingml/2006/main">
             <a:fillRect/>
           </a:stretch>
@@ -2102,7 +2102,7 @@
         <p:spPr>
           <a:xfrm xmlns:a="http://schemas.openxmlformats.org/drawingml/2006/main">
             <a:off x="4895850" y="3162300"/>
-            <a:ext cx="3714750" cy="1333500"/>
+            <a:ext cx="1790700" cy="1123950"/>
           </a:xfrm>
           <a:prstGeom xmlns:a="http://schemas.openxmlformats.org/drawingml/2006/main" prst="rect">
             <a:avLst/>
@@ -2122,25 +2122,83 @@
           <p:nvPr/>
         </p:nvPicPr>
         <p:blipFill>
-          <a:blip xmlns:r="http://schemas.openxmlformats.org/officeDocument/2006/relationships" xmlns:a="http://schemas.openxmlformats.org/drawingml/2006/main" r:embed="rIdOfficeKitImage59ee3aa5202fd02f_1"/>
-          <a:srcRect xmlns:a="http://schemas.openxmlformats.org/drawingml/2006/main" l="0" t="39904" r="0" b="39904"/>
+          <a:blip xmlns:r="http://schemas.openxmlformats.org/officeDocument/2006/relationships" xmlns:a="http://schemas.openxmlformats.org/drawingml/2006/main" r:embed="rIdOfficeKitImage092dd3ee80187530_1"/>
+          <a:srcRect xmlns:a="http://schemas.openxmlformats.org/drawingml/2006/main" l="0" t="32347" r="0" b="32347"/>
           <a:stretch xmlns:a="http://schemas.openxmlformats.org/drawingml/2006/main">
             <a:fillRect/>
           </a:stretch>
         </p:blipFill>
         <p:spPr>
           <a:xfrm xmlns:a="http://schemas.openxmlformats.org/drawingml/2006/main">
-            <a:off x="4895850" y="4686300"/>
-            <a:ext cx="3714750" cy="1333500"/>
+            <a:off x="6858000" y="3162300"/>
+            <a:ext cx="1790700" cy="1123950"/>
           </a:xfrm>
           <a:prstGeom xmlns:a="http://schemas.openxmlformats.org/drawingml/2006/main" prst="rect">
             <a:avLst/>
           </a:prstGeom>
         </p:spPr>
       </p:pic>
-      <p:sp>
-        <p:nvSpPr>
-          <p:cNvPr id="12" name="image-matrix-label"/>
+      <p:pic>
+        <p:nvPicPr>
+          <p:cNvPr id="12" name="image-evidence-3">
+            <a:extLst xmlns:a="http://schemas.openxmlformats.org/drawingml/2006/main">
+              <a:ext uri="{C183D7F6-B498-43B3-948B-1728B52AA6E4}">
+                <adec:decorative xmlns:adec="http://schemas.microsoft.com/office/drawing/2017/decorative" val="1"/>
+              </a:ext>
+            </a:extLst>
+          </p:cNvPr>
+          <p:cNvPicPr/>
+          <p:nvPr/>
+        </p:nvPicPr>
+        <p:blipFill>
+          <a:blip xmlns:r="http://schemas.openxmlformats.org/officeDocument/2006/relationships" xmlns:a="http://schemas.openxmlformats.org/drawingml/2006/main" r:embed="rIdOfficeKitImage083106afebc7d419_1"/>
+          <a:srcRect xmlns:a="http://schemas.openxmlformats.org/drawingml/2006/main" l="0" t="32347" r="0" b="32347"/>
+          <a:stretch xmlns:a="http://schemas.openxmlformats.org/drawingml/2006/main">
+            <a:fillRect/>
+          </a:stretch>
+        </p:blipFill>
+        <p:spPr>
+          <a:xfrm xmlns:a="http://schemas.openxmlformats.org/drawingml/2006/main">
+            <a:off x="4895850" y="4457700"/>
+            <a:ext cx="1790700" cy="1123950"/>
+          </a:xfrm>
+          <a:prstGeom xmlns:a="http://schemas.openxmlformats.org/drawingml/2006/main" prst="rect">
+            <a:avLst/>
+          </a:prstGeom>
+        </p:spPr>
+      </p:pic>
+      <p:pic>
+        <p:nvPicPr>
+          <p:cNvPr id="13" name="image-evidence-4">
+            <a:extLst xmlns:a="http://schemas.openxmlformats.org/drawingml/2006/main">
+              <a:ext uri="{C183D7F6-B498-43B3-948B-1728B52AA6E4}">
+                <adec:decorative xmlns:adec="http://schemas.microsoft.com/office/drawing/2017/decorative" val="1"/>
+              </a:ext>
+            </a:extLst>
+          </p:cNvPr>
+          <p:cNvPicPr/>
+          <p:nvPr/>
+        </p:nvPicPr>
+        <p:blipFill>
+          <a:blip xmlns:r="http://schemas.openxmlformats.org/officeDocument/2006/relationships" xmlns:a="http://schemas.openxmlformats.org/drawingml/2006/main" r:embed="rIdOfficeKitImage8fbc298f8d1b7a3c_1"/>
+          <a:srcRect xmlns:a="http://schemas.openxmlformats.org/drawingml/2006/main" l="0" t="32347" r="0" b="32347"/>
+          <a:stretch xmlns:a="http://schemas.openxmlformats.org/drawingml/2006/main">
+            <a:fillRect/>
+          </a:stretch>
+        </p:blipFill>
+        <p:spPr>
+          <a:xfrm xmlns:a="http://schemas.openxmlformats.org/drawingml/2006/main">
+            <a:off x="6858000" y="4457700"/>
+            <a:ext cx="1790700" cy="1123950"/>
+          </a:xfrm>
+          <a:prstGeom xmlns:a="http://schemas.openxmlformats.org/drawingml/2006/main" prst="rect">
+            <a:avLst/>
+          </a:prstGeom>
+        </p:spPr>
+      </p:pic>
+      <p:sp>
+        <p:nvSpPr>
+          <p:cNvPr id="14" name="image-matrix-label"/>
           <p:cNvSpPr txBox="1"/>
           <p:nvPr/>
         </p:nvSpPr>
@@ -2177,7 +2235,7 @@
       </p:sp>
       <p:sp>
         <p:nvSpPr>
-          <p:cNvPr id="13" name="image-matrix-title"/>
+          <p:cNvPr id="15" name="image-matrix-title"/>
           <p:cNvSpPr txBox="1"/>
           <p:nvPr/>
         </p:nvSpPr>
@@ -2206,52 +2264,78 @@
                 <a:latin typeface="Arial"/>
                 <a:ea typeface="Arial"/>
               </a:rPr>
-              <a:t>One subject, three ways to notice it.</a:t>
-            </a:r>
-            <a:endParaRPr lang="en-US"/>
-          </a:p>
-        </p:txBody>
-      </p:sp>
-      <p:sp>
-        <p:nvSpPr>
-          <p:cNvPr id="14" name="image-matrix-body"/>
+              <a:t>One subject, five ways to notice it.</a:t>
+            </a:r>
+            <a:endParaRPr lang="en-US"/>
+          </a:p>
+        </p:txBody>
+      </p:sp>
+      <p:sp>
+        <p:nvSpPr>
+          <p:cNvPr id="16" name="image-matrix-body"/>
           <p:cNvSpPr txBox="1"/>
           <p:nvPr/>
         </p:nvSpPr>
         <p:spPr>
           <a:xfrm xmlns:a="http://schemas.openxmlformats.org/drawingml/2006/main">
             <a:off x="9620250" y="4953000"/>
-            <a:ext cx="3524250" cy="666750"/>
-          </a:xfrm>
-          <a:prstGeom xmlns:a="http://schemas.openxmlformats.org/drawingml/2006/main" prst="rect">
-            <a:avLst/>
-          </a:prstGeom>
-          <a:noFill xmlns:a="http://schemas.openxmlformats.org/drawingml/2006/main"/>
-          <a:ln xmlns:a="http://schemas.openxmlformats.org/drawingml/2006/main" w="0">
-            <a:noFill/>
-          </a:ln>
-        </p:spPr>
-        <p:txBody>
-          <a:bodyPr xmlns:a="http://schemas.openxmlformats.org/drawingml/2006/main" wrap="square" lIns="0" tIns="0" rIns="0" bIns="0" anchor="t"/>
-          <a:lstStyle xmlns:a="http://schemas.openxmlformats.org/drawingml/2006/main"/>
-          <a:p xmlns:a="http://schemas.openxmlformats.org/drawingml/2006/main">
-            <a:r>
-              <a:rPr lang="en-US" sz="1275">
+            <a:ext cx="3524250" cy="781050"/>
+          </a:xfrm>
+          <a:prstGeom xmlns:a="http://schemas.openxmlformats.org/drawingml/2006/main" prst="rect">
+            <a:avLst/>
+          </a:prstGeom>
+          <a:noFill xmlns:a="http://schemas.openxmlformats.org/drawingml/2006/main"/>
+          <a:ln xmlns:a="http://schemas.openxmlformats.org/drawingml/2006/main" w="0">
+            <a:noFill/>
+          </a:ln>
+        </p:spPr>
+        <p:txBody>
+          <a:bodyPr xmlns:a="http://schemas.openxmlformats.org/drawingml/2006/main" wrap="square" lIns="0" tIns="0" rIns="0" bIns="0" anchor="t"/>
+          <a:lstStyle xmlns:a="http://schemas.openxmlformats.org/drawingml/2006/main"/>
+          <a:p xmlns:a="http://schemas.openxmlformats.org/drawingml/2006/main">
+            <a:r>
+              <a:rPr lang="en-US" sz="1200">
                 <a:solidFill>
                   <a:srgbClr val="8D928C"/>
                 </a:solidFill>
                 <a:latin typeface="Arial"/>
                 <a:ea typeface="Arial"/>
               </a:rPr>
-              <a:t>Use unequal frames to show facets of one idea. The crop carries the mood; the label carries the claim.</a:t>
-            </a:r>
-            <a:endParaRPr lang="en-US"/>
-          </a:p>
-        </p:txBody>
-      </p:sp>
-      <p:sp>
-        <p:nvSpPr>
-          <p:cNvPr id="15" name="source"/>
+              <a:t>One dominant frame plus four</a:t>
+            </a:r>
+            <a:endParaRPr lang="en-US"/>
+          </a:p>
+          <a:p xmlns:a="http://schemas.openxmlformats.org/drawingml/2006/main">
+            <a:r>
+              <a:rPr lang="en-US" sz="1200">
+                <a:solidFill>
+                  <a:srgbClr val="8D928C"/>
+                </a:solidFill>
+                <a:latin typeface="Arial"/>
+                <a:ea typeface="Arial"/>
+              </a:rPr>
+              <a:t>supporting crops. Image carries</a:t>
+            </a:r>
+            <a:endParaRPr lang="en-US"/>
+          </a:p>
+          <a:p xmlns:a="http://schemas.openxmlformats.org/drawingml/2006/main">
+            <a:r>
+              <a:rPr lang="en-US" sz="1200">
+                <a:solidFill>
+                  <a:srgbClr val="8D928C"/>
+                </a:solidFill>
+                <a:latin typeface="Arial"/>
+                <a:ea typeface="Arial"/>
+              </a:rPr>
+              <a:t>mood; labels carry the claim.</a:t>
+            </a:r>
+            <a:endParaRPr lang="en-US"/>
+          </a:p>
+        </p:txBody>
+      </p:sp>
+      <p:sp>
+        <p:nvSpPr>
+          <p:cNvPr id="17" name="source"/>
           <p:cNvSpPr txBox="1"/>
           <p:nvPr/>
         </p:nvSpPr>
@@ -2288,7 +2372,7 @@
       </p:sp>
       <p:sp>
         <p:nvSpPr>
-          <p:cNvPr id="16" name="page-number"/>
+          <p:cNvPr id="18" name="page-number"/>
           <p:cNvSpPr txBox="1"/>
           <p:nvPr/>
         </p:nvSpPr>
@@ -2335,6 +2419,16 @@
 <file path=ppt/slides/slide5.xml><?xml version="1.0" encoding="utf-8"?>
 <p:sld xmlns:p="http://schemas.openxmlformats.org/presentationml/2006/main">
   <p:cSld name="Visual carrier">
+    <p:bg>
+      <p:bgPr>
+        <a:blipFill xmlns:a="http://schemas.openxmlformats.org/drawingml/2006/main">
+          <a:blip xmlns:r="http://schemas.openxmlformats.org/officeDocument/2006/relationships" r:embed="rIdOfficeKitImage6af8c9b5dff6e3a3_1"/>
+          <a:stretch>
+            <a:fillRect/>
+          </a:stretch>
+        </a:blipFill>
+      </p:bgPr>
+    </p:bg>
     <p:spTree>
       <p:nvGrpSpPr>
         <p:cNvPr id="1" name=""/>
@@ -2351,20 +2445,22 @@
       </p:grpSpPr>
       <p:sp>
         <p:nvSpPr>
-          <p:cNvPr id="2" name="background"/>
+          <p:cNvPr id="2" name="section-reading-plane"/>
           <p:cNvSpPr/>
           <p:nvPr/>
         </p:nvSpPr>
         <p:spPr>
           <a:xfrm xmlns:a="http://schemas.openxmlformats.org/drawingml/2006/main">
             <a:off x="0" y="0"/>
-            <a:ext cx="15240000" cy="8572500"/>
+            <a:ext cx="7810500" cy="8572500"/>
           </a:xfrm>
           <a:prstGeom xmlns:a="http://schemas.openxmlformats.org/drawingml/2006/main" prst="rect">
             <a:avLst/>
           </a:prstGeom>
           <a:solidFill xmlns:a="http://schemas.openxmlformats.org/drawingml/2006/main">
-            <a:srgbClr val="EEE8DC"/>
+            <a:srgbClr val="EEE8DC">
+              <a:alpha val="94000"/>
+            </a:srgbClr>
           </a:solidFill>
           <a:ln xmlns:a="http://schemas.openxmlformats.org/drawingml/2006/main" w="0">
             <a:solidFill>
@@ -2385,83 +2481,90 @@
           </a:p>
         </p:txBody>
       </p:sp>
-      <p:pic>
-        <p:nvPicPr>
-          <p:cNvPr id="3" name="visual-photo-band">
-            <a:extLst xmlns:a="http://schemas.openxmlformats.org/drawingml/2006/main">
-              <a:ext uri="{C183D7F6-B498-43B3-948B-1728B52AA6E4}">
-                <adec:decorative xmlns:adec="http://schemas.microsoft.com/office/drawing/2017/decorative" val="1"/>
-              </a:ext>
-            </a:extLst>
-          </p:cNvPr>
-          <p:cNvPicPr/>
-          <p:nvPr/>
-        </p:nvPicPr>
-        <p:blipFill>
-          <a:blip xmlns:r="http://schemas.openxmlformats.org/officeDocument/2006/relationships" xmlns:a="http://schemas.openxmlformats.org/drawingml/2006/main" r:embed="rIdOfficeKitImagec237998db8bee20d_1"/>
-          <a:srcRect xmlns:a="http://schemas.openxmlformats.org/drawingml/2006/main" l="0" t="47256" r="0" b="47256"/>
-          <a:stretch xmlns:a="http://schemas.openxmlformats.org/drawingml/2006/main">
-            <a:fillRect/>
-          </a:stretch>
-        </p:blipFill>
-        <p:spPr>
-          <a:xfrm xmlns:a="http://schemas.openxmlformats.org/drawingml/2006/main">
-            <a:off x="0" y="0"/>
-            <a:ext cx="15240000" cy="1485900"/>
-          </a:xfrm>
-          <a:prstGeom xmlns:a="http://schemas.openxmlformats.org/drawingml/2006/main" prst="rect">
-            <a:avLst/>
-          </a:prstGeom>
-        </p:spPr>
-      </p:pic>
-      <p:sp>
-        <p:nvSpPr>
-          <p:cNvPr id="4" name="visual-photo-scrim"/>
+      <p:sp>
+        <p:nvSpPr>
+          <p:cNvPr id="3" name="section-eyebrow"/>
+          <p:cNvSpPr txBox="1"/>
+          <p:nvPr/>
+        </p:nvSpPr>
+        <p:spPr>
+          <a:xfrm xmlns:a="http://schemas.openxmlformats.org/drawingml/2006/main">
+            <a:off x="914400" y="914400"/>
+            <a:ext cx="6096000" cy="228600"/>
+          </a:xfrm>
+          <a:prstGeom xmlns:a="http://schemas.openxmlformats.org/drawingml/2006/main" prst="rect">
+            <a:avLst/>
+          </a:prstGeom>
+          <a:noFill xmlns:a="http://schemas.openxmlformats.org/drawingml/2006/main"/>
+          <a:ln xmlns:a="http://schemas.openxmlformats.org/drawingml/2006/main" w="0">
+            <a:noFill/>
+          </a:ln>
+        </p:spPr>
+        <p:txBody>
+          <a:bodyPr xmlns:a="http://schemas.openxmlformats.org/drawingml/2006/main" wrap="square" lIns="0" tIns="0" rIns="0" bIns="0" anchor="t"/>
+          <a:lstStyle xmlns:a="http://schemas.openxmlformats.org/drawingml/2006/main"/>
+          <a:p xmlns:a="http://schemas.openxmlformats.org/drawingml/2006/main">
+            <a:r>
+              <a:rPr lang="en-US" sz="1200" b="1">
+                <a:solidFill>
+                  <a:srgbClr val="277B91"/>
+                </a:solidFill>
+                <a:latin typeface="Arial"/>
+                <a:ea typeface="Arial"/>
+              </a:rPr>
+              <a:t>RIVER HANDBOOK · SECTION</a:t>
+            </a:r>
+            <a:endParaRPr lang="en-US"/>
+          </a:p>
+        </p:txBody>
+      </p:sp>
+      <p:sp>
+        <p:nvSpPr>
+          <p:cNvPr id="4" name="section-title"/>
+          <p:cNvSpPr txBox="1"/>
+          <p:nvPr/>
+        </p:nvSpPr>
+        <p:spPr>
+          <a:xfrm xmlns:a="http://schemas.openxmlformats.org/drawingml/2006/main">
+            <a:off x="914400" y="1657350"/>
+            <a:ext cx="5905500" cy="1162050"/>
+          </a:xfrm>
+          <a:prstGeom xmlns:a="http://schemas.openxmlformats.org/drawingml/2006/main" prst="rect">
+            <a:avLst/>
+          </a:prstGeom>
+          <a:noFill xmlns:a="http://schemas.openxmlformats.org/drawingml/2006/main"/>
+          <a:ln xmlns:a="http://schemas.openxmlformats.org/drawingml/2006/main" w="0">
+            <a:noFill/>
+          </a:ln>
+        </p:spPr>
+        <p:txBody>
+          <a:bodyPr xmlns:a="http://schemas.openxmlformats.org/drawingml/2006/main" wrap="square" lIns="0" tIns="0" rIns="0" bIns="0" anchor="t"/>
+          <a:lstStyle xmlns:a="http://schemas.openxmlformats.org/drawingml/2006/main"/>
+          <a:p xmlns:a="http://schemas.openxmlformats.org/drawingml/2006/main">
+            <a:r>
+              <a:rPr lang="en-US" sz="3450" b="1">
+                <a:solidFill>
+                  <a:srgbClr val="243535"/>
+                </a:solidFill>
+                <a:latin typeface="Arial"/>
+                <a:ea typeface="Arial"/>
+              </a:rPr>
+              <a:t>Let the subject do the work</a:t>
+            </a:r>
+            <a:endParaRPr lang="en-US"/>
+          </a:p>
+        </p:txBody>
+      </p:sp>
+      <p:sp>
+        <p:nvSpPr>
+          <p:cNvPr id="5" name="section-rule"/>
           <p:cNvSpPr/>
           <p:nvPr/>
         </p:nvSpPr>
         <p:spPr>
           <a:xfrm xmlns:a="http://schemas.openxmlformats.org/drawingml/2006/main">
-            <a:off x="0" y="0"/>
-            <a:ext cx="15240000" cy="1485900"/>
-          </a:xfrm>
-          <a:prstGeom xmlns:a="http://schemas.openxmlformats.org/drawingml/2006/main" prst="rect">
-            <a:avLst/>
-          </a:prstGeom>
-          <a:solidFill xmlns:a="http://schemas.openxmlformats.org/drawingml/2006/main">
-            <a:srgbClr val="243535">
-              <a:alpha val="62000"/>
-            </a:srgbClr>
-          </a:solidFill>
-          <a:ln xmlns:a="http://schemas.openxmlformats.org/drawingml/2006/main" w="0">
-            <a:solidFill>
-              <a:srgbClr val="243535"/>
-            </a:solidFill>
-            <a:prstDash val="solid"/>
-          </a:ln>
-        </p:spPr>
-        <p:txBody>
-          <a:bodyPr xmlns:a="http://schemas.openxmlformats.org/drawingml/2006/main" wrap="square" lIns="0" tIns="0" rIns="0" bIns="0" anchor="t"/>
-          <a:lstStyle xmlns:a="http://schemas.openxmlformats.org/drawingml/2006/main"/>
-          <a:p xmlns:a="http://schemas.openxmlformats.org/drawingml/2006/main">
-            <a:r>
-              <a:rPr lang="en-US"/>
-              <a:t/>
-            </a:r>
-            <a:endParaRPr lang="en-US"/>
-          </a:p>
-        </p:txBody>
-      </p:sp>
-      <p:sp>
-        <p:nvSpPr>
-          <p:cNvPr id="5" name="visual-photo-rule"/>
-          <p:cNvSpPr/>
-          <p:nvPr/>
-        </p:nvSpPr>
-        <p:spPr>
-          <a:xfrm xmlns:a="http://schemas.openxmlformats.org/drawingml/2006/main">
-            <a:off x="914400" y="1438275"/>
-            <a:ext cx="13411200" cy="0"/>
+            <a:off x="914400" y="3181350"/>
+            <a:ext cx="4991100" cy="0"/>
           </a:xfrm>
           <a:prstGeom xmlns:a="http://schemas.openxmlformats.org/drawingml/2006/main" prst="line">
             <a:avLst/>
@@ -2488,818 +2591,118 @@
       </p:sp>
       <p:sp>
         <p:nvSpPr>
-          <p:cNvPr id="6" name="RIVER HANDBOOK · VISUAL CARRIER"/>
-          <p:cNvSpPr txBox="1"/>
-          <p:nvPr/>
-        </p:nvSpPr>
-        <p:spPr>
-          <a:xfrm xmlns:a="http://schemas.openxmlformats.org/drawingml/2006/main">
-            <a:off x="914400" y="228600"/>
-            <a:ext cx="9525000" cy="190500"/>
-          </a:xfrm>
-          <a:prstGeom xmlns:a="http://schemas.openxmlformats.org/drawingml/2006/main" prst="rect">
-            <a:avLst/>
-          </a:prstGeom>
-          <a:noFill xmlns:a="http://schemas.openxmlformats.org/drawingml/2006/main"/>
-          <a:ln xmlns:a="http://schemas.openxmlformats.org/drawingml/2006/main" w="0">
-            <a:noFill/>
-          </a:ln>
-        </p:spPr>
-        <p:txBody>
-          <a:bodyPr xmlns:a="http://schemas.openxmlformats.org/drawingml/2006/main" wrap="square" lIns="0" tIns="0" rIns="0" bIns="0" anchor="t"/>
-          <a:lstStyle xmlns:a="http://schemas.openxmlformats.org/drawingml/2006/main"/>
-          <a:p xmlns:a="http://schemas.openxmlformats.org/drawingml/2006/main">
-            <a:r>
-              <a:rPr lang="en-US" sz="1050" b="1">
+          <p:cNvPr id="6" name="section-body"/>
+          <p:cNvSpPr txBox="1"/>
+          <p:nvPr/>
+        </p:nvSpPr>
+        <p:spPr>
+          <a:xfrm xmlns:a="http://schemas.openxmlformats.org/drawingml/2006/main">
+            <a:off x="914400" y="3600450"/>
+            <a:ext cx="5334000" cy="819150"/>
+          </a:xfrm>
+          <a:prstGeom xmlns:a="http://schemas.openxmlformats.org/drawingml/2006/main" prst="rect">
+            <a:avLst/>
+          </a:prstGeom>
+          <a:noFill xmlns:a="http://schemas.openxmlformats.org/drawingml/2006/main"/>
+          <a:ln xmlns:a="http://schemas.openxmlformats.org/drawingml/2006/main" w="0">
+            <a:noFill/>
+          </a:ln>
+        </p:spPr>
+        <p:txBody>
+          <a:bodyPr xmlns:a="http://schemas.openxmlformats.org/drawingml/2006/main" wrap="square" lIns="0" tIns="0" rIns="0" bIns="0" anchor="t"/>
+          <a:lstStyle xmlns:a="http://schemas.openxmlformats.org/drawingml/2006/main"/>
+          <a:p xmlns:a="http://schemas.openxmlformats.org/drawingml/2006/main">
+            <a:r>
+              <a:rPr lang="en-US" sz="1800">
+                <a:solidFill>
+                  <a:srgbClr val="243535"/>
+                </a:solidFill>
+                <a:latin typeface="Arial"/>
+                <a:ea typeface="Arial"/>
+              </a:rPr>
+              <a:t>A strong crop gives the proposition a place to live.</a:t>
+            </a:r>
+            <a:endParaRPr lang="en-US"/>
+          </a:p>
+        </p:txBody>
+      </p:sp>
+      <p:sp>
+        <p:nvSpPr>
+          <p:cNvPr id="7" name="section-note"/>
+          <p:cNvSpPr txBox="1"/>
+          <p:nvPr/>
+        </p:nvSpPr>
+        <p:spPr>
+          <a:xfrm xmlns:a="http://schemas.openxmlformats.org/drawingml/2006/main">
+            <a:off x="914400" y="5238750"/>
+            <a:ext cx="5334000" cy="228600"/>
+          </a:xfrm>
+          <a:prstGeom xmlns:a="http://schemas.openxmlformats.org/drawingml/2006/main" prst="rect">
+            <a:avLst/>
+          </a:prstGeom>
+          <a:noFill xmlns:a="http://schemas.openxmlformats.org/drawingml/2006/main"/>
+          <a:ln xmlns:a="http://schemas.openxmlformats.org/drawingml/2006/main" w="0">
+            <a:noFill/>
+          </a:ln>
+        </p:spPr>
+        <p:txBody>
+          <a:bodyPr xmlns:a="http://schemas.openxmlformats.org/drawingml/2006/main" wrap="square" lIns="0" tIns="0" rIns="0" bIns="0" anchor="t"/>
+          <a:lstStyle xmlns:a="http://schemas.openxmlformats.org/drawingml/2006/main"/>
+          <a:p xmlns:a="http://schemas.openxmlformats.org/drawingml/2006/main">
+            <a:r>
+              <a:rPr lang="en-US" sz="1125" b="1">
                 <a:solidFill>
                   <a:srgbClr val="277B91"/>
                 </a:solidFill>
                 <a:latin typeface="Arial"/>
                 <a:ea typeface="Arial"/>
               </a:rPr>
-              <a:t>RIVER HANDBOOK · VISUAL CARRIER</a:t>
-            </a:r>
-            <a:endParaRPr lang="en-US"/>
-          </a:p>
-        </p:txBody>
-      </p:sp>
-      <p:sp>
-        <p:nvSpPr>
-          <p:cNvPr id="7" name="visual-title"/>
-          <p:cNvSpPr txBox="1"/>
-          <p:nvPr/>
-        </p:nvSpPr>
-        <p:spPr>
-          <a:xfrm xmlns:a="http://schemas.openxmlformats.org/drawingml/2006/main">
-            <a:off x="914400" y="495300"/>
-            <a:ext cx="12001500" cy="457200"/>
-          </a:xfrm>
-          <a:prstGeom xmlns:a="http://schemas.openxmlformats.org/drawingml/2006/main" prst="rect">
-            <a:avLst/>
-          </a:prstGeom>
-          <a:noFill xmlns:a="http://schemas.openxmlformats.org/drawingml/2006/main"/>
-          <a:ln xmlns:a="http://schemas.openxmlformats.org/drawingml/2006/main" w="0">
-            <a:noFill/>
-          </a:ln>
-        </p:spPr>
-        <p:txBody>
-          <a:bodyPr xmlns:a="http://schemas.openxmlformats.org/drawingml/2006/main" wrap="square" lIns="0" tIns="0" rIns="0" bIns="0" anchor="t"/>
-          <a:lstStyle xmlns:a="http://schemas.openxmlformats.org/drawingml/2006/main"/>
-          <a:p xmlns:a="http://schemas.openxmlformats.org/drawingml/2006/main">
-            <a:r>
-              <a:rPr lang="en-US" sz="2550" b="1">
-                <a:solidFill>
-                  <a:srgbClr val="FFFFFF"/>
-                </a:solidFill>
-                <a:latin typeface="Arial"/>
-                <a:ea typeface="Arial"/>
-              </a:rPr>
-              <a:t>Let the subject do the work</a:t>
-            </a:r>
-            <a:endParaRPr lang="en-US"/>
-          </a:p>
-        </p:txBody>
-      </p:sp>
-      <p:sp>
-        <p:nvSpPr>
-          <p:cNvPr id="8" name="visual-body"/>
-          <p:cNvSpPr txBox="1"/>
-          <p:nvPr/>
-        </p:nvSpPr>
-        <p:spPr>
-          <a:xfrm xmlns:a="http://schemas.openxmlformats.org/drawingml/2006/main">
-            <a:off x="952500" y="1066800"/>
-            <a:ext cx="11049000" cy="228600"/>
-          </a:xfrm>
-          <a:prstGeom xmlns:a="http://schemas.openxmlformats.org/drawingml/2006/main" prst="rect">
-            <a:avLst/>
-          </a:prstGeom>
-          <a:noFill xmlns:a="http://schemas.openxmlformats.org/drawingml/2006/main"/>
-          <a:ln xmlns:a="http://schemas.openxmlformats.org/drawingml/2006/main" w="0">
-            <a:noFill/>
-          </a:ln>
-        </p:spPr>
-        <p:txBody>
-          <a:bodyPr xmlns:a="http://schemas.openxmlformats.org/drawingml/2006/main" wrap="square" lIns="0" tIns="0" rIns="0" bIns="0" anchor="t"/>
-          <a:lstStyle xmlns:a="http://schemas.openxmlformats.org/drawingml/2006/main"/>
-          <a:p xmlns:a="http://schemas.openxmlformats.org/drawingml/2006/main">
-            <a:r>
-              <a:rPr lang="en-US" sz="1200">
-                <a:solidFill>
-                  <a:srgbClr val="F0F3F2"/>
-                </a:solidFill>
-                <a:latin typeface="Arial"/>
-                <a:ea typeface="Arial"/>
-              </a:rPr>
-              <a:t>A strong crop gives the proposition a place to live.</a:t>
-            </a:r>
-            <a:endParaRPr lang="en-US"/>
-          </a:p>
-        </p:txBody>
-      </p:sp>
-      <p:sp>
-        <p:nvSpPr>
-          <p:cNvPr id="9" name="native-carrier-baseline"/>
-          <p:cNvSpPr/>
-          <p:nvPr/>
-        </p:nvSpPr>
-        <p:spPr>
-          <a:xfrm xmlns:a="http://schemas.openxmlformats.org/drawingml/2006/main">
-            <a:off x="1143000" y="6057900"/>
-            <a:ext cx="6972300" cy="0"/>
-          </a:xfrm>
-          <a:prstGeom xmlns:a="http://schemas.openxmlformats.org/drawingml/2006/main" prst="line">
-            <a:avLst/>
-          </a:prstGeom>
-          <a:noFill xmlns:a="http://schemas.openxmlformats.org/drawingml/2006/main"/>
-          <a:ln xmlns:a="http://schemas.openxmlformats.org/drawingml/2006/main" w="25400">
-            <a:solidFill>
-              <a:srgbClr val="243535"/>
-            </a:solidFill>
-            <a:prstDash val="solid"/>
-          </a:ln>
-        </p:spPr>
-        <p:txBody>
-          <a:bodyPr xmlns:a="http://schemas.openxmlformats.org/drawingml/2006/main" wrap="square" lIns="0" tIns="0" rIns="0" bIns="0" anchor="t"/>
-          <a:lstStyle xmlns:a="http://schemas.openxmlformats.org/drawingml/2006/main"/>
-          <a:p xmlns:a="http://schemas.openxmlformats.org/drawingml/2006/main">
-            <a:r>
-              <a:rPr lang="en-US"/>
-              <a:t/>
-            </a:r>
-            <a:endParaRPr lang="en-US"/>
-          </a:p>
-        </p:txBody>
-      </p:sp>
-      <p:sp>
-        <p:nvSpPr>
-          <p:cNvPr id="10" name="native-carrier-bar-0"/>
-          <p:cNvSpPr/>
-          <p:nvPr/>
-        </p:nvSpPr>
-        <p:spPr>
-          <a:xfrm xmlns:a="http://schemas.openxmlformats.org/drawingml/2006/main">
-            <a:off x="1371600" y="5343525"/>
-            <a:ext cx="514350" cy="714375"/>
-          </a:xfrm>
-          <a:prstGeom xmlns:a="http://schemas.openxmlformats.org/drawingml/2006/main" prst="rect">
-            <a:avLst/>
-          </a:prstGeom>
-          <a:solidFill xmlns:a="http://schemas.openxmlformats.org/drawingml/2006/main">
-            <a:srgbClr val="8D928C"/>
-          </a:solidFill>
-          <a:ln xmlns:a="http://schemas.openxmlformats.org/drawingml/2006/main" w="0">
-            <a:solidFill>
-              <a:srgbClr val="8D928C"/>
-            </a:solidFill>
-            <a:prstDash val="solid"/>
-          </a:ln>
-        </p:spPr>
-        <p:txBody>
-          <a:bodyPr xmlns:a="http://schemas.openxmlformats.org/drawingml/2006/main" wrap="square" lIns="0" tIns="0" rIns="0" bIns="0" anchor="t"/>
-          <a:lstStyle xmlns:a="http://schemas.openxmlformats.org/drawingml/2006/main"/>
-          <a:p xmlns:a="http://schemas.openxmlformats.org/drawingml/2006/main">
-            <a:r>
-              <a:rPr lang="en-US"/>
-              <a:t/>
-            </a:r>
-            <a:endParaRPr lang="en-US"/>
-          </a:p>
-        </p:txBody>
-      </p:sp>
-      <p:sp>
-        <p:nvSpPr>
-          <p:cNvPr id="11" name="native-carrier-value-0"/>
-          <p:cNvSpPr txBox="1"/>
-          <p:nvPr/>
-        </p:nvSpPr>
-        <p:spPr>
-          <a:xfrm xmlns:a="http://schemas.openxmlformats.org/drawingml/2006/main">
-            <a:off x="1333500" y="5095875"/>
-            <a:ext cx="590550" cy="209550"/>
-          </a:xfrm>
-          <a:prstGeom xmlns:a="http://schemas.openxmlformats.org/drawingml/2006/main" prst="rect">
-            <a:avLst/>
-          </a:prstGeom>
-          <a:noFill xmlns:a="http://schemas.openxmlformats.org/drawingml/2006/main"/>
-          <a:ln xmlns:a="http://schemas.openxmlformats.org/drawingml/2006/main" w="0">
-            <a:noFill/>
-          </a:ln>
-        </p:spPr>
-        <p:txBody>
-          <a:bodyPr xmlns:a="http://schemas.openxmlformats.org/drawingml/2006/main" wrap="square" lIns="0" tIns="0" rIns="0" bIns="0" anchor="t"/>
-          <a:lstStyle xmlns:a="http://schemas.openxmlformats.org/drawingml/2006/main"/>
-          <a:p xmlns:a="http://schemas.openxmlformats.org/drawingml/2006/main">
-            <a:pPr algn="ctr"/>
-            <a:r>
-              <a:rPr lang="en-US" sz="1125" b="1">
+              <a:t>ONE IMAGE · ONE THESIS · ONE TURN</a:t>
+            </a:r>
+            <a:endParaRPr lang="en-US"/>
+          </a:p>
+        </p:txBody>
+      </p:sp>
+      <p:sp>
+        <p:nvSpPr>
+          <p:cNvPr id="8" name="section-next"/>
+          <p:cNvSpPr txBox="1"/>
+          <p:nvPr/>
+        </p:nvSpPr>
+        <p:spPr>
+          <a:xfrm xmlns:a="http://schemas.openxmlformats.org/drawingml/2006/main">
+            <a:off x="914400" y="5772150"/>
+            <a:ext cx="5334000" cy="476250"/>
+          </a:xfrm>
+          <a:prstGeom xmlns:a="http://schemas.openxmlformats.org/drawingml/2006/main" prst="rect">
+            <a:avLst/>
+          </a:prstGeom>
+          <a:noFill xmlns:a="http://schemas.openxmlformats.org/drawingml/2006/main"/>
+          <a:ln xmlns:a="http://schemas.openxmlformats.org/drawingml/2006/main" w="0">
+            <a:noFill/>
+          </a:ln>
+        </p:spPr>
+        <p:txBody>
+          <a:bodyPr xmlns:a="http://schemas.openxmlformats.org/drawingml/2006/main" wrap="square" lIns="0" tIns="0" rIns="0" bIns="0" anchor="t"/>
+          <a:lstStyle xmlns:a="http://schemas.openxmlformats.org/drawingml/2006/main"/>
+          <a:p xmlns:a="http://schemas.openxmlformats.org/drawingml/2006/main">
+            <a:r>
+              <a:rPr lang="en-US" sz="2100" b="1">
                 <a:solidFill>
                   <a:srgbClr val="243535"/>
                 </a:solidFill>
                 <a:latin typeface="Arial"/>
                 <a:ea typeface="Arial"/>
               </a:rPr>
-              <a:t>34</a:t>
-            </a:r>
-            <a:endParaRPr lang="en-US"/>
-          </a:p>
-        </p:txBody>
-      </p:sp>
-      <p:sp>
-        <p:nvSpPr>
-          <p:cNvPr id="12" name="native-carrier-label-0"/>
-          <p:cNvSpPr txBox="1"/>
-          <p:nvPr/>
-        </p:nvSpPr>
-        <p:spPr>
-          <a:xfrm xmlns:a="http://schemas.openxmlformats.org/drawingml/2006/main">
-            <a:off x="1181100" y="6210300"/>
-            <a:ext cx="914400" cy="171450"/>
-          </a:xfrm>
-          <a:prstGeom xmlns:a="http://schemas.openxmlformats.org/drawingml/2006/main" prst="rect">
-            <a:avLst/>
-          </a:prstGeom>
-          <a:noFill xmlns:a="http://schemas.openxmlformats.org/drawingml/2006/main"/>
-          <a:ln xmlns:a="http://schemas.openxmlformats.org/drawingml/2006/main" w="0">
-            <a:noFill/>
-          </a:ln>
-        </p:spPr>
-        <p:txBody>
-          <a:bodyPr xmlns:a="http://schemas.openxmlformats.org/drawingml/2006/main" wrap="square" lIns="0" tIns="0" rIns="0" bIns="0" anchor="t"/>
-          <a:lstStyle xmlns:a="http://schemas.openxmlformats.org/drawingml/2006/main"/>
-          <a:p xmlns:a="http://schemas.openxmlformats.org/drawingml/2006/main">
-            <a:pPr algn="ctr"/>
-            <a:r>
-              <a:rPr lang="en-US" sz="750" b="1">
-                <a:solidFill>
-                  <a:srgbClr val="8D928C"/>
-                </a:solidFill>
-                <a:latin typeface="Arial"/>
-                <a:ea typeface="Arial"/>
-              </a:rPr>
-              <a:t>SIGNAL</a:t>
-            </a:r>
-            <a:endParaRPr lang="en-US"/>
-          </a:p>
-        </p:txBody>
-      </p:sp>
-      <p:sp>
-        <p:nvSpPr>
-          <p:cNvPr id="13" name="native-carrier-bar-1"/>
-          <p:cNvSpPr/>
-          <p:nvPr/>
-        </p:nvSpPr>
-        <p:spPr>
-          <a:xfrm xmlns:a="http://schemas.openxmlformats.org/drawingml/2006/main">
-            <a:off x="3114675" y="4876800"/>
-            <a:ext cx="514350" cy="1181100"/>
-          </a:xfrm>
-          <a:prstGeom xmlns:a="http://schemas.openxmlformats.org/drawingml/2006/main" prst="rect">
-            <a:avLst/>
-          </a:prstGeom>
-          <a:solidFill xmlns:a="http://schemas.openxmlformats.org/drawingml/2006/main">
-            <a:srgbClr val="D66552"/>
-          </a:solidFill>
-          <a:ln xmlns:a="http://schemas.openxmlformats.org/drawingml/2006/main" w="0">
-            <a:solidFill>
-              <a:srgbClr val="D66552"/>
-            </a:solidFill>
-            <a:prstDash val="solid"/>
-          </a:ln>
-        </p:spPr>
-        <p:txBody>
-          <a:bodyPr xmlns:a="http://schemas.openxmlformats.org/drawingml/2006/main" wrap="square" lIns="0" tIns="0" rIns="0" bIns="0" anchor="t"/>
-          <a:lstStyle xmlns:a="http://schemas.openxmlformats.org/drawingml/2006/main"/>
-          <a:p xmlns:a="http://schemas.openxmlformats.org/drawingml/2006/main">
-            <a:r>
-              <a:rPr lang="en-US"/>
-              <a:t/>
-            </a:r>
-            <a:endParaRPr lang="en-US"/>
-          </a:p>
-        </p:txBody>
-      </p:sp>
-      <p:sp>
-        <p:nvSpPr>
-          <p:cNvPr id="14" name="native-carrier-value-1"/>
-          <p:cNvSpPr txBox="1"/>
-          <p:nvPr/>
-        </p:nvSpPr>
-        <p:spPr>
-          <a:xfrm xmlns:a="http://schemas.openxmlformats.org/drawingml/2006/main">
-            <a:off x="3076575" y="4629150"/>
-            <a:ext cx="590550" cy="209550"/>
-          </a:xfrm>
-          <a:prstGeom xmlns:a="http://schemas.openxmlformats.org/drawingml/2006/main" prst="rect">
-            <a:avLst/>
-          </a:prstGeom>
-          <a:noFill xmlns:a="http://schemas.openxmlformats.org/drawingml/2006/main"/>
-          <a:ln xmlns:a="http://schemas.openxmlformats.org/drawingml/2006/main" w="0">
-            <a:noFill/>
-          </a:ln>
-        </p:spPr>
-        <p:txBody>
-          <a:bodyPr xmlns:a="http://schemas.openxmlformats.org/drawingml/2006/main" wrap="square" lIns="0" tIns="0" rIns="0" bIns="0" anchor="t"/>
-          <a:lstStyle xmlns:a="http://schemas.openxmlformats.org/drawingml/2006/main"/>
-          <a:p xmlns:a="http://schemas.openxmlformats.org/drawingml/2006/main">
-            <a:pPr algn="ctr"/>
-            <a:r>
-              <a:rPr lang="en-US" sz="1125" b="1">
-                <a:solidFill>
-                  <a:srgbClr val="243535"/>
-                </a:solidFill>
-                <a:latin typeface="Arial"/>
-                <a:ea typeface="Arial"/>
-              </a:rPr>
-              <a:t>56</a:t>
-            </a:r>
-            <a:endParaRPr lang="en-US"/>
-          </a:p>
-        </p:txBody>
-      </p:sp>
-      <p:sp>
-        <p:nvSpPr>
-          <p:cNvPr id="15" name="native-carrier-label-1"/>
-          <p:cNvSpPr txBox="1"/>
-          <p:nvPr/>
-        </p:nvSpPr>
-        <p:spPr>
-          <a:xfrm xmlns:a="http://schemas.openxmlformats.org/drawingml/2006/main">
-            <a:off x="2924175" y="6210300"/>
-            <a:ext cx="914400" cy="171450"/>
-          </a:xfrm>
-          <a:prstGeom xmlns:a="http://schemas.openxmlformats.org/drawingml/2006/main" prst="rect">
-            <a:avLst/>
-          </a:prstGeom>
-          <a:noFill xmlns:a="http://schemas.openxmlformats.org/drawingml/2006/main"/>
-          <a:ln xmlns:a="http://schemas.openxmlformats.org/drawingml/2006/main" w="0">
-            <a:noFill/>
-          </a:ln>
-        </p:spPr>
-        <p:txBody>
-          <a:bodyPr xmlns:a="http://schemas.openxmlformats.org/drawingml/2006/main" wrap="square" lIns="0" tIns="0" rIns="0" bIns="0" anchor="t"/>
-          <a:lstStyle xmlns:a="http://schemas.openxmlformats.org/drawingml/2006/main"/>
-          <a:p xmlns:a="http://schemas.openxmlformats.org/drawingml/2006/main">
-            <a:pPr algn="ctr"/>
-            <a:r>
-              <a:rPr lang="en-US" sz="750" b="1">
-                <a:solidFill>
-                  <a:srgbClr val="8D928C"/>
-                </a:solidFill>
-                <a:latin typeface="Arial"/>
-                <a:ea typeface="Arial"/>
-              </a:rPr>
-              <a:t>CONTEXT</a:t>
-            </a:r>
-            <a:endParaRPr lang="en-US"/>
-          </a:p>
-        </p:txBody>
-      </p:sp>
-      <p:sp>
-        <p:nvSpPr>
-          <p:cNvPr id="16" name="native-carrier-bar-2"/>
-          <p:cNvSpPr/>
-          <p:nvPr/>
-        </p:nvSpPr>
-        <p:spPr>
-          <a:xfrm xmlns:a="http://schemas.openxmlformats.org/drawingml/2006/main">
-            <a:off x="4857750" y="4410075"/>
-            <a:ext cx="514350" cy="1647825"/>
-          </a:xfrm>
-          <a:prstGeom xmlns:a="http://schemas.openxmlformats.org/drawingml/2006/main" prst="rect">
-            <a:avLst/>
-          </a:prstGeom>
-          <a:solidFill xmlns:a="http://schemas.openxmlformats.org/drawingml/2006/main">
-            <a:srgbClr val="8D928C"/>
-          </a:solidFill>
-          <a:ln xmlns:a="http://schemas.openxmlformats.org/drawingml/2006/main" w="0">
-            <a:solidFill>
-              <a:srgbClr val="8D928C"/>
-            </a:solidFill>
-            <a:prstDash val="solid"/>
-          </a:ln>
-        </p:spPr>
-        <p:txBody>
-          <a:bodyPr xmlns:a="http://schemas.openxmlformats.org/drawingml/2006/main" wrap="square" lIns="0" tIns="0" rIns="0" bIns="0" anchor="t"/>
-          <a:lstStyle xmlns:a="http://schemas.openxmlformats.org/drawingml/2006/main"/>
-          <a:p xmlns:a="http://schemas.openxmlformats.org/drawingml/2006/main">
-            <a:r>
-              <a:rPr lang="en-US"/>
-              <a:t/>
-            </a:r>
-            <a:endParaRPr lang="en-US"/>
-          </a:p>
-        </p:txBody>
-      </p:sp>
-      <p:sp>
-        <p:nvSpPr>
-          <p:cNvPr id="17" name="native-carrier-value-2"/>
-          <p:cNvSpPr txBox="1"/>
-          <p:nvPr/>
-        </p:nvSpPr>
-        <p:spPr>
-          <a:xfrm xmlns:a="http://schemas.openxmlformats.org/drawingml/2006/main">
-            <a:off x="4819650" y="4162425"/>
-            <a:ext cx="590550" cy="209550"/>
-          </a:xfrm>
-          <a:prstGeom xmlns:a="http://schemas.openxmlformats.org/drawingml/2006/main" prst="rect">
-            <a:avLst/>
-          </a:prstGeom>
-          <a:noFill xmlns:a="http://schemas.openxmlformats.org/drawingml/2006/main"/>
-          <a:ln xmlns:a="http://schemas.openxmlformats.org/drawingml/2006/main" w="0">
-            <a:noFill/>
-          </a:ln>
-        </p:spPr>
-        <p:txBody>
-          <a:bodyPr xmlns:a="http://schemas.openxmlformats.org/drawingml/2006/main" wrap="square" lIns="0" tIns="0" rIns="0" bIns="0" anchor="t"/>
-          <a:lstStyle xmlns:a="http://schemas.openxmlformats.org/drawingml/2006/main"/>
-          <a:p xmlns:a="http://schemas.openxmlformats.org/drawingml/2006/main">
-            <a:pPr algn="ctr"/>
-            <a:r>
-              <a:rPr lang="en-US" sz="1125" b="1">
-                <a:solidFill>
-                  <a:srgbClr val="243535"/>
-                </a:solidFill>
-                <a:latin typeface="Arial"/>
-                <a:ea typeface="Arial"/>
-              </a:rPr>
-              <a:t>78</a:t>
-            </a:r>
-            <a:endParaRPr lang="en-US"/>
-          </a:p>
-        </p:txBody>
-      </p:sp>
-      <p:sp>
-        <p:nvSpPr>
-          <p:cNvPr id="18" name="native-carrier-label-2"/>
-          <p:cNvSpPr txBox="1"/>
-          <p:nvPr/>
-        </p:nvSpPr>
-        <p:spPr>
-          <a:xfrm xmlns:a="http://schemas.openxmlformats.org/drawingml/2006/main">
-            <a:off x="4667250" y="6210300"/>
-            <a:ext cx="914400" cy="171450"/>
-          </a:xfrm>
-          <a:prstGeom xmlns:a="http://schemas.openxmlformats.org/drawingml/2006/main" prst="rect">
-            <a:avLst/>
-          </a:prstGeom>
-          <a:noFill xmlns:a="http://schemas.openxmlformats.org/drawingml/2006/main"/>
-          <a:ln xmlns:a="http://schemas.openxmlformats.org/drawingml/2006/main" w="0">
-            <a:noFill/>
-          </a:ln>
-        </p:spPr>
-        <p:txBody>
-          <a:bodyPr xmlns:a="http://schemas.openxmlformats.org/drawingml/2006/main" wrap="square" lIns="0" tIns="0" rIns="0" bIns="0" anchor="t"/>
-          <a:lstStyle xmlns:a="http://schemas.openxmlformats.org/drawingml/2006/main"/>
-          <a:p xmlns:a="http://schemas.openxmlformats.org/drawingml/2006/main">
-            <a:pPr algn="ctr"/>
-            <a:r>
-              <a:rPr lang="en-US" sz="750" b="1">
-                <a:solidFill>
-                  <a:srgbClr val="8D928C"/>
-                </a:solidFill>
-                <a:latin typeface="Arial"/>
-                <a:ea typeface="Arial"/>
-              </a:rPr>
-              <a:t>CHOICE</a:t>
-            </a:r>
-            <a:endParaRPr lang="en-US"/>
-          </a:p>
-        </p:txBody>
-      </p:sp>
-      <p:sp>
-        <p:nvSpPr>
-          <p:cNvPr id="19" name="native-carrier-bar-3"/>
-          <p:cNvSpPr/>
-          <p:nvPr/>
-        </p:nvSpPr>
-        <p:spPr>
-          <a:xfrm xmlns:a="http://schemas.openxmlformats.org/drawingml/2006/main">
-            <a:off x="6600825" y="4114800"/>
-            <a:ext cx="514350" cy="1943100"/>
-          </a:xfrm>
-          <a:prstGeom xmlns:a="http://schemas.openxmlformats.org/drawingml/2006/main" prst="rect">
-            <a:avLst/>
-          </a:prstGeom>
-          <a:solidFill xmlns:a="http://schemas.openxmlformats.org/drawingml/2006/main">
-            <a:srgbClr val="277B91"/>
-          </a:solidFill>
-          <a:ln xmlns:a="http://schemas.openxmlformats.org/drawingml/2006/main" w="0">
-            <a:solidFill>
-              <a:srgbClr val="277B91"/>
-            </a:solidFill>
-            <a:prstDash val="solid"/>
-          </a:ln>
-        </p:spPr>
-        <p:txBody>
-          <a:bodyPr xmlns:a="http://schemas.openxmlformats.org/drawingml/2006/main" wrap="square" lIns="0" tIns="0" rIns="0" bIns="0" anchor="t"/>
-          <a:lstStyle xmlns:a="http://schemas.openxmlformats.org/drawingml/2006/main"/>
-          <a:p xmlns:a="http://schemas.openxmlformats.org/drawingml/2006/main">
-            <a:r>
-              <a:rPr lang="en-US"/>
-              <a:t/>
-            </a:r>
-            <a:endParaRPr lang="en-US"/>
-          </a:p>
-        </p:txBody>
-      </p:sp>
-      <p:sp>
-        <p:nvSpPr>
-          <p:cNvPr id="20" name="native-carrier-value-3"/>
-          <p:cNvSpPr txBox="1"/>
-          <p:nvPr/>
-        </p:nvSpPr>
-        <p:spPr>
-          <a:xfrm xmlns:a="http://schemas.openxmlformats.org/drawingml/2006/main">
-            <a:off x="6562725" y="3867150"/>
-            <a:ext cx="590550" cy="209550"/>
-          </a:xfrm>
-          <a:prstGeom xmlns:a="http://schemas.openxmlformats.org/drawingml/2006/main" prst="rect">
-            <a:avLst/>
-          </a:prstGeom>
-          <a:noFill xmlns:a="http://schemas.openxmlformats.org/drawingml/2006/main"/>
-          <a:ln xmlns:a="http://schemas.openxmlformats.org/drawingml/2006/main" w="0">
-            <a:noFill/>
-          </a:ln>
-        </p:spPr>
-        <p:txBody>
-          <a:bodyPr xmlns:a="http://schemas.openxmlformats.org/drawingml/2006/main" wrap="square" lIns="0" tIns="0" rIns="0" bIns="0" anchor="t"/>
-          <a:lstStyle xmlns:a="http://schemas.openxmlformats.org/drawingml/2006/main"/>
-          <a:p xmlns:a="http://schemas.openxmlformats.org/drawingml/2006/main">
-            <a:pPr algn="ctr"/>
-            <a:r>
-              <a:rPr lang="en-US" sz="1125" b="1">
-                <a:solidFill>
-                  <a:srgbClr val="243535"/>
-                </a:solidFill>
-                <a:latin typeface="Arial"/>
-                <a:ea typeface="Arial"/>
-              </a:rPr>
-              <a:t>92</a:t>
-            </a:r>
-            <a:endParaRPr lang="en-US"/>
-          </a:p>
-        </p:txBody>
-      </p:sp>
-      <p:sp>
-        <p:nvSpPr>
-          <p:cNvPr id="21" name="native-carrier-label-3"/>
-          <p:cNvSpPr txBox="1"/>
-          <p:nvPr/>
-        </p:nvSpPr>
-        <p:spPr>
-          <a:xfrm xmlns:a="http://schemas.openxmlformats.org/drawingml/2006/main">
-            <a:off x="6410325" y="6210300"/>
-            <a:ext cx="914400" cy="171450"/>
-          </a:xfrm>
-          <a:prstGeom xmlns:a="http://schemas.openxmlformats.org/drawingml/2006/main" prst="rect">
-            <a:avLst/>
-          </a:prstGeom>
-          <a:noFill xmlns:a="http://schemas.openxmlformats.org/drawingml/2006/main"/>
-          <a:ln xmlns:a="http://schemas.openxmlformats.org/drawingml/2006/main" w="0">
-            <a:noFill/>
-          </a:ln>
-        </p:spPr>
-        <p:txBody>
-          <a:bodyPr xmlns:a="http://schemas.openxmlformats.org/drawingml/2006/main" wrap="square" lIns="0" tIns="0" rIns="0" bIns="0" anchor="t"/>
-          <a:lstStyle xmlns:a="http://schemas.openxmlformats.org/drawingml/2006/main"/>
-          <a:p xmlns:a="http://schemas.openxmlformats.org/drawingml/2006/main">
-            <a:pPr algn="ctr"/>
-            <a:r>
-              <a:rPr lang="en-US" sz="750" b="1">
-                <a:solidFill>
-                  <a:srgbClr val="8D928C"/>
-                </a:solidFill>
-                <a:latin typeface="Arial"/>
-                <a:ea typeface="Arial"/>
-              </a:rPr>
-              <a:t>NEXT</a:t>
-            </a:r>
-            <a:endParaRPr lang="en-US"/>
-          </a:p>
-        </p:txBody>
-      </p:sp>
-      <p:sp>
-        <p:nvSpPr>
-          <p:cNvPr id="22" name="native-carrier-trend"/>
-          <p:cNvSpPr/>
-          <p:nvPr/>
-        </p:nvSpPr>
-        <p:spPr>
-          <a:xfrm xmlns:a="http://schemas.openxmlformats.org/drawingml/2006/main">
-            <a:off x="1333500" y="4076700"/>
-            <a:ext cx="6610350" cy="1009650"/>
-          </a:xfrm>
-          <a:prstGeom xmlns:a="http://schemas.openxmlformats.org/drawingml/2006/main" prst="line">
-            <a:avLst/>
-          </a:prstGeom>
-          <a:noFill xmlns:a="http://schemas.openxmlformats.org/drawingml/2006/main"/>
-          <a:ln xmlns:a="http://schemas.openxmlformats.org/drawingml/2006/main" w="50800">
-            <a:solidFill>
-              <a:srgbClr val="243535"/>
-            </a:solidFill>
-            <a:prstDash val="solid"/>
-          </a:ln>
-        </p:spPr>
-        <p:txBody>
-          <a:bodyPr xmlns:a="http://schemas.openxmlformats.org/drawingml/2006/main" wrap="square" lIns="0" tIns="0" rIns="0" bIns="0" anchor="t"/>
-          <a:lstStyle xmlns:a="http://schemas.openxmlformats.org/drawingml/2006/main"/>
-          <a:p xmlns:a="http://schemas.openxmlformats.org/drawingml/2006/main">
-            <a:r>
-              <a:rPr lang="en-US"/>
-              <a:t/>
-            </a:r>
-            <a:endParaRPr lang="en-US"/>
-          </a:p>
-        </p:txBody>
-      </p:sp>
-      <p:sp>
-        <p:nvSpPr>
-          <p:cNvPr id="23" name="native-carrier-note"/>
-          <p:cNvSpPr txBox="1"/>
-          <p:nvPr/>
-        </p:nvSpPr>
-        <p:spPr>
-          <a:xfrm xmlns:a="http://schemas.openxmlformats.org/drawingml/2006/main">
-            <a:off x="1314450" y="3390900"/>
-            <a:ext cx="6629400" cy="247650"/>
-          </a:xfrm>
-          <a:prstGeom xmlns:a="http://schemas.openxmlformats.org/drawingml/2006/main" prst="rect">
-            <a:avLst/>
-          </a:prstGeom>
-          <a:noFill xmlns:a="http://schemas.openxmlformats.org/drawingml/2006/main"/>
-          <a:ln xmlns:a="http://schemas.openxmlformats.org/drawingml/2006/main" w="0">
-            <a:noFill/>
-          </a:ln>
-        </p:spPr>
-        <p:txBody>
-          <a:bodyPr xmlns:a="http://schemas.openxmlformats.org/drawingml/2006/main" wrap="square" lIns="0" tIns="0" rIns="0" bIns="0" anchor="t"/>
-          <a:lstStyle xmlns:a="http://schemas.openxmlformats.org/drawingml/2006/main"/>
-          <a:p xmlns:a="http://schemas.openxmlformats.org/drawingml/2006/main">
-            <a:r>
-              <a:rPr lang="en-US" sz="1200" b="1">
-                <a:solidFill>
-                  <a:srgbClr val="243535"/>
-                </a:solidFill>
-                <a:latin typeface="Arial"/>
-                <a:ea typeface="Arial"/>
-              </a:rPr>
-              <a:t>The visual is a relationship, not a decoration.</a:t>
-            </a:r>
-            <a:endParaRPr lang="en-US"/>
-          </a:p>
-        </p:txBody>
-      </p:sp>
-      <p:sp>
-        <p:nvSpPr>
-          <p:cNvPr id="24" name="visual-note"/>
-          <p:cNvSpPr/>
-          <p:nvPr/>
-        </p:nvSpPr>
-        <p:spPr>
-          <a:xfrm xmlns:a="http://schemas.openxmlformats.org/drawingml/2006/main">
-            <a:off x="11049000" y="3333750"/>
-            <a:ext cx="3048000" cy="2381250"/>
-          </a:xfrm>
-          <a:prstGeom xmlns:a="http://schemas.openxmlformats.org/drawingml/2006/main" prst="rect">
-            <a:avLst/>
-          </a:prstGeom>
-          <a:solidFill xmlns:a="http://schemas.openxmlformats.org/drawingml/2006/main">
-            <a:srgbClr val="F3F5F8"/>
-          </a:solidFill>
-          <a:ln xmlns:a="http://schemas.openxmlformats.org/drawingml/2006/main" w="12700">
-            <a:solidFill>
-              <a:srgbClr val="8D928C"/>
-            </a:solidFill>
-            <a:prstDash val="solid"/>
-          </a:ln>
-        </p:spPr>
-        <p:txBody>
-          <a:bodyPr xmlns:a="http://schemas.openxmlformats.org/drawingml/2006/main" wrap="square" lIns="0" tIns="0" rIns="0" bIns="0" anchor="t"/>
-          <a:lstStyle xmlns:a="http://schemas.openxmlformats.org/drawingml/2006/main"/>
-          <a:p xmlns:a="http://schemas.openxmlformats.org/drawingml/2006/main">
-            <a:r>
-              <a:rPr lang="en-US"/>
-              <a:t/>
-            </a:r>
-            <a:endParaRPr lang="en-US"/>
-          </a:p>
-        </p:txBody>
-      </p:sp>
-      <p:sp>
-        <p:nvSpPr>
-          <p:cNvPr id="25" name="visual-note-label"/>
-          <p:cNvSpPr txBox="1"/>
-          <p:nvPr/>
-        </p:nvSpPr>
-        <p:spPr>
-          <a:xfrm xmlns:a="http://schemas.openxmlformats.org/drawingml/2006/main">
-            <a:off x="11430000" y="3695700"/>
-            <a:ext cx="2286000" cy="228600"/>
-          </a:xfrm>
-          <a:prstGeom xmlns:a="http://schemas.openxmlformats.org/drawingml/2006/main" prst="rect">
-            <a:avLst/>
-          </a:prstGeom>
-          <a:noFill xmlns:a="http://schemas.openxmlformats.org/drawingml/2006/main"/>
-          <a:ln xmlns:a="http://schemas.openxmlformats.org/drawingml/2006/main" w="0">
-            <a:noFill/>
-          </a:ln>
-        </p:spPr>
-        <p:txBody>
-          <a:bodyPr xmlns:a="http://schemas.openxmlformats.org/drawingml/2006/main" wrap="square" lIns="0" tIns="0" rIns="0" bIns="0" anchor="t"/>
-          <a:lstStyle xmlns:a="http://schemas.openxmlformats.org/drawingml/2006/main"/>
-          <a:p xmlns:a="http://schemas.openxmlformats.org/drawingml/2006/main">
-            <a:r>
-              <a:rPr lang="en-US" sz="1125" b="1">
-                <a:solidFill>
-                  <a:srgbClr val="277B91"/>
-                </a:solidFill>
-                <a:latin typeface="Arial"/>
-                <a:ea typeface="Arial"/>
-              </a:rPr>
-              <a:t>CARRIER</a:t>
-            </a:r>
-            <a:endParaRPr lang="en-US"/>
-          </a:p>
-        </p:txBody>
-      </p:sp>
-      <p:sp>
-        <p:nvSpPr>
-          <p:cNvPr id="26" name="visual-note-text"/>
-          <p:cNvSpPr txBox="1"/>
-          <p:nvPr/>
-        </p:nvSpPr>
-        <p:spPr>
-          <a:xfrm xmlns:a="http://schemas.openxmlformats.org/drawingml/2006/main">
-            <a:off x="11430000" y="4171950"/>
-            <a:ext cx="2286000" cy="723900"/>
-          </a:xfrm>
-          <a:prstGeom xmlns:a="http://schemas.openxmlformats.org/drawingml/2006/main" prst="rect">
-            <a:avLst/>
-          </a:prstGeom>
-          <a:noFill xmlns:a="http://schemas.openxmlformats.org/drawingml/2006/main"/>
-          <a:ln xmlns:a="http://schemas.openxmlformats.org/drawingml/2006/main" w="0">
-            <a:noFill/>
-          </a:ln>
-        </p:spPr>
-        <p:txBody>
-          <a:bodyPr xmlns:a="http://schemas.openxmlformats.org/drawingml/2006/main" wrap="square" lIns="0" tIns="0" rIns="0" bIns="0" anchor="t"/>
-          <a:lstStyle xmlns:a="http://schemas.openxmlformats.org/drawingml/2006/main"/>
-          <a:p xmlns:a="http://schemas.openxmlformats.org/drawingml/2006/main">
-            <a:r>
-              <a:rPr lang="en-US" sz="2100" b="1">
-                <a:solidFill>
-                  <a:srgbClr val="243535"/>
-                </a:solidFill>
-                <a:latin typeface="Arial"/>
-                <a:ea typeface="Arial"/>
-              </a:rPr>
-              <a:t>Subject before slogan</a:t>
-            </a:r>
-            <a:endParaRPr lang="en-US"/>
-          </a:p>
-        </p:txBody>
-      </p:sp>
-      <p:sp>
-        <p:nvSpPr>
-          <p:cNvPr id="27" name="visual-note-foot"/>
-          <p:cNvSpPr txBox="1"/>
-          <p:nvPr/>
-        </p:nvSpPr>
-        <p:spPr>
-          <a:xfrm xmlns:a="http://schemas.openxmlformats.org/drawingml/2006/main">
-            <a:off x="11430000" y="5219700"/>
-            <a:ext cx="2286000" cy="457200"/>
-          </a:xfrm>
-          <a:prstGeom xmlns:a="http://schemas.openxmlformats.org/drawingml/2006/main" prst="rect">
-            <a:avLst/>
-          </a:prstGeom>
-          <a:noFill xmlns:a="http://schemas.openxmlformats.org/drawingml/2006/main"/>
-          <a:ln xmlns:a="http://schemas.openxmlformats.org/drawingml/2006/main" w="0">
-            <a:noFill/>
-          </a:ln>
-        </p:spPr>
-        <p:txBody>
-          <a:bodyPr xmlns:a="http://schemas.openxmlformats.org/drawingml/2006/main" wrap="square" lIns="0" tIns="0" rIns="0" bIns="0" anchor="t"/>
-          <a:lstStyle xmlns:a="http://schemas.openxmlformats.org/drawingml/2006/main"/>
-          <a:p xmlns:a="http://schemas.openxmlformats.org/drawingml/2006/main">
-            <a:r>
-              <a:rPr lang="en-US" sz="1200">
-                <a:solidFill>
-                  <a:srgbClr val="8D928C"/>
-                </a:solidFill>
-                <a:latin typeface="Arial"/>
-                <a:ea typeface="Arial"/>
-              </a:rPr>
-              <a:t>Read the mark, unit, and basis.</a:t>
-            </a:r>
-            <a:endParaRPr lang="en-US"/>
-          </a:p>
-        </p:txBody>
-      </p:sp>
-      <p:sp>
-        <p:nvSpPr>
-          <p:cNvPr id="28" name="source"/>
+              <a:t>Publish the invitation</a:t>
+            </a:r>
+            <a:endParaRPr lang="en-US"/>
+          </a:p>
+        </p:txBody>
+      </p:sp>
+      <p:sp>
+        <p:nvSpPr>
+          <p:cNvPr id="9" name="source"/>
           <p:cNvSpPr txBox="1"/>
           <p:nvPr/>
         </p:nvSpPr>
@@ -3336,7 +2739,7 @@
       </p:sp>
       <p:sp>
         <p:nvSpPr>
-          <p:cNvPr id="29" name="page-number"/>
+          <p:cNvPr id="10" name="page-number"/>
           <p:cNvSpPr txBox="1"/>
           <p:nvPr/>
         </p:nvSpPr>
@@ -3446,8 +2849,8 @@
           <p:nvPr/>
         </p:nvPicPr>
         <p:blipFill>
-          <a:blip xmlns:r="http://schemas.openxmlformats.org/officeDocument/2006/relationships" xmlns:a="http://schemas.openxmlformats.org/drawingml/2006/main" r:embed="rIdOfficeKitImagec7b73f8fac405495_1"/>
-          <a:srcRect xmlns:a="http://schemas.openxmlformats.org/drawingml/2006/main" l="0" t="47256" r="0" b="47256"/>
+          <a:blip xmlns:r="http://schemas.openxmlformats.org/officeDocument/2006/relationships" xmlns:a="http://schemas.openxmlformats.org/drawingml/2006/main" r:embed="rIdOfficeKitImage026be3a43029630d_1"/>
+          <a:srcRect xmlns:a="http://schemas.openxmlformats.org/drawingml/2006/main" l="0" t="47258" r="0" b="47258"/>
           <a:stretch xmlns:a="http://schemas.openxmlformats.org/drawingml/2006/main">
             <a:fillRect/>
           </a:stretch>

--- a/skills/presentation-template-library/skills/artifact-template-river-handbook/assets/reference.pptx
+++ b/skills/presentation-template-library/skills/artifact-template-river-handbook/assets/reference.pptx
@@ -200,7 +200,7 @@
     <p:bg>
       <p:bgPr>
         <a:blipFill xmlns:a="http://schemas.openxmlformats.org/drawingml/2006/main">
-          <a:blip xmlns:r="http://schemas.openxmlformats.org/officeDocument/2006/relationships" r:embed="rIdOfficeKitImage8fbc298f8d1b7a3c_1"/>
+          <a:blip xmlns:r="http://schemas.openxmlformats.org/officeDocument/2006/relationships" r:embed="rIdOfficeKitImage083106afebc7d419_1"/>
           <a:stretch>
             <a:fillRect/>
           </a:stretch>
@@ -590,8 +590,8 @@
           <p:nvPr/>
         </p:nvPicPr>
         <p:blipFill>
-          <a:blip xmlns:r="http://schemas.openxmlformats.org/officeDocument/2006/relationships" xmlns:a="http://schemas.openxmlformats.org/drawingml/2006/main" r:embed="rIdOfficeKitImage6af8c9b5dff6e3a3_1"/>
-          <a:srcRect xmlns:a="http://schemas.openxmlformats.org/drawingml/2006/main" l="0" t="47256" r="0" b="47256"/>
+          <a:blip xmlns:r="http://schemas.openxmlformats.org/officeDocument/2006/relationships" xmlns:a="http://schemas.openxmlformats.org/drawingml/2006/main" r:embed="rIdOfficeKitImage092dd3ee80187530_1"/>
+          <a:srcRect xmlns:a="http://schemas.openxmlformats.org/drawingml/2006/main" l="0" t="47258" r="0" b="47258"/>
           <a:stretch xmlns:a="http://schemas.openxmlformats.org/drawingml/2006/main">
             <a:fillRect/>
           </a:stretch>
@@ -913,7 +913,7 @@
           <p:nvPr/>
         </p:nvPicPr>
         <p:blipFill>
-          <a:blip xmlns:r="http://schemas.openxmlformats.org/officeDocument/2006/relationships" xmlns:a="http://schemas.openxmlformats.org/drawingml/2006/main" r:embed="rIdOfficeKitImage026be3a43029630d_1"/>
+          <a:blip xmlns:r="http://schemas.openxmlformats.org/officeDocument/2006/relationships" xmlns:a="http://schemas.openxmlformats.org/drawingml/2006/main" r:embed="rIdOfficeKitImage8fbc298f8d1b7a3c_1"/>
           <a:srcRect xmlns:a="http://schemas.openxmlformats.org/drawingml/2006/main" l="0" t="31920" r="0" b="31920"/>
           <a:stretch xmlns:a="http://schemas.openxmlformats.org/drawingml/2006/main">
             <a:fillRect/>
@@ -1149,8 +1149,8 @@
           <p:nvPr/>
         </p:nvPicPr>
         <p:blipFill>
-          <a:blip xmlns:r="http://schemas.openxmlformats.org/officeDocument/2006/relationships" xmlns:a="http://schemas.openxmlformats.org/drawingml/2006/main" r:embed="rIdOfficeKitImage092dd3ee80187530_1"/>
-          <a:srcRect xmlns:a="http://schemas.openxmlformats.org/drawingml/2006/main" l="0" t="47258" r="0" b="47258"/>
+          <a:blip xmlns:r="http://schemas.openxmlformats.org/officeDocument/2006/relationships" xmlns:a="http://schemas.openxmlformats.org/drawingml/2006/main" r:embed="rIdOfficeKitImage6af8c9b5dff6e3a3_1"/>
+          <a:srcRect xmlns:a="http://schemas.openxmlformats.org/drawingml/2006/main" l="0" t="47256" r="0" b="47256"/>
           <a:stretch xmlns:a="http://schemas.openxmlformats.org/drawingml/2006/main">
             <a:fillRect/>
           </a:stretch>
@@ -1361,7 +1361,7 @@
           <p:nvPr/>
         </p:nvPicPr>
         <p:blipFill>
-          <a:blip xmlns:r="http://schemas.openxmlformats.org/officeDocument/2006/relationships" xmlns:a="http://schemas.openxmlformats.org/drawingml/2006/main" r:embed="rIdOfficeKitImage083106afebc7d419_1"/>
+          <a:blip xmlns:r="http://schemas.openxmlformats.org/officeDocument/2006/relationships" xmlns:a="http://schemas.openxmlformats.org/drawingml/2006/main" r:embed="rIdOfficeKitImage026be3a43029630d_1"/>
           <a:srcRect xmlns:a="http://schemas.openxmlformats.org/drawingml/2006/main" l="0" t="39326" r="0" b="39326"/>
           <a:stretch xmlns:a="http://schemas.openxmlformats.org/drawingml/2006/main">
             <a:fillRect/>
@@ -1852,7 +1852,7 @@
           <p:nvPr/>
         </p:nvPicPr>
         <p:blipFill>
-          <a:blip xmlns:r="http://schemas.openxmlformats.org/officeDocument/2006/relationships" xmlns:a="http://schemas.openxmlformats.org/drawingml/2006/main" r:embed="rIdOfficeKitImage8fbc298f8d1b7a3c_1"/>
+          <a:blip xmlns:r="http://schemas.openxmlformats.org/officeDocument/2006/relationships" xmlns:a="http://schemas.openxmlformats.org/drawingml/2006/main" r:embed="rIdOfficeKitImage083106afebc7d419_1"/>
           <a:srcRect xmlns:a="http://schemas.openxmlformats.org/drawingml/2006/main" l="0" t="47258" r="0" b="47258"/>
           <a:stretch xmlns:a="http://schemas.openxmlformats.org/drawingml/2006/main">
             <a:fillRect/>
@@ -2064,8 +2064,8 @@
           <p:nvPr/>
         </p:nvPicPr>
         <p:blipFill>
-          <a:blip xmlns:r="http://schemas.openxmlformats.org/officeDocument/2006/relationships" xmlns:a="http://schemas.openxmlformats.org/drawingml/2006/main" r:embed="rIdOfficeKitImage6af8c9b5dff6e3a3_1"/>
-          <a:srcRect xmlns:a="http://schemas.openxmlformats.org/drawingml/2006/main" l="0" t="31962" r="0" b="31962"/>
+          <a:blip xmlns:r="http://schemas.openxmlformats.org/officeDocument/2006/relationships" xmlns:a="http://schemas.openxmlformats.org/drawingml/2006/main" r:embed="rIdOfficeKitImage092dd3ee80187530_1"/>
+          <a:srcRect xmlns:a="http://schemas.openxmlformats.org/drawingml/2006/main" l="0" t="31971" r="0" b="31971"/>
           <a:stretch xmlns:a="http://schemas.openxmlformats.org/drawingml/2006/main">
             <a:fillRect/>
           </a:stretch>
@@ -2093,7 +2093,7 @@
           <p:nvPr/>
         </p:nvPicPr>
         <p:blipFill>
-          <a:blip xmlns:r="http://schemas.openxmlformats.org/officeDocument/2006/relationships" xmlns:a="http://schemas.openxmlformats.org/drawingml/2006/main" r:embed="rIdOfficeKitImage026be3a43029630d_1"/>
+          <a:blip xmlns:r="http://schemas.openxmlformats.org/officeDocument/2006/relationships" xmlns:a="http://schemas.openxmlformats.org/drawingml/2006/main" r:embed="rIdOfficeKitImage8fbc298f8d1b7a3c_1"/>
           <a:srcRect xmlns:a="http://schemas.openxmlformats.org/drawingml/2006/main" l="0" t="32347" r="0" b="32347"/>
           <a:stretch xmlns:a="http://schemas.openxmlformats.org/drawingml/2006/main">
             <a:fillRect/>
@@ -2122,8 +2122,8 @@
           <p:nvPr/>
         </p:nvPicPr>
         <p:blipFill>
-          <a:blip xmlns:r="http://schemas.openxmlformats.org/officeDocument/2006/relationships" xmlns:a="http://schemas.openxmlformats.org/drawingml/2006/main" r:embed="rIdOfficeKitImage092dd3ee80187530_1"/>
-          <a:srcRect xmlns:a="http://schemas.openxmlformats.org/drawingml/2006/main" l="0" t="32347" r="0" b="32347"/>
+          <a:blip xmlns:r="http://schemas.openxmlformats.org/officeDocument/2006/relationships" xmlns:a="http://schemas.openxmlformats.org/drawingml/2006/main" r:embed="rIdOfficeKitImage6af8c9b5dff6e3a3_1"/>
+          <a:srcRect xmlns:a="http://schemas.openxmlformats.org/drawingml/2006/main" l="0" t="32338" r="0" b="32338"/>
           <a:stretch xmlns:a="http://schemas.openxmlformats.org/drawingml/2006/main">
             <a:fillRect/>
           </a:stretch>
@@ -2151,7 +2151,7 @@
           <p:nvPr/>
         </p:nvPicPr>
         <p:blipFill>
-          <a:blip xmlns:r="http://schemas.openxmlformats.org/officeDocument/2006/relationships" xmlns:a="http://schemas.openxmlformats.org/drawingml/2006/main" r:embed="rIdOfficeKitImage083106afebc7d419_1"/>
+          <a:blip xmlns:r="http://schemas.openxmlformats.org/officeDocument/2006/relationships" xmlns:a="http://schemas.openxmlformats.org/drawingml/2006/main" r:embed="rIdOfficeKitImage026be3a43029630d_1"/>
           <a:srcRect xmlns:a="http://schemas.openxmlformats.org/drawingml/2006/main" l="0" t="32347" r="0" b="32347"/>
           <a:stretch xmlns:a="http://schemas.openxmlformats.org/drawingml/2006/main">
             <a:fillRect/>
@@ -2180,7 +2180,7 @@
           <p:nvPr/>
         </p:nvPicPr>
         <p:blipFill>
-          <a:blip xmlns:r="http://schemas.openxmlformats.org/officeDocument/2006/relationships" xmlns:a="http://schemas.openxmlformats.org/drawingml/2006/main" r:embed="rIdOfficeKitImage8fbc298f8d1b7a3c_1"/>
+          <a:blip xmlns:r="http://schemas.openxmlformats.org/officeDocument/2006/relationships" xmlns:a="http://schemas.openxmlformats.org/drawingml/2006/main" r:embed="rIdOfficeKitImage083106afebc7d419_1"/>
           <a:srcRect xmlns:a="http://schemas.openxmlformats.org/drawingml/2006/main" l="0" t="32347" r="0" b="32347"/>
           <a:stretch xmlns:a="http://schemas.openxmlformats.org/drawingml/2006/main">
             <a:fillRect/>
@@ -2422,7 +2422,7 @@
     <p:bg>
       <p:bgPr>
         <a:blipFill xmlns:a="http://schemas.openxmlformats.org/drawingml/2006/main">
-          <a:blip xmlns:r="http://schemas.openxmlformats.org/officeDocument/2006/relationships" r:embed="rIdOfficeKitImage6af8c9b5dff6e3a3_1"/>
+          <a:blip xmlns:r="http://schemas.openxmlformats.org/officeDocument/2006/relationships" r:embed="rIdOfficeKitImage092dd3ee80187530_1"/>
           <a:stretch>
             <a:fillRect/>
           </a:stretch>
@@ -2849,7 +2849,7 @@
           <p:nvPr/>
         </p:nvPicPr>
         <p:blipFill>
-          <a:blip xmlns:r="http://schemas.openxmlformats.org/officeDocument/2006/relationships" xmlns:a="http://schemas.openxmlformats.org/drawingml/2006/main" r:embed="rIdOfficeKitImage026be3a43029630d_1"/>
+          <a:blip xmlns:r="http://schemas.openxmlformats.org/officeDocument/2006/relationships" xmlns:a="http://schemas.openxmlformats.org/drawingml/2006/main" r:embed="rIdOfficeKitImage8fbc298f8d1b7a3c_1"/>
           <a:srcRect xmlns:a="http://schemas.openxmlformats.org/drawingml/2006/main" l="0" t="47258" r="0" b="47258"/>
           <a:stretch xmlns:a="http://schemas.openxmlformats.org/drawingml/2006/main">
             <a:fillRect/>

--- a/skills/presentation-template-library/skills/artifact-template-river-handbook/assets/reference.pptx
+++ b/skills/presentation-template-library/skills/artifact-template-river-handbook/assets/reference.pptx
@@ -1852,8 +1852,8 @@
           <p:nvPr/>
         </p:nvPicPr>
         <p:blipFill>
-          <a:blip xmlns:r="http://schemas.openxmlformats.org/officeDocument/2006/relationships" xmlns:a="http://schemas.openxmlformats.org/drawingml/2006/main" r:embed="rIdOfficeKitImage083106afebc7d419_1"/>
-          <a:srcRect xmlns:a="http://schemas.openxmlformats.org/drawingml/2006/main" l="0" t="47258" r="0" b="47258"/>
+          <a:blip xmlns:r="http://schemas.openxmlformats.org/officeDocument/2006/relationships" xmlns:a="http://schemas.openxmlformats.org/drawingml/2006/main" r:embed="rIdOfficeKitImagea86c6dad26830b61_1"/>
+          <a:srcRect xmlns:a="http://schemas.openxmlformats.org/drawingml/2006/main" l="0" t="47256" r="0" b="47256"/>
           <a:stretch xmlns:a="http://schemas.openxmlformats.org/drawingml/2006/main">
             <a:fillRect/>
           </a:stretch>
@@ -2064,7 +2064,7 @@
           <p:nvPr/>
         </p:nvPicPr>
         <p:blipFill>
-          <a:blip xmlns:r="http://schemas.openxmlformats.org/officeDocument/2006/relationships" xmlns:a="http://schemas.openxmlformats.org/drawingml/2006/main" r:embed="rIdOfficeKitImage092dd3ee80187530_1"/>
+          <a:blip xmlns:r="http://schemas.openxmlformats.org/officeDocument/2006/relationships" xmlns:a="http://schemas.openxmlformats.org/drawingml/2006/main" r:embed="rIdOfficeKitImage083106afebc7d419_1"/>
           <a:srcRect xmlns:a="http://schemas.openxmlformats.org/drawingml/2006/main" l="0" t="31971" r="0" b="31971"/>
           <a:stretch xmlns:a="http://schemas.openxmlformats.org/drawingml/2006/main">
             <a:fillRect/>
@@ -2093,7 +2093,7 @@
           <p:nvPr/>
         </p:nvPicPr>
         <p:blipFill>
-          <a:blip xmlns:r="http://schemas.openxmlformats.org/officeDocument/2006/relationships" xmlns:a="http://schemas.openxmlformats.org/drawingml/2006/main" r:embed="rIdOfficeKitImage8fbc298f8d1b7a3c_1"/>
+          <a:blip xmlns:r="http://schemas.openxmlformats.org/officeDocument/2006/relationships" xmlns:a="http://schemas.openxmlformats.org/drawingml/2006/main" r:embed="rIdOfficeKitImage092dd3ee80187530_1"/>
           <a:srcRect xmlns:a="http://schemas.openxmlformats.org/drawingml/2006/main" l="0" t="32347" r="0" b="32347"/>
           <a:stretch xmlns:a="http://schemas.openxmlformats.org/drawingml/2006/main">
             <a:fillRect/>
@@ -2122,8 +2122,8 @@
           <p:nvPr/>
         </p:nvPicPr>
         <p:blipFill>
-          <a:blip xmlns:r="http://schemas.openxmlformats.org/officeDocument/2006/relationships" xmlns:a="http://schemas.openxmlformats.org/drawingml/2006/main" r:embed="rIdOfficeKitImage6af8c9b5dff6e3a3_1"/>
-          <a:srcRect xmlns:a="http://schemas.openxmlformats.org/drawingml/2006/main" l="0" t="32338" r="0" b="32338"/>
+          <a:blip xmlns:r="http://schemas.openxmlformats.org/officeDocument/2006/relationships" xmlns:a="http://schemas.openxmlformats.org/drawingml/2006/main" r:embed="rIdOfficeKitImage8fbc298f8d1b7a3c_1"/>
+          <a:srcRect xmlns:a="http://schemas.openxmlformats.org/drawingml/2006/main" l="0" t="32347" r="0" b="32347"/>
           <a:stretch xmlns:a="http://schemas.openxmlformats.org/drawingml/2006/main">
             <a:fillRect/>
           </a:stretch>
@@ -2151,8 +2151,8 @@
           <p:nvPr/>
         </p:nvPicPr>
         <p:blipFill>
-          <a:blip xmlns:r="http://schemas.openxmlformats.org/officeDocument/2006/relationships" xmlns:a="http://schemas.openxmlformats.org/drawingml/2006/main" r:embed="rIdOfficeKitImage026be3a43029630d_1"/>
-          <a:srcRect xmlns:a="http://schemas.openxmlformats.org/drawingml/2006/main" l="0" t="32347" r="0" b="32347"/>
+          <a:blip xmlns:r="http://schemas.openxmlformats.org/officeDocument/2006/relationships" xmlns:a="http://schemas.openxmlformats.org/drawingml/2006/main" r:embed="rIdOfficeKitImage6af8c9b5dff6e3a3_1"/>
+          <a:srcRect xmlns:a="http://schemas.openxmlformats.org/drawingml/2006/main" l="0" t="32338" r="0" b="32338"/>
           <a:stretch xmlns:a="http://schemas.openxmlformats.org/drawingml/2006/main">
             <a:fillRect/>
           </a:stretch>
@@ -2180,7 +2180,7 @@
           <p:nvPr/>
         </p:nvPicPr>
         <p:blipFill>
-          <a:blip xmlns:r="http://schemas.openxmlformats.org/officeDocument/2006/relationships" xmlns:a="http://schemas.openxmlformats.org/drawingml/2006/main" r:embed="rIdOfficeKitImage083106afebc7d419_1"/>
+          <a:blip xmlns:r="http://schemas.openxmlformats.org/officeDocument/2006/relationships" xmlns:a="http://schemas.openxmlformats.org/drawingml/2006/main" r:embed="rIdOfficeKitImage026be3a43029630d_1"/>
           <a:srcRect xmlns:a="http://schemas.openxmlformats.org/drawingml/2006/main" l="0" t="32347" r="0" b="32347"/>
           <a:stretch xmlns:a="http://schemas.openxmlformats.org/drawingml/2006/main">
             <a:fillRect/>
@@ -2422,7 +2422,7 @@
     <p:bg>
       <p:bgPr>
         <a:blipFill xmlns:a="http://schemas.openxmlformats.org/drawingml/2006/main">
-          <a:blip xmlns:r="http://schemas.openxmlformats.org/officeDocument/2006/relationships" r:embed="rIdOfficeKitImage092dd3ee80187530_1"/>
+          <a:blip xmlns:r="http://schemas.openxmlformats.org/officeDocument/2006/relationships" r:embed="rIdOfficeKitImagea86c6dad26830b61_1"/>
           <a:stretch>
             <a:fillRect/>
           </a:stretch>
@@ -2849,7 +2849,7 @@
           <p:nvPr/>
         </p:nvPicPr>
         <p:blipFill>
-          <a:blip xmlns:r="http://schemas.openxmlformats.org/officeDocument/2006/relationships" xmlns:a="http://schemas.openxmlformats.org/drawingml/2006/main" r:embed="rIdOfficeKitImage8fbc298f8d1b7a3c_1"/>
+          <a:blip xmlns:r="http://schemas.openxmlformats.org/officeDocument/2006/relationships" xmlns:a="http://schemas.openxmlformats.org/drawingml/2006/main" r:embed="rIdOfficeKitImage083106afebc7d419_1"/>
           <a:srcRect xmlns:a="http://schemas.openxmlformats.org/drawingml/2006/main" l="0" t="47258" r="0" b="47258"/>
           <a:stretch xmlns:a="http://schemas.openxmlformats.org/drawingml/2006/main">
             <a:fillRect/>

--- a/skills/presentation-template-library/skills/artifact-template-river-handbook/assets/reference.pptx
+++ b/skills/presentation-template-library/skills/artifact-template-river-handbook/assets/reference.pptx
@@ -200,7 +200,7 @@
     <p:bg>
       <p:bgPr>
         <a:blipFill xmlns:a="http://schemas.openxmlformats.org/drawingml/2006/main">
-          <a:blip xmlns:r="http://schemas.openxmlformats.org/officeDocument/2006/relationships" r:embed="rIdOfficeKitImage083106afebc7d419_1"/>
+          <a:blip xmlns:r="http://schemas.openxmlformats.org/officeDocument/2006/relationships" r:embed="rIdOfficeKitImage10e4539a68783891_1"/>
           <a:stretch>
             <a:fillRect/>
           </a:stretch>
@@ -590,7 +590,7 @@
           <p:nvPr/>
         </p:nvPicPr>
         <p:blipFill>
-          <a:blip xmlns:r="http://schemas.openxmlformats.org/officeDocument/2006/relationships" xmlns:a="http://schemas.openxmlformats.org/drawingml/2006/main" r:embed="rIdOfficeKitImage092dd3ee80187530_1"/>
+          <a:blip xmlns:r="http://schemas.openxmlformats.org/officeDocument/2006/relationships" xmlns:a="http://schemas.openxmlformats.org/drawingml/2006/main" r:embed="rIdOfficeKitImage5e425a7c66b022d4_1"/>
           <a:srcRect xmlns:a="http://schemas.openxmlformats.org/drawingml/2006/main" l="0" t="47258" r="0" b="47258"/>
           <a:stretch xmlns:a="http://schemas.openxmlformats.org/drawingml/2006/main">
             <a:fillRect/>
@@ -913,7 +913,7 @@
           <p:nvPr/>
         </p:nvPicPr>
         <p:blipFill>
-          <a:blip xmlns:r="http://schemas.openxmlformats.org/officeDocument/2006/relationships" xmlns:a="http://schemas.openxmlformats.org/drawingml/2006/main" r:embed="rIdOfficeKitImage8fbc298f8d1b7a3c_1"/>
+          <a:blip xmlns:r="http://schemas.openxmlformats.org/officeDocument/2006/relationships" xmlns:a="http://schemas.openxmlformats.org/drawingml/2006/main" r:embed="rIdOfficeKitImagee231e9493e535fbe_1"/>
           <a:srcRect xmlns:a="http://schemas.openxmlformats.org/drawingml/2006/main" l="0" t="31920" r="0" b="31920"/>
           <a:stretch xmlns:a="http://schemas.openxmlformats.org/drawingml/2006/main">
             <a:fillRect/>
@@ -1149,7 +1149,7 @@
           <p:nvPr/>
         </p:nvPicPr>
         <p:blipFill>
-          <a:blip xmlns:r="http://schemas.openxmlformats.org/officeDocument/2006/relationships" xmlns:a="http://schemas.openxmlformats.org/drawingml/2006/main" r:embed="rIdOfficeKitImage6af8c9b5dff6e3a3_1"/>
+          <a:blip xmlns:r="http://schemas.openxmlformats.org/officeDocument/2006/relationships" xmlns:a="http://schemas.openxmlformats.org/drawingml/2006/main" r:embed="rIdOfficeKitImagefff481b85b8743d2_1"/>
           <a:srcRect xmlns:a="http://schemas.openxmlformats.org/drawingml/2006/main" l="0" t="47256" r="0" b="47256"/>
           <a:stretch xmlns:a="http://schemas.openxmlformats.org/drawingml/2006/main">
             <a:fillRect/>
@@ -1361,7 +1361,7 @@
           <p:nvPr/>
         </p:nvPicPr>
         <p:blipFill>
-          <a:blip xmlns:r="http://schemas.openxmlformats.org/officeDocument/2006/relationships" xmlns:a="http://schemas.openxmlformats.org/drawingml/2006/main" r:embed="rIdOfficeKitImage026be3a43029630d_1"/>
+          <a:blip xmlns:r="http://schemas.openxmlformats.org/officeDocument/2006/relationships" xmlns:a="http://schemas.openxmlformats.org/drawingml/2006/main" r:embed="rIdOfficeKitImagee930dcb9c6b95953_1"/>
           <a:srcRect xmlns:a="http://schemas.openxmlformats.org/drawingml/2006/main" l="0" t="39326" r="0" b="39326"/>
           <a:stretch xmlns:a="http://schemas.openxmlformats.org/drawingml/2006/main">
             <a:fillRect/>
@@ -1852,7 +1852,7 @@
           <p:nvPr/>
         </p:nvPicPr>
         <p:blipFill>
-          <a:blip xmlns:r="http://schemas.openxmlformats.org/officeDocument/2006/relationships" xmlns:a="http://schemas.openxmlformats.org/drawingml/2006/main" r:embed="rIdOfficeKitImagea86c6dad26830b61_1"/>
+          <a:blip xmlns:r="http://schemas.openxmlformats.org/officeDocument/2006/relationships" xmlns:a="http://schemas.openxmlformats.org/drawingml/2006/main" r:embed="rIdOfficeKitImagefdea69a11126d29b_1"/>
           <a:srcRect xmlns:a="http://schemas.openxmlformats.org/drawingml/2006/main" l="0" t="47256" r="0" b="47256"/>
           <a:stretch xmlns:a="http://schemas.openxmlformats.org/drawingml/2006/main">
             <a:fillRect/>
@@ -2064,8 +2064,8 @@
           <p:nvPr/>
         </p:nvPicPr>
         <p:blipFill>
-          <a:blip xmlns:r="http://schemas.openxmlformats.org/officeDocument/2006/relationships" xmlns:a="http://schemas.openxmlformats.org/drawingml/2006/main" r:embed="rIdOfficeKitImage083106afebc7d419_1"/>
-          <a:srcRect xmlns:a="http://schemas.openxmlformats.org/drawingml/2006/main" l="0" t="31971" r="0" b="31971"/>
+          <a:blip xmlns:r="http://schemas.openxmlformats.org/officeDocument/2006/relationships" xmlns:a="http://schemas.openxmlformats.org/drawingml/2006/main" r:embed="rIdOfficeKitImagee977612ad933c986_1"/>
+          <a:srcRect xmlns:a="http://schemas.openxmlformats.org/drawingml/2006/main" l="0" t="31957" r="0" b="31957"/>
           <a:stretch xmlns:a="http://schemas.openxmlformats.org/drawingml/2006/main">
             <a:fillRect/>
           </a:stretch>
@@ -2093,8 +2093,8 @@
           <p:nvPr/>
         </p:nvPicPr>
         <p:blipFill>
-          <a:blip xmlns:r="http://schemas.openxmlformats.org/officeDocument/2006/relationships" xmlns:a="http://schemas.openxmlformats.org/drawingml/2006/main" r:embed="rIdOfficeKitImage092dd3ee80187530_1"/>
-          <a:srcRect xmlns:a="http://schemas.openxmlformats.org/drawingml/2006/main" l="0" t="32347" r="0" b="32347"/>
+          <a:blip xmlns:r="http://schemas.openxmlformats.org/officeDocument/2006/relationships" xmlns:a="http://schemas.openxmlformats.org/drawingml/2006/main" r:embed="rIdOfficeKitImage6785cc6781fd2511_1"/>
+          <a:srcRect xmlns:a="http://schemas.openxmlformats.org/drawingml/2006/main" l="0" t="32333" r="0" b="32333"/>
           <a:stretch xmlns:a="http://schemas.openxmlformats.org/drawingml/2006/main">
             <a:fillRect/>
           </a:stretch>
@@ -2122,7 +2122,7 @@
           <p:nvPr/>
         </p:nvPicPr>
         <p:blipFill>
-          <a:blip xmlns:r="http://schemas.openxmlformats.org/officeDocument/2006/relationships" xmlns:a="http://schemas.openxmlformats.org/drawingml/2006/main" r:embed="rIdOfficeKitImage8fbc298f8d1b7a3c_1"/>
+          <a:blip xmlns:r="http://schemas.openxmlformats.org/officeDocument/2006/relationships" xmlns:a="http://schemas.openxmlformats.org/drawingml/2006/main" r:embed="rIdOfficeKitImaged96cedd8678b85ac_1"/>
           <a:srcRect xmlns:a="http://schemas.openxmlformats.org/drawingml/2006/main" l="0" t="32347" r="0" b="32347"/>
           <a:stretch xmlns:a="http://schemas.openxmlformats.org/drawingml/2006/main">
             <a:fillRect/>
@@ -2151,8 +2151,8 @@
           <p:nvPr/>
         </p:nvPicPr>
         <p:blipFill>
-          <a:blip xmlns:r="http://schemas.openxmlformats.org/officeDocument/2006/relationships" xmlns:a="http://schemas.openxmlformats.org/drawingml/2006/main" r:embed="rIdOfficeKitImage6af8c9b5dff6e3a3_1"/>
-          <a:srcRect xmlns:a="http://schemas.openxmlformats.org/drawingml/2006/main" l="0" t="32338" r="0" b="32338"/>
+          <a:blip xmlns:r="http://schemas.openxmlformats.org/officeDocument/2006/relationships" xmlns:a="http://schemas.openxmlformats.org/drawingml/2006/main" r:embed="rIdOfficeKitImage35d943dc999c7d05_1"/>
+          <a:srcRect xmlns:a="http://schemas.openxmlformats.org/drawingml/2006/main" l="0" t="32347" r="0" b="32347"/>
           <a:stretch xmlns:a="http://schemas.openxmlformats.org/drawingml/2006/main">
             <a:fillRect/>
           </a:stretch>
@@ -2180,14 +2180,14 @@
           <p:nvPr/>
         </p:nvPicPr>
         <p:blipFill>
-          <a:blip xmlns:r="http://schemas.openxmlformats.org/officeDocument/2006/relationships" xmlns:a="http://schemas.openxmlformats.org/drawingml/2006/main" r:embed="rIdOfficeKitImage026be3a43029630d_1"/>
+          <a:blip xmlns:r="http://schemas.openxmlformats.org/officeDocument/2006/relationships" xmlns:a="http://schemas.openxmlformats.org/drawingml/2006/main" r:embed="rIdOfficeKitImagedf986129197cef3b_1"/>
           <a:srcRect xmlns:a="http://schemas.openxmlformats.org/drawingml/2006/main" l="0" t="32347" r="0" b="32347"/>
           <a:stretch xmlns:a="http://schemas.openxmlformats.org/drawingml/2006/main">
             <a:fillRect/>
           </a:stretch>
         </p:blipFill>
         <p:spPr>
-          <a:xfrm xmlns:a="http://schemas.openxmlformats.org/drawingml/2006/main">
+          <a:xfrm xmlns:a="http://schemas.openxmlformats.org/drawingml/2006/main" flipH="1">
             <a:off x="6858000" y="4457700"/>
             <a:ext cx="1790700" cy="1123950"/>
           </a:xfrm>
@@ -2422,7 +2422,7 @@
     <p:bg>
       <p:bgPr>
         <a:blipFill xmlns:a="http://schemas.openxmlformats.org/drawingml/2006/main">
-          <a:blip xmlns:r="http://schemas.openxmlformats.org/officeDocument/2006/relationships" r:embed="rIdOfficeKitImagea86c6dad26830b61_1"/>
+          <a:blip xmlns:r="http://schemas.openxmlformats.org/officeDocument/2006/relationships" r:embed="rIdOfficeKitImage84ff976f39aab728_1"/>
           <a:stretch>
             <a:fillRect/>
           </a:stretch>
@@ -2849,7 +2849,7 @@
           <p:nvPr/>
         </p:nvPicPr>
         <p:blipFill>
-          <a:blip xmlns:r="http://schemas.openxmlformats.org/officeDocument/2006/relationships" xmlns:a="http://schemas.openxmlformats.org/drawingml/2006/main" r:embed="rIdOfficeKitImage083106afebc7d419_1"/>
+          <a:blip xmlns:r="http://schemas.openxmlformats.org/officeDocument/2006/relationships" xmlns:a="http://schemas.openxmlformats.org/drawingml/2006/main" r:embed="rIdOfficeKitImage10e4539a68783891_1"/>
           <a:srcRect xmlns:a="http://schemas.openxmlformats.org/drawingml/2006/main" l="0" t="47258" r="0" b="47258"/>
           <a:stretch xmlns:a="http://schemas.openxmlformats.org/drawingml/2006/main">
             <a:fillRect/>

--- a/skills/presentation-template-library/skills/artifact-template-river-handbook/assets/reference.pptx
+++ b/skills/presentation-template-library/skills/artifact-template-river-handbook/assets/reference.pptx
@@ -1350,7 +1350,7 @@
       </p:sp>
       <p:pic>
         <p:nvPicPr>
-          <p:cNvPr id="9" name="evidence-image-field">
+          <p:cNvPr id="9" name="evidence-matrix-0">
             <a:extLst xmlns:a="http://schemas.openxmlformats.org/drawingml/2006/main">
               <a:ext uri="{C183D7F6-B498-43B3-948B-1728B52AA6E4}">
                 <adec:decorative xmlns:adec="http://schemas.microsoft.com/office/drawing/2017/decorative" val="1"/>
@@ -1362,269 +1362,243 @@
         </p:nvPicPr>
         <p:blipFill>
           <a:blip xmlns:r="http://schemas.openxmlformats.org/officeDocument/2006/relationships" xmlns:a="http://schemas.openxmlformats.org/drawingml/2006/main" r:embed="rIdOfficeKitImagee930dcb9c6b95953_1"/>
-          <a:srcRect xmlns:a="http://schemas.openxmlformats.org/drawingml/2006/main" l="0" t="39326" r="0" b="39326"/>
+          <a:srcRect xmlns:a="http://schemas.openxmlformats.org/drawingml/2006/main" l="0" t="30757" r="0" b="30757"/>
           <a:stretch xmlns:a="http://schemas.openxmlformats.org/drawingml/2006/main">
             <a:fillRect/>
           </a:stretch>
         </p:blipFill>
         <p:spPr>
           <a:xfrm xmlns:a="http://schemas.openxmlformats.org/drawingml/2006/main">
-            <a:off x="1047750" y="3048000"/>
-            <a:ext cx="7905750" cy="3000375"/>
+            <a:off x="1066800" y="3333750"/>
+            <a:ext cx="3619500" cy="2476500"/>
           </a:xfrm>
           <a:prstGeom xmlns:a="http://schemas.openxmlformats.org/drawingml/2006/main" prst="rect">
             <a:avLst/>
           </a:prstGeom>
         </p:spPr>
       </p:pic>
-      <p:sp>
-        <p:nvSpPr>
-          <p:cNvPr id="10" name="evidence-image-caption"/>
-          <p:cNvSpPr txBox="1"/>
-          <p:nvPr/>
-        </p:nvSpPr>
-        <p:spPr>
-          <a:xfrm xmlns:a="http://schemas.openxmlformats.org/drawingml/2006/main">
-            <a:off x="1333500" y="3333750"/>
-            <a:ext cx="4762500" cy="266700"/>
-          </a:xfrm>
-          <a:prstGeom xmlns:a="http://schemas.openxmlformats.org/drawingml/2006/main" prst="rect">
-            <a:avLst/>
-          </a:prstGeom>
-          <a:noFill xmlns:a="http://schemas.openxmlformats.org/drawingml/2006/main"/>
-          <a:ln xmlns:a="http://schemas.openxmlformats.org/drawingml/2006/main" w="0">
-            <a:noFill/>
-          </a:ln>
-        </p:spPr>
-        <p:txBody>
-          <a:bodyPr xmlns:a="http://schemas.openxmlformats.org/drawingml/2006/main" wrap="square" lIns="0" tIns="0" rIns="0" bIns="0" anchor="t"/>
-          <a:lstStyle xmlns:a="http://schemas.openxmlformats.org/drawingml/2006/main"/>
-          <a:p xmlns:a="http://schemas.openxmlformats.org/drawingml/2006/main">
-            <a:r>
-              <a:rPr lang="en-US" sz="1350" b="1">
-                <a:solidFill>
-                  <a:srgbClr val="202124"/>
-                </a:solidFill>
-                <a:latin typeface="Arial"/>
-                <a:ea typeface="Arial"/>
-              </a:rPr>
-              <a:t>ONE SUBJECT · THREE SIGNALS</a:t>
-            </a:r>
-            <a:endParaRPr lang="en-US"/>
-          </a:p>
-        </p:txBody>
-      </p:sp>
-      <p:sp>
-        <p:nvSpPr>
-          <p:cNvPr id="11" name="evidence-image-rule"/>
-          <p:cNvSpPr/>
-          <p:nvPr/>
-        </p:nvSpPr>
-        <p:spPr>
-          <a:xfrm xmlns:a="http://schemas.openxmlformats.org/drawingml/2006/main">
-            <a:off x="1333500" y="5619750"/>
-            <a:ext cx="6096000" cy="0"/>
-          </a:xfrm>
-          <a:prstGeom xmlns:a="http://schemas.openxmlformats.org/drawingml/2006/main" prst="line">
-            <a:avLst/>
-          </a:prstGeom>
-          <a:noFill xmlns:a="http://schemas.openxmlformats.org/drawingml/2006/main"/>
-          <a:ln xmlns:a="http://schemas.openxmlformats.org/drawingml/2006/main" w="38100">
-            <a:solidFill>
-              <a:srgbClr val="202124"/>
-            </a:solidFill>
-            <a:prstDash val="solid"/>
-          </a:ln>
-        </p:spPr>
-        <p:txBody>
-          <a:bodyPr xmlns:a="http://schemas.openxmlformats.org/drawingml/2006/main" wrap="square" lIns="0" tIns="0" rIns="0" bIns="0" anchor="t"/>
-          <a:lstStyle xmlns:a="http://schemas.openxmlformats.org/drawingml/2006/main"/>
-          <a:p xmlns:a="http://schemas.openxmlformats.org/drawingml/2006/main">
-            <a:r>
-              <a:rPr lang="en-US"/>
-              <a:t/>
-            </a:r>
-            <a:endParaRPr lang="en-US"/>
-          </a:p>
-        </p:txBody>
-      </p:sp>
-      <p:sp>
-        <p:nvSpPr>
-          <p:cNvPr id="12" name="evidence-image-note"/>
-          <p:cNvSpPr txBox="1"/>
-          <p:nvPr/>
-        </p:nvSpPr>
-        <p:spPr>
-          <a:xfrm xmlns:a="http://schemas.openxmlformats.org/drawingml/2006/main">
-            <a:off x="1333500" y="5810250"/>
-            <a:ext cx="6477000" cy="285750"/>
-          </a:xfrm>
-          <a:prstGeom xmlns:a="http://schemas.openxmlformats.org/drawingml/2006/main" prst="rect">
-            <a:avLst/>
-          </a:prstGeom>
-          <a:noFill xmlns:a="http://schemas.openxmlformats.org/drawingml/2006/main"/>
-          <a:ln xmlns:a="http://schemas.openxmlformats.org/drawingml/2006/main" w="0">
-            <a:noFill/>
-          </a:ln>
-        </p:spPr>
-        <p:txBody>
-          <a:bodyPr xmlns:a="http://schemas.openxmlformats.org/drawingml/2006/main" wrap="square" lIns="0" tIns="0" rIns="0" bIns="0" anchor="t"/>
-          <a:lstStyle xmlns:a="http://schemas.openxmlformats.org/drawingml/2006/main"/>
-          <a:p xmlns:a="http://schemas.openxmlformats.org/drawingml/2006/main">
-            <a:r>
-              <a:rPr lang="en-US" sz="1350" b="1">
-                <a:solidFill>
-                  <a:srgbClr val="202124"/>
-                </a:solidFill>
-                <a:latin typeface="Arial"/>
-                <a:ea typeface="Arial"/>
-              </a:rPr>
-              <a:t>The image carries the story; the label carries the claim.</a:t>
-            </a:r>
-            <a:endParaRPr lang="en-US"/>
-          </a:p>
-        </p:txBody>
-      </p:sp>
-      <p:sp>
-        <p:nvSpPr>
-          <p:cNvPr id="13" name="metric"/>
-          <p:cNvSpPr txBox="1"/>
-          <p:nvPr/>
-        </p:nvSpPr>
-        <p:spPr>
-          <a:xfrm xmlns:a="http://schemas.openxmlformats.org/drawingml/2006/main">
-            <a:off x="9906000" y="3333750"/>
-            <a:ext cx="2667000" cy="781050"/>
-          </a:xfrm>
-          <a:prstGeom xmlns:a="http://schemas.openxmlformats.org/drawingml/2006/main" prst="rect">
-            <a:avLst/>
-          </a:prstGeom>
-          <a:noFill xmlns:a="http://schemas.openxmlformats.org/drawingml/2006/main"/>
-          <a:ln xmlns:a="http://schemas.openxmlformats.org/drawingml/2006/main" w="0">
-            <a:noFill/>
-          </a:ln>
-        </p:spPr>
-        <p:txBody>
-          <a:bodyPr xmlns:a="http://schemas.openxmlformats.org/drawingml/2006/main" wrap="square" lIns="0" tIns="0" rIns="0" bIns="0" anchor="t"/>
-          <a:lstStyle xmlns:a="http://schemas.openxmlformats.org/drawingml/2006/main"/>
-          <a:p xmlns:a="http://schemas.openxmlformats.org/drawingml/2006/main">
-            <a:r>
-              <a:rPr lang="en-US" sz="4800" b="1">
+      <p:pic>
+        <p:nvPicPr>
+          <p:cNvPr id="10" name="evidence-matrix-1">
+            <a:extLst xmlns:a="http://schemas.openxmlformats.org/drawingml/2006/main">
+              <a:ext uri="{C183D7F6-B498-43B3-948B-1728B52AA6E4}">
+                <adec:decorative xmlns:adec="http://schemas.microsoft.com/office/drawing/2017/decorative" val="1"/>
+              </a:ext>
+            </a:extLst>
+          </p:cNvPr>
+          <p:cNvPicPr/>
+          <p:nvPr/>
+        </p:nvPicPr>
+        <p:blipFill>
+          <a:blip xmlns:r="http://schemas.openxmlformats.org/officeDocument/2006/relationships" xmlns:a="http://schemas.openxmlformats.org/drawingml/2006/main" r:embed="rIdOfficeKitImagefdea69a11126d29b_1"/>
+          <a:srcRect xmlns:a="http://schemas.openxmlformats.org/drawingml/2006/main" l="0" t="31927" r="0" b="31927"/>
+          <a:stretch xmlns:a="http://schemas.openxmlformats.org/drawingml/2006/main">
+            <a:fillRect/>
+          </a:stretch>
+        </p:blipFill>
+        <p:spPr>
+          <a:xfrm xmlns:a="http://schemas.openxmlformats.org/drawingml/2006/main">
+            <a:off x="4895850" y="3333750"/>
+            <a:ext cx="1809750" cy="1162050"/>
+          </a:xfrm>
+          <a:prstGeom xmlns:a="http://schemas.openxmlformats.org/drawingml/2006/main" prst="rect">
+            <a:avLst/>
+          </a:prstGeom>
+        </p:spPr>
+      </p:pic>
+      <p:pic>
+        <p:nvPicPr>
+          <p:cNvPr id="11" name="evidence-matrix-2">
+            <a:extLst xmlns:a="http://schemas.openxmlformats.org/drawingml/2006/main">
+              <a:ext uri="{C183D7F6-B498-43B3-948B-1728B52AA6E4}">
+                <adec:decorative xmlns:adec="http://schemas.microsoft.com/office/drawing/2017/decorative" val="1"/>
+              </a:ext>
+            </a:extLst>
+          </p:cNvPr>
+          <p:cNvPicPr/>
+          <p:nvPr/>
+        </p:nvPicPr>
+        <p:blipFill>
+          <a:blip xmlns:r="http://schemas.openxmlformats.org/officeDocument/2006/relationships" xmlns:a="http://schemas.openxmlformats.org/drawingml/2006/main" r:embed="rIdOfficeKitImagee977612ad933c986_1"/>
+          <a:srcRect xmlns:a="http://schemas.openxmlformats.org/drawingml/2006/main" l="0" t="31927" r="0" b="31927"/>
+          <a:stretch xmlns:a="http://schemas.openxmlformats.org/drawingml/2006/main">
+            <a:fillRect/>
+          </a:stretch>
+        </p:blipFill>
+        <p:spPr>
+          <a:xfrm xmlns:a="http://schemas.openxmlformats.org/drawingml/2006/main">
+            <a:off x="6877050" y="3333750"/>
+            <a:ext cx="1809750" cy="1162050"/>
+          </a:xfrm>
+          <a:prstGeom xmlns:a="http://schemas.openxmlformats.org/drawingml/2006/main" prst="rect">
+            <a:avLst/>
+          </a:prstGeom>
+        </p:spPr>
+      </p:pic>
+      <p:pic>
+        <p:nvPicPr>
+          <p:cNvPr id="12" name="evidence-matrix-3">
+            <a:extLst xmlns:a="http://schemas.openxmlformats.org/drawingml/2006/main">
+              <a:ext uri="{C183D7F6-B498-43B3-948B-1728B52AA6E4}">
+                <adec:decorative xmlns:adec="http://schemas.microsoft.com/office/drawing/2017/decorative" val="1"/>
+              </a:ext>
+            </a:extLst>
+          </p:cNvPr>
+          <p:cNvPicPr/>
+          <p:nvPr/>
+        </p:nvPicPr>
+        <p:blipFill>
+          <a:blip xmlns:r="http://schemas.openxmlformats.org/officeDocument/2006/relationships" xmlns:a="http://schemas.openxmlformats.org/drawingml/2006/main" r:embed="rIdOfficeKitImage6785cc6781fd2511_1"/>
+          <a:srcRect xmlns:a="http://schemas.openxmlformats.org/drawingml/2006/main" l="0" t="31927" r="0" b="31927"/>
+          <a:stretch xmlns:a="http://schemas.openxmlformats.org/drawingml/2006/main">
+            <a:fillRect/>
+          </a:stretch>
+        </p:blipFill>
+        <p:spPr>
+          <a:xfrm xmlns:a="http://schemas.openxmlformats.org/drawingml/2006/main">
+            <a:off x="4895850" y="4648200"/>
+            <a:ext cx="1809750" cy="1162050"/>
+          </a:xfrm>
+          <a:prstGeom xmlns:a="http://schemas.openxmlformats.org/drawingml/2006/main" prst="rect">
+            <a:avLst/>
+          </a:prstGeom>
+        </p:spPr>
+      </p:pic>
+      <p:pic>
+        <p:nvPicPr>
+          <p:cNvPr id="13" name="evidence-matrix-4">
+            <a:extLst xmlns:a="http://schemas.openxmlformats.org/drawingml/2006/main">
+              <a:ext uri="{C183D7F6-B498-43B3-948B-1728B52AA6E4}">
+                <adec:decorative xmlns:adec="http://schemas.microsoft.com/office/drawing/2017/decorative" val="1"/>
+              </a:ext>
+            </a:extLst>
+          </p:cNvPr>
+          <p:cNvPicPr/>
+          <p:nvPr/>
+        </p:nvPicPr>
+        <p:blipFill>
+          <a:blip xmlns:r="http://schemas.openxmlformats.org/officeDocument/2006/relationships" xmlns:a="http://schemas.openxmlformats.org/drawingml/2006/main" r:embed="rIdOfficeKitImaged96cedd8678b85ac_1"/>
+          <a:srcRect xmlns:a="http://schemas.openxmlformats.org/drawingml/2006/main" l="0" t="31941" r="0" b="31941"/>
+          <a:stretch xmlns:a="http://schemas.openxmlformats.org/drawingml/2006/main">
+            <a:fillRect/>
+          </a:stretch>
+        </p:blipFill>
+        <p:spPr>
+          <a:xfrm xmlns:a="http://schemas.openxmlformats.org/drawingml/2006/main">
+            <a:off x="6877050" y="4648200"/>
+            <a:ext cx="1809750" cy="1162050"/>
+          </a:xfrm>
+          <a:prstGeom xmlns:a="http://schemas.openxmlformats.org/drawingml/2006/main" prst="rect">
+            <a:avLst/>
+          </a:prstGeom>
+        </p:spPr>
+      </p:pic>
+      <p:sp>
+        <p:nvSpPr>
+          <p:cNvPr id="14" name="matrix-label"/>
+          <p:cNvSpPr txBox="1"/>
+          <p:nvPr/>
+        </p:nvSpPr>
+        <p:spPr>
+          <a:xfrm xmlns:a="http://schemas.openxmlformats.org/drawingml/2006/main">
+            <a:off x="9620250" y="3429000"/>
+            <a:ext cx="3429000" cy="228600"/>
+          </a:xfrm>
+          <a:prstGeom xmlns:a="http://schemas.openxmlformats.org/drawingml/2006/main" prst="rect">
+            <a:avLst/>
+          </a:prstGeom>
+          <a:noFill xmlns:a="http://schemas.openxmlformats.org/drawingml/2006/main"/>
+          <a:ln xmlns:a="http://schemas.openxmlformats.org/drawingml/2006/main" w="0">
+            <a:noFill/>
+          </a:ln>
+        </p:spPr>
+        <p:txBody>
+          <a:bodyPr xmlns:a="http://schemas.openxmlformats.org/drawingml/2006/main" wrap="square" lIns="0" tIns="0" rIns="0" bIns="0" anchor="t"/>
+          <a:lstStyle xmlns:a="http://schemas.openxmlformats.org/drawingml/2006/main"/>
+          <a:p xmlns:a="http://schemas.openxmlformats.org/drawingml/2006/main">
+            <a:r>
+              <a:rPr lang="en-US" sz="1125" b="1">
                 <a:solidFill>
                   <a:srgbClr val="277B91"/>
                 </a:solidFill>
                 <a:latin typeface="Arial"/>
                 <a:ea typeface="Arial"/>
               </a:rPr>
-              <a:t>68</a:t>
-            </a:r>
-            <a:endParaRPr lang="en-US"/>
-          </a:p>
-        </p:txBody>
-      </p:sp>
-      <p:sp>
-        <p:nvSpPr>
-          <p:cNvPr id="14" name="metric-label"/>
-          <p:cNvSpPr txBox="1"/>
-          <p:nvPr/>
-        </p:nvSpPr>
-        <p:spPr>
-          <a:xfrm xmlns:a="http://schemas.openxmlformats.org/drawingml/2006/main">
-            <a:off x="9906000" y="4143375"/>
-            <a:ext cx="3143250" cy="285750"/>
-          </a:xfrm>
-          <a:prstGeom xmlns:a="http://schemas.openxmlformats.org/drawingml/2006/main" prst="rect">
-            <a:avLst/>
-          </a:prstGeom>
-          <a:noFill xmlns:a="http://schemas.openxmlformats.org/drawingml/2006/main"/>
-          <a:ln xmlns:a="http://schemas.openxmlformats.org/drawingml/2006/main" w="0">
-            <a:noFill/>
-          </a:ln>
-        </p:spPr>
-        <p:txBody>
-          <a:bodyPr xmlns:a="http://schemas.openxmlformats.org/drawingml/2006/main" wrap="square" lIns="0" tIns="0" rIns="0" bIns="0" anchor="t"/>
-          <a:lstStyle xmlns:a="http://schemas.openxmlformats.org/drawingml/2006/main"/>
-          <a:p xmlns:a="http://schemas.openxmlformats.org/drawingml/2006/main">
-            <a:r>
-              <a:rPr lang="en-US" sz="1350">
+              <a:t>IMAGE EVIDENCE</a:t>
+            </a:r>
+            <a:endParaRPr lang="en-US"/>
+          </a:p>
+        </p:txBody>
+      </p:sp>
+      <p:sp>
+        <p:nvSpPr>
+          <p:cNvPr id="15" name="matrix-title"/>
+          <p:cNvSpPr txBox="1"/>
+          <p:nvPr/>
+        </p:nvSpPr>
+        <p:spPr>
+          <a:xfrm xmlns:a="http://schemas.openxmlformats.org/drawingml/2006/main">
+            <a:off x="9620250" y="3943350"/>
+            <a:ext cx="3619500" cy="723900"/>
+          </a:xfrm>
+          <a:prstGeom xmlns:a="http://schemas.openxmlformats.org/drawingml/2006/main" prst="rect">
+            <a:avLst/>
+          </a:prstGeom>
+          <a:noFill xmlns:a="http://schemas.openxmlformats.org/drawingml/2006/main"/>
+          <a:ln xmlns:a="http://schemas.openxmlformats.org/drawingml/2006/main" w="0">
+            <a:noFill/>
+          </a:ln>
+        </p:spPr>
+        <p:txBody>
+          <a:bodyPr xmlns:a="http://schemas.openxmlformats.org/drawingml/2006/main" wrap="square" lIns="0" tIns="0" rIns="0" bIns="0" anchor="t"/>
+          <a:lstStyle xmlns:a="http://schemas.openxmlformats.org/drawingml/2006/main"/>
+          <a:p xmlns:a="http://schemas.openxmlformats.org/drawingml/2006/main">
+            <a:r>
+              <a:rPr lang="en-US" sz="2025" b="1">
+                <a:solidFill>
+                  <a:srgbClr val="243535"/>
+                </a:solidFill>
+                <a:latin typeface="Arial"/>
+                <a:ea typeface="Arial"/>
+              </a:rPr>
+              <a:t>The same subject can carry several proofs.</a:t>
+            </a:r>
+            <a:endParaRPr lang="en-US"/>
+          </a:p>
+        </p:txBody>
+      </p:sp>
+      <p:sp>
+        <p:nvSpPr>
+          <p:cNvPr id="16" name="matrix-body"/>
+          <p:cNvSpPr txBox="1"/>
+          <p:nvPr/>
+        </p:nvSpPr>
+        <p:spPr>
+          <a:xfrm xmlns:a="http://schemas.openxmlformats.org/drawingml/2006/main">
+            <a:off x="9620250" y="5048250"/>
+            <a:ext cx="3619500" cy="857250"/>
+          </a:xfrm>
+          <a:prstGeom xmlns:a="http://schemas.openxmlformats.org/drawingml/2006/main" prst="rect">
+            <a:avLst/>
+          </a:prstGeom>
+          <a:noFill xmlns:a="http://schemas.openxmlformats.org/drawingml/2006/main"/>
+          <a:ln xmlns:a="http://schemas.openxmlformats.org/drawingml/2006/main" w="0">
+            <a:noFill/>
+          </a:ln>
+        </p:spPr>
+        <p:txBody>
+          <a:bodyPr xmlns:a="http://schemas.openxmlformats.org/drawingml/2006/main" wrap="square" lIns="0" tIns="0" rIns="0" bIns="0" anchor="t"/>
+          <a:lstStyle xmlns:a="http://schemas.openxmlformats.org/drawingml/2006/main"/>
+          <a:p xmlns:a="http://schemas.openxmlformats.org/drawingml/2006/main">
+            <a:r>
+              <a:rPr lang="en-US" sz="1275">
                 <a:solidFill>
                   <a:srgbClr val="8D928C"/>
                 </a:solidFill>
                 <a:latin typeface="Arial"/>
                 <a:ea typeface="Arial"/>
               </a:rPr>
-              <a:t>qualified response · campaign close</a:t>
-            </a:r>
-            <a:endParaRPr lang="en-US"/>
-          </a:p>
-        </p:txBody>
-      </p:sp>
-      <p:sp>
-        <p:nvSpPr>
-          <p:cNvPr id="15" name="rail-rule"/>
-          <p:cNvSpPr/>
-          <p:nvPr/>
-        </p:nvSpPr>
-        <p:spPr>
-          <a:xfrm xmlns:a="http://schemas.openxmlformats.org/drawingml/2006/main">
-            <a:off x="9906000" y="4810125"/>
-            <a:ext cx="3762375" cy="0"/>
-          </a:xfrm>
-          <a:prstGeom xmlns:a="http://schemas.openxmlformats.org/drawingml/2006/main" prst="line">
-            <a:avLst/>
-          </a:prstGeom>
-          <a:noFill xmlns:a="http://schemas.openxmlformats.org/drawingml/2006/main"/>
-          <a:ln xmlns:a="http://schemas.openxmlformats.org/drawingml/2006/main" w="25400">
-            <a:solidFill>
-              <a:srgbClr val="8D928C"/>
-            </a:solidFill>
-            <a:prstDash val="solid"/>
-          </a:ln>
-        </p:spPr>
-        <p:txBody>
-          <a:bodyPr xmlns:a="http://schemas.openxmlformats.org/drawingml/2006/main" wrap="square" lIns="0" tIns="0" rIns="0" bIns="0" anchor="t"/>
-          <a:lstStyle xmlns:a="http://schemas.openxmlformats.org/drawingml/2006/main"/>
-          <a:p xmlns:a="http://schemas.openxmlformats.org/drawingml/2006/main">
-            <a:r>
-              <a:rPr lang="en-US"/>
-              <a:t/>
-            </a:r>
-            <a:endParaRPr lang="en-US"/>
-          </a:p>
-        </p:txBody>
-      </p:sp>
-      <p:sp>
-        <p:nvSpPr>
-          <p:cNvPr id="16" name="read-through"/>
-          <p:cNvSpPr txBox="1"/>
-          <p:nvPr/>
-        </p:nvSpPr>
-        <p:spPr>
-          <a:xfrm xmlns:a="http://schemas.openxmlformats.org/drawingml/2006/main">
-            <a:off x="9906000" y="5143500"/>
-            <a:ext cx="3429000" cy="742950"/>
-          </a:xfrm>
-          <a:prstGeom xmlns:a="http://schemas.openxmlformats.org/drawingml/2006/main" prst="rect">
-            <a:avLst/>
-          </a:prstGeom>
-          <a:noFill xmlns:a="http://schemas.openxmlformats.org/drawingml/2006/main"/>
-          <a:ln xmlns:a="http://schemas.openxmlformats.org/drawingml/2006/main" w="0">
-            <a:noFill/>
-          </a:ln>
-        </p:spPr>
-        <p:txBody>
-          <a:bodyPr xmlns:a="http://schemas.openxmlformats.org/drawingml/2006/main" wrap="square" lIns="0" tIns="0" rIns="0" bIns="0" anchor="t"/>
-          <a:lstStyle xmlns:a="http://schemas.openxmlformats.org/drawingml/2006/main"/>
-          <a:p xmlns:a="http://schemas.openxmlformats.org/drawingml/2006/main">
-            <a:r>
-              <a:rPr lang="en-US" sz="1650" b="1">
-                <a:solidFill>
-                  <a:srgbClr val="243535"/>
-                </a:solidFill>
-                <a:latin typeface="Arial"/>
-                <a:ea typeface="Arial"/>
-              </a:rPr>
-              <a:t>Reach is useful only when the audience can see and take the next step.</a:t>
+              <a:t>Use a dominant frame for context and smaller crops for comparable detail. Every image needs a role, source, and readable caption.</a:t>
             </a:r>
             <a:endParaRPr lang="en-US"/>
           </a:p>
@@ -1852,8 +1826,8 @@
           <p:nvPr/>
         </p:nvPicPr>
         <p:blipFill>
-          <a:blip xmlns:r="http://schemas.openxmlformats.org/officeDocument/2006/relationships" xmlns:a="http://schemas.openxmlformats.org/drawingml/2006/main" r:embed="rIdOfficeKitImagefdea69a11126d29b_1"/>
-          <a:srcRect xmlns:a="http://schemas.openxmlformats.org/drawingml/2006/main" l="0" t="47256" r="0" b="47256"/>
+          <a:blip xmlns:r="http://schemas.openxmlformats.org/officeDocument/2006/relationships" xmlns:a="http://schemas.openxmlformats.org/drawingml/2006/main" r:embed="rIdOfficeKitImage35d943dc999c7d05_1"/>
+          <a:srcRect xmlns:a="http://schemas.openxmlformats.org/drawingml/2006/main" l="0" t="47258" r="0" b="47258"/>
           <a:stretch xmlns:a="http://schemas.openxmlformats.org/drawingml/2006/main">
             <a:fillRect/>
           </a:stretch>
@@ -2064,14 +2038,14 @@
           <p:nvPr/>
         </p:nvPicPr>
         <p:blipFill>
-          <a:blip xmlns:r="http://schemas.openxmlformats.org/officeDocument/2006/relationships" xmlns:a="http://schemas.openxmlformats.org/drawingml/2006/main" r:embed="rIdOfficeKitImagee977612ad933c986_1"/>
-          <a:srcRect xmlns:a="http://schemas.openxmlformats.org/drawingml/2006/main" l="0" t="31957" r="0" b="31957"/>
+          <a:blip xmlns:r="http://schemas.openxmlformats.org/officeDocument/2006/relationships" xmlns:a="http://schemas.openxmlformats.org/drawingml/2006/main" r:embed="rIdOfficeKitImagedf986129197cef3b_1"/>
+          <a:srcRect xmlns:a="http://schemas.openxmlformats.org/drawingml/2006/main" l="0" t="31971" r="0" b="31971"/>
           <a:stretch xmlns:a="http://schemas.openxmlformats.org/drawingml/2006/main">
             <a:fillRect/>
           </a:stretch>
         </p:blipFill>
         <p:spPr>
-          <a:xfrm xmlns:a="http://schemas.openxmlformats.org/drawingml/2006/main">
+          <a:xfrm xmlns:a="http://schemas.openxmlformats.org/drawingml/2006/main" flipH="1">
             <a:off x="990600" y="3162300"/>
             <a:ext cx="3714750" cy="2381250"/>
           </a:xfrm>
@@ -2093,8 +2067,8 @@
           <p:nvPr/>
         </p:nvPicPr>
         <p:blipFill>
-          <a:blip xmlns:r="http://schemas.openxmlformats.org/officeDocument/2006/relationships" xmlns:a="http://schemas.openxmlformats.org/drawingml/2006/main" r:embed="rIdOfficeKitImage6785cc6781fd2511_1"/>
-          <a:srcRect xmlns:a="http://schemas.openxmlformats.org/drawingml/2006/main" l="0" t="32333" r="0" b="32333"/>
+          <a:blip xmlns:r="http://schemas.openxmlformats.org/officeDocument/2006/relationships" xmlns:a="http://schemas.openxmlformats.org/drawingml/2006/main" r:embed="rIdOfficeKitImage84ff976f39aab728_1"/>
+          <a:srcRect xmlns:a="http://schemas.openxmlformats.org/drawingml/2006/main" l="0" t="32347" r="0" b="32347"/>
           <a:stretch xmlns:a="http://schemas.openxmlformats.org/drawingml/2006/main">
             <a:fillRect/>
           </a:stretch>
@@ -2122,7 +2096,7 @@
           <p:nvPr/>
         </p:nvPicPr>
         <p:blipFill>
-          <a:blip xmlns:r="http://schemas.openxmlformats.org/officeDocument/2006/relationships" xmlns:a="http://schemas.openxmlformats.org/drawingml/2006/main" r:embed="rIdOfficeKitImaged96cedd8678b85ac_1"/>
+          <a:blip xmlns:r="http://schemas.openxmlformats.org/officeDocument/2006/relationships" xmlns:a="http://schemas.openxmlformats.org/drawingml/2006/main" r:embed="rIdOfficeKitImage10e4539a68783891_1"/>
           <a:srcRect xmlns:a="http://schemas.openxmlformats.org/drawingml/2006/main" l="0" t="32347" r="0" b="32347"/>
           <a:stretch xmlns:a="http://schemas.openxmlformats.org/drawingml/2006/main">
             <a:fillRect/>
@@ -2151,7 +2125,7 @@
           <p:nvPr/>
         </p:nvPicPr>
         <p:blipFill>
-          <a:blip xmlns:r="http://schemas.openxmlformats.org/officeDocument/2006/relationships" xmlns:a="http://schemas.openxmlformats.org/drawingml/2006/main" r:embed="rIdOfficeKitImage35d943dc999c7d05_1"/>
+          <a:blip xmlns:r="http://schemas.openxmlformats.org/officeDocument/2006/relationships" xmlns:a="http://schemas.openxmlformats.org/drawingml/2006/main" r:embed="rIdOfficeKitImage5e425a7c66b022d4_1"/>
           <a:srcRect xmlns:a="http://schemas.openxmlformats.org/drawingml/2006/main" l="0" t="32347" r="0" b="32347"/>
           <a:stretch xmlns:a="http://schemas.openxmlformats.org/drawingml/2006/main">
             <a:fillRect/>
@@ -2180,14 +2154,14 @@
           <p:nvPr/>
         </p:nvPicPr>
         <p:blipFill>
-          <a:blip xmlns:r="http://schemas.openxmlformats.org/officeDocument/2006/relationships" xmlns:a="http://schemas.openxmlformats.org/drawingml/2006/main" r:embed="rIdOfficeKitImagedf986129197cef3b_1"/>
+          <a:blip xmlns:r="http://schemas.openxmlformats.org/officeDocument/2006/relationships" xmlns:a="http://schemas.openxmlformats.org/drawingml/2006/main" r:embed="rIdOfficeKitImagee231e9493e535fbe_1"/>
           <a:srcRect xmlns:a="http://schemas.openxmlformats.org/drawingml/2006/main" l="0" t="32347" r="0" b="32347"/>
           <a:stretch xmlns:a="http://schemas.openxmlformats.org/drawingml/2006/main">
             <a:fillRect/>
           </a:stretch>
         </p:blipFill>
         <p:spPr>
-          <a:xfrm xmlns:a="http://schemas.openxmlformats.org/drawingml/2006/main" flipH="1">
+          <a:xfrm xmlns:a="http://schemas.openxmlformats.org/drawingml/2006/main">
             <a:off x="6858000" y="4457700"/>
             <a:ext cx="1790700" cy="1123950"/>
           </a:xfrm>
@@ -2422,7 +2396,7 @@
     <p:bg>
       <p:bgPr>
         <a:blipFill xmlns:a="http://schemas.openxmlformats.org/drawingml/2006/main">
-          <a:blip xmlns:r="http://schemas.openxmlformats.org/officeDocument/2006/relationships" r:embed="rIdOfficeKitImage84ff976f39aab728_1"/>
+          <a:blip xmlns:r="http://schemas.openxmlformats.org/officeDocument/2006/relationships" r:embed="rIdOfficeKitImagefff481b85b8743d2_1"/>
           <a:stretch>
             <a:fillRect/>
           </a:stretch>
@@ -2849,7 +2823,7 @@
           <p:nvPr/>
         </p:nvPicPr>
         <p:blipFill>
-          <a:blip xmlns:r="http://schemas.openxmlformats.org/officeDocument/2006/relationships" xmlns:a="http://schemas.openxmlformats.org/drawingml/2006/main" r:embed="rIdOfficeKitImage10e4539a68783891_1"/>
+          <a:blip xmlns:r="http://schemas.openxmlformats.org/officeDocument/2006/relationships" xmlns:a="http://schemas.openxmlformats.org/drawingml/2006/main" r:embed="rIdOfficeKitImagee930dcb9c6b95953_1"/>
           <a:srcRect xmlns:a="http://schemas.openxmlformats.org/drawingml/2006/main" l="0" t="47258" r="0" b="47258"/>
           <a:stretch xmlns:a="http://schemas.openxmlformats.org/drawingml/2006/main">
             <a:fillRect/>

--- a/skills/presentation-template-library/skills/artifact-template-river-handbook/assets/reference.pptx
+++ b/skills/presentation-template-library/skills/artifact-template-river-handbook/assets/reference.pptx
@@ -914,7 +914,7 @@
         </p:nvPicPr>
         <p:blipFill>
           <a:blip xmlns:r="http://schemas.openxmlformats.org/officeDocument/2006/relationships" xmlns:a="http://schemas.openxmlformats.org/drawingml/2006/main" r:embed="rIdOfficeKitImagee231e9493e535fbe_1"/>
-          <a:srcRect xmlns:a="http://schemas.openxmlformats.org/drawingml/2006/main" l="0" t="31920" r="0" b="31920"/>
+          <a:srcRect xmlns:a="http://schemas.openxmlformats.org/drawingml/2006/main" l="0" t="37411" r="0" b="37411"/>
           <a:stretch xmlns:a="http://schemas.openxmlformats.org/drawingml/2006/main">
             <a:fillRect/>
           </a:stretch>
@@ -922,22 +922,80 @@
         <p:spPr>
           <a:xfrm xmlns:a="http://schemas.openxmlformats.org/drawingml/2006/main">
             <a:off x="9525000" y="3143250"/>
-            <a:ext cx="4000500" cy="2571750"/>
+            <a:ext cx="4000500" cy="1790700"/>
           </a:xfrm>
           <a:prstGeom xmlns:a="http://schemas.openxmlformats.org/drawingml/2006/main" prst="rect">
             <a:avLst/>
           </a:prstGeom>
         </p:spPr>
       </p:pic>
-      <p:sp>
-        <p:nvSpPr>
-          <p:cNvPr id="13" name="promotion-image-rule"/>
+      <p:pic>
+        <p:nvPicPr>
+          <p:cNvPr id="13" name="promotion-detail-frame-one">
+            <a:extLst xmlns:a="http://schemas.openxmlformats.org/drawingml/2006/main">
+              <a:ext uri="{C183D7F6-B498-43B3-948B-1728B52AA6E4}">
+                <adec:decorative xmlns:adec="http://schemas.microsoft.com/office/drawing/2017/decorative" val="1"/>
+              </a:ext>
+            </a:extLst>
+          </p:cNvPr>
+          <p:cNvPicPr/>
+          <p:nvPr/>
+        </p:nvPicPr>
+        <p:blipFill>
+          <a:blip xmlns:r="http://schemas.openxmlformats.org/officeDocument/2006/relationships" xmlns:a="http://schemas.openxmlformats.org/drawingml/2006/main" r:embed="rIdOfficeKitImagefff481b85b8743d2_1"/>
+          <a:srcRect xmlns:a="http://schemas.openxmlformats.org/drawingml/2006/main" l="0" t="34394" r="0" b="34394"/>
+          <a:stretch xmlns:a="http://schemas.openxmlformats.org/drawingml/2006/main">
+            <a:fillRect/>
+          </a:stretch>
+        </p:blipFill>
+        <p:spPr>
+          <a:xfrm xmlns:a="http://schemas.openxmlformats.org/drawingml/2006/main">
+            <a:off x="9525000" y="5162550"/>
+            <a:ext cx="1924050" cy="1066800"/>
+          </a:xfrm>
+          <a:prstGeom xmlns:a="http://schemas.openxmlformats.org/drawingml/2006/main" prst="rect">
+            <a:avLst/>
+          </a:prstGeom>
+        </p:spPr>
+      </p:pic>
+      <p:pic>
+        <p:nvPicPr>
+          <p:cNvPr id="14" name="promotion-detail-frame-two">
+            <a:extLst xmlns:a="http://schemas.openxmlformats.org/drawingml/2006/main">
+              <a:ext uri="{C183D7F6-B498-43B3-948B-1728B52AA6E4}">
+                <adec:decorative xmlns:adec="http://schemas.microsoft.com/office/drawing/2017/decorative" val="1"/>
+              </a:ext>
+            </a:extLst>
+          </p:cNvPr>
+          <p:cNvPicPr/>
+          <p:nvPr/>
+        </p:nvPicPr>
+        <p:blipFill>
+          <a:blip xmlns:r="http://schemas.openxmlformats.org/officeDocument/2006/relationships" xmlns:a="http://schemas.openxmlformats.org/drawingml/2006/main" r:embed="rIdOfficeKitImagee930dcb9c6b95953_1"/>
+          <a:srcRect xmlns:a="http://schemas.openxmlformats.org/drawingml/2006/main" l="0" t="34406" r="0" b="34406"/>
+          <a:stretch xmlns:a="http://schemas.openxmlformats.org/drawingml/2006/main">
+            <a:fillRect/>
+          </a:stretch>
+        </p:blipFill>
+        <p:spPr>
+          <a:xfrm xmlns:a="http://schemas.openxmlformats.org/drawingml/2006/main">
+            <a:off x="11601450" y="5162550"/>
+            <a:ext cx="1924050" cy="1066800"/>
+          </a:xfrm>
+          <a:prstGeom xmlns:a="http://schemas.openxmlformats.org/drawingml/2006/main" prst="rect">
+            <a:avLst/>
+          </a:prstGeom>
+        </p:spPr>
+      </p:pic>
+      <p:sp>
+        <p:nvSpPr>
+          <p:cNvPr id="15" name="promotion-image-rule"/>
           <p:cNvSpPr/>
           <p:nvPr/>
         </p:nvSpPr>
         <p:spPr>
           <a:xfrm xmlns:a="http://schemas.openxmlformats.org/drawingml/2006/main">
-            <a:off x="9525000" y="5905500"/>
+            <a:off x="9525000" y="6438900"/>
             <a:ext cx="4000500" cy="0"/>
           </a:xfrm>
           <a:prstGeom xmlns:a="http://schemas.openxmlformats.org/drawingml/2006/main" prst="line">
@@ -965,13 +1023,13 @@
       </p:sp>
       <p:sp>
         <p:nvSpPr>
-          <p:cNvPr id="14" name="promotion-image-label"/>
-          <p:cNvSpPr txBox="1"/>
-          <p:nvPr/>
-        </p:nvSpPr>
-        <p:spPr>
-          <a:xfrm xmlns:a="http://schemas.openxmlformats.org/drawingml/2006/main">
-            <a:off x="9525000" y="6153150"/>
+          <p:cNvPr id="16" name="promotion-image-label"/>
+          <p:cNvSpPr txBox="1"/>
+          <p:nvPr/>
+        </p:nvSpPr>
+        <p:spPr>
+          <a:xfrm xmlns:a="http://schemas.openxmlformats.org/drawingml/2006/main">
+            <a:off x="9525000" y="6667500"/>
             <a:ext cx="4000500" cy="247650"/>
           </a:xfrm>
           <a:prstGeom xmlns:a="http://schemas.openxmlformats.org/drawingml/2006/main" prst="rect">
@@ -1002,7 +1060,7 @@
       </p:sp>
       <p:sp>
         <p:nvSpPr>
-          <p:cNvPr id="15" name="source"/>
+          <p:cNvPr id="17" name="source"/>
           <p:cNvSpPr txBox="1"/>
           <p:nvPr/>
         </p:nvSpPr>
@@ -1039,7 +1097,7 @@
       </p:sp>
       <p:sp>
         <p:nvSpPr>
-          <p:cNvPr id="16" name="page-number"/>
+          <p:cNvPr id="18" name="page-number"/>
           <p:cNvSpPr txBox="1"/>
           <p:nvPr/>
         </p:nvSpPr>
@@ -1149,7 +1207,7 @@
           <p:nvPr/>
         </p:nvPicPr>
         <p:blipFill>
-          <a:blip xmlns:r="http://schemas.openxmlformats.org/officeDocument/2006/relationships" xmlns:a="http://schemas.openxmlformats.org/drawingml/2006/main" r:embed="rIdOfficeKitImagefff481b85b8743d2_1"/>
+          <a:blip xmlns:r="http://schemas.openxmlformats.org/officeDocument/2006/relationships" xmlns:a="http://schemas.openxmlformats.org/drawingml/2006/main" r:embed="rIdOfficeKitImagefdea69a11126d29b_1"/>
           <a:srcRect xmlns:a="http://schemas.openxmlformats.org/drawingml/2006/main" l="0" t="47256" r="0" b="47256"/>
           <a:stretch xmlns:a="http://schemas.openxmlformats.org/drawingml/2006/main">
             <a:fillRect/>
@@ -1361,8 +1419,8 @@
           <p:nvPr/>
         </p:nvPicPr>
         <p:blipFill>
-          <a:blip xmlns:r="http://schemas.openxmlformats.org/officeDocument/2006/relationships" xmlns:a="http://schemas.openxmlformats.org/drawingml/2006/main" r:embed="rIdOfficeKitImagee930dcb9c6b95953_1"/>
-          <a:srcRect xmlns:a="http://schemas.openxmlformats.org/drawingml/2006/main" l="0" t="30757" r="0" b="30757"/>
+          <a:blip xmlns:r="http://schemas.openxmlformats.org/officeDocument/2006/relationships" xmlns:a="http://schemas.openxmlformats.org/drawingml/2006/main" r:embed="rIdOfficeKitImagee977612ad933c986_1"/>
+          <a:srcRect xmlns:a="http://schemas.openxmlformats.org/drawingml/2006/main" l="0" t="30742" r="0" b="30742"/>
           <a:stretch xmlns:a="http://schemas.openxmlformats.org/drawingml/2006/main">
             <a:fillRect/>
           </a:stretch>
@@ -1390,7 +1448,7 @@
           <p:nvPr/>
         </p:nvPicPr>
         <p:blipFill>
-          <a:blip xmlns:r="http://schemas.openxmlformats.org/officeDocument/2006/relationships" xmlns:a="http://schemas.openxmlformats.org/drawingml/2006/main" r:embed="rIdOfficeKitImagefdea69a11126d29b_1"/>
+          <a:blip xmlns:r="http://schemas.openxmlformats.org/officeDocument/2006/relationships" xmlns:a="http://schemas.openxmlformats.org/drawingml/2006/main" r:embed="rIdOfficeKitImage6785cc6781fd2511_1"/>
           <a:srcRect xmlns:a="http://schemas.openxmlformats.org/drawingml/2006/main" l="0" t="31927" r="0" b="31927"/>
           <a:stretch xmlns:a="http://schemas.openxmlformats.org/drawingml/2006/main">
             <a:fillRect/>
@@ -1419,8 +1477,8 @@
           <p:nvPr/>
         </p:nvPicPr>
         <p:blipFill>
-          <a:blip xmlns:r="http://schemas.openxmlformats.org/officeDocument/2006/relationships" xmlns:a="http://schemas.openxmlformats.org/drawingml/2006/main" r:embed="rIdOfficeKitImagee977612ad933c986_1"/>
-          <a:srcRect xmlns:a="http://schemas.openxmlformats.org/drawingml/2006/main" l="0" t="31927" r="0" b="31927"/>
+          <a:blip xmlns:r="http://schemas.openxmlformats.org/officeDocument/2006/relationships" xmlns:a="http://schemas.openxmlformats.org/drawingml/2006/main" r:embed="rIdOfficeKitImaged96cedd8678b85ac_1"/>
+          <a:srcRect xmlns:a="http://schemas.openxmlformats.org/drawingml/2006/main" l="0" t="31941" r="0" b="31941"/>
           <a:stretch xmlns:a="http://schemas.openxmlformats.org/drawingml/2006/main">
             <a:fillRect/>
           </a:stretch>
@@ -1448,8 +1506,8 @@
           <p:nvPr/>
         </p:nvPicPr>
         <p:blipFill>
-          <a:blip xmlns:r="http://schemas.openxmlformats.org/officeDocument/2006/relationships" xmlns:a="http://schemas.openxmlformats.org/drawingml/2006/main" r:embed="rIdOfficeKitImage6785cc6781fd2511_1"/>
-          <a:srcRect xmlns:a="http://schemas.openxmlformats.org/drawingml/2006/main" l="0" t="31927" r="0" b="31927"/>
+          <a:blip xmlns:r="http://schemas.openxmlformats.org/officeDocument/2006/relationships" xmlns:a="http://schemas.openxmlformats.org/drawingml/2006/main" r:embed="rIdOfficeKitImage35d943dc999c7d05_1"/>
+          <a:srcRect xmlns:a="http://schemas.openxmlformats.org/drawingml/2006/main" l="0" t="31941" r="0" b="31941"/>
           <a:stretch xmlns:a="http://schemas.openxmlformats.org/drawingml/2006/main">
             <a:fillRect/>
           </a:stretch>
@@ -1477,14 +1535,14 @@
           <p:nvPr/>
         </p:nvPicPr>
         <p:blipFill>
-          <a:blip xmlns:r="http://schemas.openxmlformats.org/officeDocument/2006/relationships" xmlns:a="http://schemas.openxmlformats.org/drawingml/2006/main" r:embed="rIdOfficeKitImaged96cedd8678b85ac_1"/>
+          <a:blip xmlns:r="http://schemas.openxmlformats.org/officeDocument/2006/relationships" xmlns:a="http://schemas.openxmlformats.org/drawingml/2006/main" r:embed="rIdOfficeKitImagedf986129197cef3b_1"/>
           <a:srcRect xmlns:a="http://schemas.openxmlformats.org/drawingml/2006/main" l="0" t="31941" r="0" b="31941"/>
           <a:stretch xmlns:a="http://schemas.openxmlformats.org/drawingml/2006/main">
             <a:fillRect/>
           </a:stretch>
         </p:blipFill>
         <p:spPr>
-          <a:xfrm xmlns:a="http://schemas.openxmlformats.org/drawingml/2006/main">
+          <a:xfrm xmlns:a="http://schemas.openxmlformats.org/drawingml/2006/main" flipH="1">
             <a:off x="6877050" y="4648200"/>
             <a:ext cx="1809750" cy="1162050"/>
           </a:xfrm>
@@ -1826,7 +1884,7 @@
           <p:nvPr/>
         </p:nvPicPr>
         <p:blipFill>
-          <a:blip xmlns:r="http://schemas.openxmlformats.org/officeDocument/2006/relationships" xmlns:a="http://schemas.openxmlformats.org/drawingml/2006/main" r:embed="rIdOfficeKitImage35d943dc999c7d05_1"/>
+          <a:blip xmlns:r="http://schemas.openxmlformats.org/officeDocument/2006/relationships" xmlns:a="http://schemas.openxmlformats.org/drawingml/2006/main" r:embed="rIdOfficeKitImage84ff976f39aab728_1"/>
           <a:srcRect xmlns:a="http://schemas.openxmlformats.org/drawingml/2006/main" l="0" t="47258" r="0" b="47258"/>
           <a:stretch xmlns:a="http://schemas.openxmlformats.org/drawingml/2006/main">
             <a:fillRect/>
@@ -2038,14 +2096,14 @@
           <p:nvPr/>
         </p:nvPicPr>
         <p:blipFill>
-          <a:blip xmlns:r="http://schemas.openxmlformats.org/officeDocument/2006/relationships" xmlns:a="http://schemas.openxmlformats.org/drawingml/2006/main" r:embed="rIdOfficeKitImagedf986129197cef3b_1"/>
-          <a:srcRect xmlns:a="http://schemas.openxmlformats.org/drawingml/2006/main" l="0" t="31971" r="0" b="31971"/>
+          <a:blip xmlns:r="http://schemas.openxmlformats.org/officeDocument/2006/relationships" xmlns:a="http://schemas.openxmlformats.org/drawingml/2006/main" r:embed="rIdOfficeKitImagecb4e39f1eccfa545_1"/>
+          <a:srcRect xmlns:a="http://schemas.openxmlformats.org/drawingml/2006/main" l="0" t="31957" r="0" b="31957"/>
           <a:stretch xmlns:a="http://schemas.openxmlformats.org/drawingml/2006/main">
             <a:fillRect/>
           </a:stretch>
         </p:blipFill>
         <p:spPr>
-          <a:xfrm xmlns:a="http://schemas.openxmlformats.org/drawingml/2006/main" flipH="1">
+          <a:xfrm xmlns:a="http://schemas.openxmlformats.org/drawingml/2006/main">
             <a:off x="990600" y="3162300"/>
             <a:ext cx="3714750" cy="2381250"/>
           </a:xfrm>
@@ -2067,7 +2125,7 @@
           <p:nvPr/>
         </p:nvPicPr>
         <p:blipFill>
-          <a:blip xmlns:r="http://schemas.openxmlformats.org/officeDocument/2006/relationships" xmlns:a="http://schemas.openxmlformats.org/drawingml/2006/main" r:embed="rIdOfficeKitImage84ff976f39aab728_1"/>
+          <a:blip xmlns:r="http://schemas.openxmlformats.org/officeDocument/2006/relationships" xmlns:a="http://schemas.openxmlformats.org/drawingml/2006/main" r:embed="rIdOfficeKitImage06e55191024fa458_1"/>
           <a:srcRect xmlns:a="http://schemas.openxmlformats.org/drawingml/2006/main" l="0" t="32347" r="0" b="32347"/>
           <a:stretch xmlns:a="http://schemas.openxmlformats.org/drawingml/2006/main">
             <a:fillRect/>
@@ -2096,8 +2154,8 @@
           <p:nvPr/>
         </p:nvPicPr>
         <p:blipFill>
-          <a:blip xmlns:r="http://schemas.openxmlformats.org/officeDocument/2006/relationships" xmlns:a="http://schemas.openxmlformats.org/drawingml/2006/main" r:embed="rIdOfficeKitImage10e4539a68783891_1"/>
-          <a:srcRect xmlns:a="http://schemas.openxmlformats.org/drawingml/2006/main" l="0" t="32347" r="0" b="32347"/>
+          <a:blip xmlns:r="http://schemas.openxmlformats.org/officeDocument/2006/relationships" xmlns:a="http://schemas.openxmlformats.org/drawingml/2006/main" r:embed="rIdOfficeKitImage7acdacea277813e8_1"/>
+          <a:srcRect xmlns:a="http://schemas.openxmlformats.org/drawingml/2006/main" l="0" t="32333" r="0" b="32333"/>
           <a:stretch xmlns:a="http://schemas.openxmlformats.org/drawingml/2006/main">
             <a:fillRect/>
           </a:stretch>
@@ -2125,7 +2183,7 @@
           <p:nvPr/>
         </p:nvPicPr>
         <p:blipFill>
-          <a:blip xmlns:r="http://schemas.openxmlformats.org/officeDocument/2006/relationships" xmlns:a="http://schemas.openxmlformats.org/drawingml/2006/main" r:embed="rIdOfficeKitImage5e425a7c66b022d4_1"/>
+          <a:blip xmlns:r="http://schemas.openxmlformats.org/officeDocument/2006/relationships" xmlns:a="http://schemas.openxmlformats.org/drawingml/2006/main" r:embed="rIdOfficeKitImageb5a7d66fe0ba8bb7_1"/>
           <a:srcRect xmlns:a="http://schemas.openxmlformats.org/drawingml/2006/main" l="0" t="32347" r="0" b="32347"/>
           <a:stretch xmlns:a="http://schemas.openxmlformats.org/drawingml/2006/main">
             <a:fillRect/>
@@ -2154,7 +2212,7 @@
           <p:nvPr/>
         </p:nvPicPr>
         <p:blipFill>
-          <a:blip xmlns:r="http://schemas.openxmlformats.org/officeDocument/2006/relationships" xmlns:a="http://schemas.openxmlformats.org/drawingml/2006/main" r:embed="rIdOfficeKitImagee231e9493e535fbe_1"/>
+          <a:blip xmlns:r="http://schemas.openxmlformats.org/officeDocument/2006/relationships" xmlns:a="http://schemas.openxmlformats.org/drawingml/2006/main" r:embed="rIdOfficeKitImagea68aebf613832e5f_1"/>
           <a:srcRect xmlns:a="http://schemas.openxmlformats.org/drawingml/2006/main" l="0" t="32347" r="0" b="32347"/>
           <a:stretch xmlns:a="http://schemas.openxmlformats.org/drawingml/2006/main">
             <a:fillRect/>
@@ -2396,7 +2454,7 @@
     <p:bg>
       <p:bgPr>
         <a:blipFill xmlns:a="http://schemas.openxmlformats.org/drawingml/2006/main">
-          <a:blip xmlns:r="http://schemas.openxmlformats.org/officeDocument/2006/relationships" r:embed="rIdOfficeKitImagefff481b85b8743d2_1"/>
+          <a:blip xmlns:r="http://schemas.openxmlformats.org/officeDocument/2006/relationships" r:embed="rIdOfficeKitImagea5c00489db854fa2_1"/>
           <a:stretch>
             <a:fillRect/>
           </a:stretch>
@@ -2823,8 +2881,8 @@
           <p:nvPr/>
         </p:nvPicPr>
         <p:blipFill>
-          <a:blip xmlns:r="http://schemas.openxmlformats.org/officeDocument/2006/relationships" xmlns:a="http://schemas.openxmlformats.org/drawingml/2006/main" r:embed="rIdOfficeKitImagee930dcb9c6b95953_1"/>
-          <a:srcRect xmlns:a="http://schemas.openxmlformats.org/drawingml/2006/main" l="0" t="47258" r="0" b="47258"/>
+          <a:blip xmlns:r="http://schemas.openxmlformats.org/officeDocument/2006/relationships" xmlns:a="http://schemas.openxmlformats.org/drawingml/2006/main" r:embed="rIdOfficeKitImage3635f59fd49ef0e6_1"/>
+          <a:srcRect xmlns:a="http://schemas.openxmlformats.org/drawingml/2006/main" l="0" t="47256" r="0" b="47256"/>
           <a:stretch xmlns:a="http://schemas.openxmlformats.org/drawingml/2006/main">
             <a:fillRect/>
           </a:stretch>

--- a/skills/presentation-template-library/skills/artifact-template-river-handbook/assets/reference.pptx
+++ b/skills/presentation-template-library/skills/artifact-template-river-handbook/assets/reference.pptx
@@ -200,7 +200,7 @@
     <p:bg>
       <p:bgPr>
         <a:blipFill xmlns:a="http://schemas.openxmlformats.org/drawingml/2006/main">
-          <a:blip xmlns:r="http://schemas.openxmlformats.org/officeDocument/2006/relationships" r:embed="rIdOfficeKitImage10e4539a68783891_1"/>
+          <a:blip xmlns:r="http://schemas.openxmlformats.org/officeDocument/2006/relationships" r:embed="rIdOfficeKitImage1b6b179a3c4fe9dd_1"/>
           <a:stretch>
             <a:fillRect/>
           </a:stretch>
@@ -590,7 +590,7 @@
           <p:nvPr/>
         </p:nvPicPr>
         <p:blipFill>
-          <a:blip xmlns:r="http://schemas.openxmlformats.org/officeDocument/2006/relationships" xmlns:a="http://schemas.openxmlformats.org/drawingml/2006/main" r:embed="rIdOfficeKitImage5e425a7c66b022d4_1"/>
+          <a:blip xmlns:r="http://schemas.openxmlformats.org/officeDocument/2006/relationships" xmlns:a="http://schemas.openxmlformats.org/drawingml/2006/main" r:embed="rIdOfficeKitImage10e4539a68783891_1"/>
           <a:srcRect xmlns:a="http://schemas.openxmlformats.org/drawingml/2006/main" l="0" t="47258" r="0" b="47258"/>
           <a:stretch xmlns:a="http://schemas.openxmlformats.org/drawingml/2006/main">
             <a:fillRect/>
@@ -913,7 +913,7 @@
           <p:nvPr/>
         </p:nvPicPr>
         <p:blipFill>
-          <a:blip xmlns:r="http://schemas.openxmlformats.org/officeDocument/2006/relationships" xmlns:a="http://schemas.openxmlformats.org/drawingml/2006/main" r:embed="rIdOfficeKitImagee231e9493e535fbe_1"/>
+          <a:blip xmlns:r="http://schemas.openxmlformats.org/officeDocument/2006/relationships" xmlns:a="http://schemas.openxmlformats.org/drawingml/2006/main" r:embed="rIdOfficeKitImage5e425a7c66b022d4_1"/>
           <a:srcRect xmlns:a="http://schemas.openxmlformats.org/drawingml/2006/main" l="0" t="37411" r="0" b="37411"/>
           <a:stretch xmlns:a="http://schemas.openxmlformats.org/drawingml/2006/main">
             <a:fillRect/>
@@ -942,8 +942,8 @@
           <p:nvPr/>
         </p:nvPicPr>
         <p:blipFill>
-          <a:blip xmlns:r="http://schemas.openxmlformats.org/officeDocument/2006/relationships" xmlns:a="http://schemas.openxmlformats.org/drawingml/2006/main" r:embed="rIdOfficeKitImagefff481b85b8743d2_1"/>
-          <a:srcRect xmlns:a="http://schemas.openxmlformats.org/drawingml/2006/main" l="0" t="34394" r="0" b="34394"/>
+          <a:blip xmlns:r="http://schemas.openxmlformats.org/officeDocument/2006/relationships" xmlns:a="http://schemas.openxmlformats.org/drawingml/2006/main" r:embed="rIdOfficeKitImagee231e9493e535fbe_1"/>
+          <a:srcRect xmlns:a="http://schemas.openxmlformats.org/drawingml/2006/main" l="0" t="34406" r="0" b="34406"/>
           <a:stretch xmlns:a="http://schemas.openxmlformats.org/drawingml/2006/main">
             <a:fillRect/>
           </a:stretch>
@@ -971,8 +971,8 @@
           <p:nvPr/>
         </p:nvPicPr>
         <p:blipFill>
-          <a:blip xmlns:r="http://schemas.openxmlformats.org/officeDocument/2006/relationships" xmlns:a="http://schemas.openxmlformats.org/drawingml/2006/main" r:embed="rIdOfficeKitImagee930dcb9c6b95953_1"/>
-          <a:srcRect xmlns:a="http://schemas.openxmlformats.org/drawingml/2006/main" l="0" t="34406" r="0" b="34406"/>
+          <a:blip xmlns:r="http://schemas.openxmlformats.org/officeDocument/2006/relationships" xmlns:a="http://schemas.openxmlformats.org/drawingml/2006/main" r:embed="rIdOfficeKitImagefff481b85b8743d2_1"/>
+          <a:srcRect xmlns:a="http://schemas.openxmlformats.org/drawingml/2006/main" l="0" t="34394" r="0" b="34394"/>
           <a:stretch xmlns:a="http://schemas.openxmlformats.org/drawingml/2006/main">
             <a:fillRect/>
           </a:stretch>
@@ -1207,8 +1207,8 @@
           <p:nvPr/>
         </p:nvPicPr>
         <p:blipFill>
-          <a:blip xmlns:r="http://schemas.openxmlformats.org/officeDocument/2006/relationships" xmlns:a="http://schemas.openxmlformats.org/drawingml/2006/main" r:embed="rIdOfficeKitImagefdea69a11126d29b_1"/>
-          <a:srcRect xmlns:a="http://schemas.openxmlformats.org/drawingml/2006/main" l="0" t="47256" r="0" b="47256"/>
+          <a:blip xmlns:r="http://schemas.openxmlformats.org/officeDocument/2006/relationships" xmlns:a="http://schemas.openxmlformats.org/drawingml/2006/main" r:embed="rIdOfficeKitImageff039bf2f181c5d1_1"/>
+          <a:srcRect xmlns:a="http://schemas.openxmlformats.org/drawingml/2006/main" l="0" t="47258" r="0" b="47258"/>
           <a:stretch xmlns:a="http://schemas.openxmlformats.org/drawingml/2006/main">
             <a:fillRect/>
           </a:stretch>
@@ -1419,8 +1419,8 @@
           <p:nvPr/>
         </p:nvPicPr>
         <p:blipFill>
-          <a:blip xmlns:r="http://schemas.openxmlformats.org/officeDocument/2006/relationships" xmlns:a="http://schemas.openxmlformats.org/drawingml/2006/main" r:embed="rIdOfficeKitImagee977612ad933c986_1"/>
-          <a:srcRect xmlns:a="http://schemas.openxmlformats.org/drawingml/2006/main" l="0" t="30742" r="0" b="30742"/>
+          <a:blip xmlns:r="http://schemas.openxmlformats.org/officeDocument/2006/relationships" xmlns:a="http://schemas.openxmlformats.org/drawingml/2006/main" r:embed="rIdOfficeKitImagee930dcb9c6b95953_1"/>
+          <a:srcRect xmlns:a="http://schemas.openxmlformats.org/drawingml/2006/main" l="0" t="30757" r="0" b="30757"/>
           <a:stretch xmlns:a="http://schemas.openxmlformats.org/drawingml/2006/main">
             <a:fillRect/>
           </a:stretch>
@@ -1448,7 +1448,7 @@
           <p:nvPr/>
         </p:nvPicPr>
         <p:blipFill>
-          <a:blip xmlns:r="http://schemas.openxmlformats.org/officeDocument/2006/relationships" xmlns:a="http://schemas.openxmlformats.org/drawingml/2006/main" r:embed="rIdOfficeKitImage6785cc6781fd2511_1"/>
+          <a:blip xmlns:r="http://schemas.openxmlformats.org/officeDocument/2006/relationships" xmlns:a="http://schemas.openxmlformats.org/drawingml/2006/main" r:embed="rIdOfficeKitImagefdea69a11126d29b_1"/>
           <a:srcRect xmlns:a="http://schemas.openxmlformats.org/drawingml/2006/main" l="0" t="31927" r="0" b="31927"/>
           <a:stretch xmlns:a="http://schemas.openxmlformats.org/drawingml/2006/main">
             <a:fillRect/>
@@ -1477,8 +1477,8 @@
           <p:nvPr/>
         </p:nvPicPr>
         <p:blipFill>
-          <a:blip xmlns:r="http://schemas.openxmlformats.org/officeDocument/2006/relationships" xmlns:a="http://schemas.openxmlformats.org/drawingml/2006/main" r:embed="rIdOfficeKitImaged96cedd8678b85ac_1"/>
-          <a:srcRect xmlns:a="http://schemas.openxmlformats.org/drawingml/2006/main" l="0" t="31941" r="0" b="31941"/>
+          <a:blip xmlns:r="http://schemas.openxmlformats.org/officeDocument/2006/relationships" xmlns:a="http://schemas.openxmlformats.org/drawingml/2006/main" r:embed="rIdOfficeKitImagee977612ad933c986_1"/>
+          <a:srcRect xmlns:a="http://schemas.openxmlformats.org/drawingml/2006/main" l="0" t="31927" r="0" b="31927"/>
           <a:stretch xmlns:a="http://schemas.openxmlformats.org/drawingml/2006/main">
             <a:fillRect/>
           </a:stretch>
@@ -1506,7 +1506,7 @@
           <p:nvPr/>
         </p:nvPicPr>
         <p:blipFill>
-          <a:blip xmlns:r="http://schemas.openxmlformats.org/officeDocument/2006/relationships" xmlns:a="http://schemas.openxmlformats.org/drawingml/2006/main" r:embed="rIdOfficeKitImage35d943dc999c7d05_1"/>
+          <a:blip xmlns:r="http://schemas.openxmlformats.org/officeDocument/2006/relationships" xmlns:a="http://schemas.openxmlformats.org/drawingml/2006/main" r:embed="rIdOfficeKitImagec49ddd99c59beda0_1"/>
           <a:srcRect xmlns:a="http://schemas.openxmlformats.org/drawingml/2006/main" l="0" t="31941" r="0" b="31941"/>
           <a:stretch xmlns:a="http://schemas.openxmlformats.org/drawingml/2006/main">
             <a:fillRect/>
@@ -1535,14 +1535,14 @@
           <p:nvPr/>
         </p:nvPicPr>
         <p:blipFill>
-          <a:blip xmlns:r="http://schemas.openxmlformats.org/officeDocument/2006/relationships" xmlns:a="http://schemas.openxmlformats.org/drawingml/2006/main" r:embed="rIdOfficeKitImagedf986129197cef3b_1"/>
-          <a:srcRect xmlns:a="http://schemas.openxmlformats.org/drawingml/2006/main" l="0" t="31941" r="0" b="31941"/>
+          <a:blip xmlns:r="http://schemas.openxmlformats.org/officeDocument/2006/relationships" xmlns:a="http://schemas.openxmlformats.org/drawingml/2006/main" r:embed="rIdOfficeKitImage6785cc6781fd2511_1"/>
+          <a:srcRect xmlns:a="http://schemas.openxmlformats.org/drawingml/2006/main" l="0" t="31927" r="0" b="31927"/>
           <a:stretch xmlns:a="http://schemas.openxmlformats.org/drawingml/2006/main">
             <a:fillRect/>
           </a:stretch>
         </p:blipFill>
         <p:spPr>
-          <a:xfrm xmlns:a="http://schemas.openxmlformats.org/drawingml/2006/main" flipH="1">
+          <a:xfrm xmlns:a="http://schemas.openxmlformats.org/drawingml/2006/main">
             <a:off x="6877050" y="4648200"/>
             <a:ext cx="1809750" cy="1162050"/>
           </a:xfrm>
@@ -1884,7 +1884,7 @@
           <p:nvPr/>
         </p:nvPicPr>
         <p:blipFill>
-          <a:blip xmlns:r="http://schemas.openxmlformats.org/officeDocument/2006/relationships" xmlns:a="http://schemas.openxmlformats.org/drawingml/2006/main" r:embed="rIdOfficeKitImage84ff976f39aab728_1"/>
+          <a:blip xmlns:r="http://schemas.openxmlformats.org/officeDocument/2006/relationships" xmlns:a="http://schemas.openxmlformats.org/drawingml/2006/main" r:embed="rIdOfficeKitImagefb0d559f34167a51_1"/>
           <a:srcRect xmlns:a="http://schemas.openxmlformats.org/drawingml/2006/main" l="0" t="47258" r="0" b="47258"/>
           <a:stretch xmlns:a="http://schemas.openxmlformats.org/drawingml/2006/main">
             <a:fillRect/>
@@ -2096,8 +2096,8 @@
           <p:nvPr/>
         </p:nvPicPr>
         <p:blipFill>
-          <a:blip xmlns:r="http://schemas.openxmlformats.org/officeDocument/2006/relationships" xmlns:a="http://schemas.openxmlformats.org/drawingml/2006/main" r:embed="rIdOfficeKitImagecb4e39f1eccfa545_1"/>
-          <a:srcRect xmlns:a="http://schemas.openxmlformats.org/drawingml/2006/main" l="0" t="31957" r="0" b="31957"/>
+          <a:blip xmlns:r="http://schemas.openxmlformats.org/officeDocument/2006/relationships" xmlns:a="http://schemas.openxmlformats.org/drawingml/2006/main" r:embed="rIdOfficeKitImaged96cedd8678b85ac_1"/>
+          <a:srcRect xmlns:a="http://schemas.openxmlformats.org/drawingml/2006/main" l="0" t="31971" r="0" b="31971"/>
           <a:stretch xmlns:a="http://schemas.openxmlformats.org/drawingml/2006/main">
             <a:fillRect/>
           </a:stretch>
@@ -2125,7 +2125,7 @@
           <p:nvPr/>
         </p:nvPicPr>
         <p:blipFill>
-          <a:blip xmlns:r="http://schemas.openxmlformats.org/officeDocument/2006/relationships" xmlns:a="http://schemas.openxmlformats.org/drawingml/2006/main" r:embed="rIdOfficeKitImage06e55191024fa458_1"/>
+          <a:blip xmlns:r="http://schemas.openxmlformats.org/officeDocument/2006/relationships" xmlns:a="http://schemas.openxmlformats.org/drawingml/2006/main" r:embed="rIdOfficeKitImage35d943dc999c7d05_1"/>
           <a:srcRect xmlns:a="http://schemas.openxmlformats.org/drawingml/2006/main" l="0" t="32347" r="0" b="32347"/>
           <a:stretch xmlns:a="http://schemas.openxmlformats.org/drawingml/2006/main">
             <a:fillRect/>
@@ -2154,14 +2154,14 @@
           <p:nvPr/>
         </p:nvPicPr>
         <p:blipFill>
-          <a:blip xmlns:r="http://schemas.openxmlformats.org/officeDocument/2006/relationships" xmlns:a="http://schemas.openxmlformats.org/drawingml/2006/main" r:embed="rIdOfficeKitImage7acdacea277813e8_1"/>
-          <a:srcRect xmlns:a="http://schemas.openxmlformats.org/drawingml/2006/main" l="0" t="32333" r="0" b="32333"/>
+          <a:blip xmlns:r="http://schemas.openxmlformats.org/officeDocument/2006/relationships" xmlns:a="http://schemas.openxmlformats.org/drawingml/2006/main" r:embed="rIdOfficeKitImagedf986129197cef3b_1"/>
+          <a:srcRect xmlns:a="http://schemas.openxmlformats.org/drawingml/2006/main" l="0" t="32347" r="0" b="32347"/>
           <a:stretch xmlns:a="http://schemas.openxmlformats.org/drawingml/2006/main">
             <a:fillRect/>
           </a:stretch>
         </p:blipFill>
         <p:spPr>
-          <a:xfrm xmlns:a="http://schemas.openxmlformats.org/drawingml/2006/main">
+          <a:xfrm xmlns:a="http://schemas.openxmlformats.org/drawingml/2006/main" flipH="1">
             <a:off x="6858000" y="3162300"/>
             <a:ext cx="1790700" cy="1123950"/>
           </a:xfrm>
@@ -2183,7 +2183,7 @@
           <p:nvPr/>
         </p:nvPicPr>
         <p:blipFill>
-          <a:blip xmlns:r="http://schemas.openxmlformats.org/officeDocument/2006/relationships" xmlns:a="http://schemas.openxmlformats.org/drawingml/2006/main" r:embed="rIdOfficeKitImageb5a7d66fe0ba8bb7_1"/>
+          <a:blip xmlns:r="http://schemas.openxmlformats.org/officeDocument/2006/relationships" xmlns:a="http://schemas.openxmlformats.org/drawingml/2006/main" r:embed="rIdOfficeKitImage84ff976f39aab728_1"/>
           <a:srcRect xmlns:a="http://schemas.openxmlformats.org/drawingml/2006/main" l="0" t="32347" r="0" b="32347"/>
           <a:stretch xmlns:a="http://schemas.openxmlformats.org/drawingml/2006/main">
             <a:fillRect/>
@@ -2212,8 +2212,8 @@
           <p:nvPr/>
         </p:nvPicPr>
         <p:blipFill>
-          <a:blip xmlns:r="http://schemas.openxmlformats.org/officeDocument/2006/relationships" xmlns:a="http://schemas.openxmlformats.org/drawingml/2006/main" r:embed="rIdOfficeKitImagea68aebf613832e5f_1"/>
-          <a:srcRect xmlns:a="http://schemas.openxmlformats.org/drawingml/2006/main" l="0" t="32347" r="0" b="32347"/>
+          <a:blip xmlns:r="http://schemas.openxmlformats.org/officeDocument/2006/relationships" xmlns:a="http://schemas.openxmlformats.org/drawingml/2006/main" r:embed="rIdOfficeKitImagecb4e39f1eccfa545_1"/>
+          <a:srcRect xmlns:a="http://schemas.openxmlformats.org/drawingml/2006/main" l="0" t="32333" r="0" b="32333"/>
           <a:stretch xmlns:a="http://schemas.openxmlformats.org/drawingml/2006/main">
             <a:fillRect/>
           </a:stretch>
@@ -2454,7 +2454,7 @@
     <p:bg>
       <p:bgPr>
         <a:blipFill xmlns:a="http://schemas.openxmlformats.org/drawingml/2006/main">
-          <a:blip xmlns:r="http://schemas.openxmlformats.org/officeDocument/2006/relationships" r:embed="rIdOfficeKitImagea5c00489db854fa2_1"/>
+          <a:blip xmlns:r="http://schemas.openxmlformats.org/officeDocument/2006/relationships" r:embed="rIdOfficeKitImage06e55191024fa458_1"/>
           <a:stretch>
             <a:fillRect/>
           </a:stretch>
@@ -2881,7 +2881,7 @@
           <p:nvPr/>
         </p:nvPicPr>
         <p:blipFill>
-          <a:blip xmlns:r="http://schemas.openxmlformats.org/officeDocument/2006/relationships" xmlns:a="http://schemas.openxmlformats.org/drawingml/2006/main" r:embed="rIdOfficeKitImage3635f59fd49ef0e6_1"/>
+          <a:blip xmlns:r="http://schemas.openxmlformats.org/officeDocument/2006/relationships" xmlns:a="http://schemas.openxmlformats.org/drawingml/2006/main" r:embed="rIdOfficeKitImage7acdacea277813e8_1"/>
           <a:srcRect xmlns:a="http://schemas.openxmlformats.org/drawingml/2006/main" l="0" t="47256" r="0" b="47256"/>
           <a:stretch xmlns:a="http://schemas.openxmlformats.org/drawingml/2006/main">
             <a:fillRect/>
